--- a/theory_06-representational-state-transfer/theory_06-representational-state-transfer.pptx
+++ b/theory_06-representational-state-transfer/theory_06-representational-state-transfer.pptx
@@ -5,7 +5,7 @@
     <p:sldMasterId id="2147483648" r:id="rId1"/>
   </p:sldMasterIdLst>
   <p:notesMasterIdLst>
-    <p:notesMasterId r:id="rId27"/>
+    <p:notesMasterId r:id="rId23"/>
   </p:notesMasterIdLst>
   <p:sldIdLst>
     <p:sldId id="256" r:id="rId2"/>
@@ -24,15 +24,11 @@
     <p:sldId id="266" r:id="rId15"/>
     <p:sldId id="267" r:id="rId16"/>
     <p:sldId id="270" r:id="rId17"/>
-    <p:sldId id="282" r:id="rId18"/>
-    <p:sldId id="284" r:id="rId19"/>
-    <p:sldId id="283" r:id="rId20"/>
-    <p:sldId id="272" r:id="rId21"/>
-    <p:sldId id="278" r:id="rId22"/>
-    <p:sldId id="275" r:id="rId23"/>
-    <p:sldId id="274" r:id="rId24"/>
-    <p:sldId id="281" r:id="rId25"/>
-    <p:sldId id="273" r:id="rId26"/>
+    <p:sldId id="272" r:id="rId18"/>
+    <p:sldId id="275" r:id="rId19"/>
+    <p:sldId id="274" r:id="rId20"/>
+    <p:sldId id="281" r:id="rId21"/>
+    <p:sldId id="273" r:id="rId22"/>
   </p:sldIdLst>
   <p:sldSz cx="12192000" cy="6858000"/>
   <p:notesSz cx="6858000" cy="9144000"/>
@@ -221,7 +217,7 @@
           <a:p>
             <a:fld id="{251090E0-FB0C-49E9-9864-9F53EABEA96F}" type="datetimeFigureOut">
               <a:rPr lang="en-GB" smtClean="0"/>
-              <a:t>14/04/2024</a:t>
+              <a:t>31/03/2025</a:t>
             </a:fld>
             <a:endParaRPr lang="en-GB"/>
           </a:p>
@@ -799,7 +795,13 @@
         </p:spPr>
         <p:txBody>
           <a:bodyPr/>
-          <a:lstStyle/>
+          <a:lstStyle>
+            <a:lvl1pPr>
+              <a:defRPr>
+                <a:latin typeface="Aptos" panose="020B0004020202020204" pitchFamily="34" charset="0"/>
+              </a:defRPr>
+            </a:lvl1pPr>
+          </a:lstStyle>
           <a:p>
             <a:r>
               <a:rPr lang="en-GB" noProof="0" dirty="0"/>
@@ -847,7 +849,33 @@
         </p:spPr>
         <p:txBody>
           <a:bodyPr/>
-          <a:lstStyle/>
+          <a:lstStyle>
+            <a:lvl1pPr>
+              <a:defRPr>
+                <a:latin typeface="Aptos" panose="020B0004020202020204" pitchFamily="34" charset="0"/>
+              </a:defRPr>
+            </a:lvl1pPr>
+            <a:lvl2pPr>
+              <a:defRPr>
+                <a:latin typeface="Aptos" panose="020B0004020202020204" pitchFamily="34" charset="0"/>
+              </a:defRPr>
+            </a:lvl2pPr>
+            <a:lvl3pPr>
+              <a:defRPr>
+                <a:latin typeface="Aptos" panose="020B0004020202020204" pitchFamily="34" charset="0"/>
+              </a:defRPr>
+            </a:lvl3pPr>
+            <a:lvl4pPr>
+              <a:defRPr>
+                <a:latin typeface="Aptos" panose="020B0004020202020204" pitchFamily="34" charset="0"/>
+              </a:defRPr>
+            </a:lvl4pPr>
+            <a:lvl5pPr>
+              <a:defRPr>
+                <a:latin typeface="Aptos" panose="020B0004020202020204" pitchFamily="34" charset="0"/>
+              </a:defRPr>
+            </a:lvl5pPr>
+          </a:lstStyle>
           <a:p>
             <a:pPr lvl="0"/>
             <a:r>
@@ -963,7 +991,33 @@
         </p:spPr>
         <p:txBody>
           <a:bodyPr/>
-          <a:lstStyle/>
+          <a:lstStyle>
+            <a:lvl1pPr>
+              <a:defRPr>
+                <a:latin typeface="Aptos" panose="020B0004020202020204" pitchFamily="34" charset="0"/>
+              </a:defRPr>
+            </a:lvl1pPr>
+            <a:lvl2pPr>
+              <a:defRPr>
+                <a:latin typeface="Aptos" panose="020B0004020202020204" pitchFamily="34" charset="0"/>
+              </a:defRPr>
+            </a:lvl2pPr>
+            <a:lvl3pPr>
+              <a:defRPr>
+                <a:latin typeface="Aptos" panose="020B0004020202020204" pitchFamily="34" charset="0"/>
+              </a:defRPr>
+            </a:lvl3pPr>
+            <a:lvl4pPr>
+              <a:defRPr>
+                <a:latin typeface="Aptos" panose="020B0004020202020204" pitchFamily="34" charset="0"/>
+              </a:defRPr>
+            </a:lvl4pPr>
+            <a:lvl5pPr>
+              <a:defRPr>
+                <a:latin typeface="Aptos" panose="020B0004020202020204" pitchFamily="34" charset="0"/>
+              </a:defRPr>
+            </a:lvl5pPr>
+          </a:lstStyle>
           <a:p>
             <a:pPr lvl="0"/>
             <a:r>
@@ -1074,10 +1128,17 @@
         <p:spPr/>
         <p:txBody>
           <a:bodyPr/>
-          <a:lstStyle/>
+          <a:lstStyle>
+            <a:lvl1pPr>
+              <a:defRPr>
+                <a:latin typeface="Aptos" panose="020B0004020202020204" pitchFamily="34" charset="0"/>
+              </a:defRPr>
+            </a:lvl1pPr>
+          </a:lstStyle>
           <a:p>
             <a:fld id="{31DE2C5B-556E-47B8-A792-024C2FCA4ACC}" type="slidenum">
               <a:rPr lang="en-GB" smtClean="0"/>
+              <a:pPr/>
               <a:t>‹#›</a:t>
             </a:fld>
             <a:endParaRPr lang="en-GB"/>
@@ -1130,7 +1191,9 @@
           <a:lstStyle/>
           <a:p>
             <a:pPr algn="ctr"/>
-            <a:endParaRPr lang="en-GB" dirty="0"/>
+            <a:endParaRPr lang="en-GB" dirty="0">
+              <a:latin typeface="Aptos" panose="020B0004020202020204" pitchFamily="34" charset="0"/>
+            </a:endParaRPr>
           </a:p>
         </p:txBody>
       </p:sp>
@@ -1187,7 +1250,9 @@
           <a:lstStyle>
             <a:lvl1pPr marL="0" indent="0" algn="ctr">
               <a:buNone/>
-              <a:defRPr sz="4800" b="1"/>
+              <a:defRPr sz="4800" b="1">
+                <a:latin typeface="Aptos" panose="020B0004020202020204" pitchFamily="34" charset="0"/>
+              </a:defRPr>
             </a:lvl1pPr>
             <a:lvl2pPr marL="457200" indent="0" algn="ctr">
               <a:buNone/>
@@ -1273,7 +1338,9 @@
           <a:lstStyle/>
           <a:p>
             <a:pPr algn="ctr"/>
-            <a:endParaRPr lang="en-GB" dirty="0"/>
+            <a:endParaRPr lang="en-GB" dirty="0">
+              <a:latin typeface="Aptos" panose="020B0004020202020204" pitchFamily="34" charset="0"/>
+            </a:endParaRPr>
           </a:p>
         </p:txBody>
       </p:sp>
@@ -1323,7 +1390,9 @@
           <a:lstStyle/>
           <a:p>
             <a:pPr algn="ctr"/>
-            <a:endParaRPr lang="en-GB" dirty="0"/>
+            <a:endParaRPr lang="en-GB" dirty="0">
+              <a:latin typeface="Aptos" panose="020B0004020202020204" pitchFamily="34" charset="0"/>
+            </a:endParaRPr>
           </a:p>
         </p:txBody>
       </p:sp>
@@ -1369,36 +1438,52 @@
           </a:lstStyle>
           <a:p>
             <a:r>
-              <a:rPr lang="it-IT" sz="2800" b="0" dirty="0" err="1"/>
+              <a:rPr lang="it-IT" sz="2800" b="0" dirty="0" err="1">
+                <a:latin typeface="Aptos" panose="020B0004020202020204" pitchFamily="34" charset="0"/>
+              </a:rPr>
               <a:t>Biomedical</a:t>
             </a:r>
             <a:r>
-              <a:rPr lang="it-IT" sz="2800" b="0" dirty="0"/>
+              <a:rPr lang="it-IT" sz="2800" b="0" dirty="0">
+                <a:latin typeface="Aptos" panose="020B0004020202020204" pitchFamily="34" charset="0"/>
+              </a:rPr>
               <a:t> </a:t>
             </a:r>
             <a:r>
-              <a:rPr lang="it-IT" sz="2800" b="0" dirty="0" err="1"/>
+              <a:rPr lang="it-IT" sz="2800" b="0" dirty="0" err="1">
+                <a:latin typeface="Aptos" panose="020B0004020202020204" pitchFamily="34" charset="0"/>
+              </a:rPr>
               <a:t>Wearable</a:t>
             </a:r>
             <a:r>
-              <a:rPr lang="it-IT" sz="2800" b="0" dirty="0"/>
+              <a:rPr lang="it-IT" sz="2800" b="0" dirty="0">
+                <a:latin typeface="Aptos" panose="020B0004020202020204" pitchFamily="34" charset="0"/>
+              </a:rPr>
               <a:t> Technologies </a:t>
             </a:r>
           </a:p>
           <a:p>
             <a:r>
-              <a:rPr lang="it-IT" sz="2800" b="0" dirty="0"/>
+              <a:rPr lang="it-IT" sz="2800" b="0" dirty="0">
+                <a:latin typeface="Aptos" panose="020B0004020202020204" pitchFamily="34" charset="0"/>
+              </a:rPr>
               <a:t>for Healthcare and </a:t>
             </a:r>
             <a:r>
-              <a:rPr lang="it-IT" sz="2800" b="0" dirty="0" err="1"/>
+              <a:rPr lang="it-IT" sz="2800" b="0" dirty="0" err="1">
+                <a:latin typeface="Aptos" panose="020B0004020202020204" pitchFamily="34" charset="0"/>
+              </a:rPr>
               <a:t>Wellbeing</a:t>
             </a:r>
             <a:r>
-              <a:rPr lang="it-IT" sz="2800" b="0" dirty="0"/>
+              <a:rPr lang="it-IT" sz="2800" b="0" dirty="0">
+                <a:latin typeface="Aptos" panose="020B0004020202020204" pitchFamily="34" charset="0"/>
+              </a:rPr>
               <a:t>  </a:t>
             </a:r>
-            <a:endParaRPr lang="en-GB" sz="2800" b="0" dirty="0"/>
+            <a:endParaRPr lang="en-GB" sz="2800" b="0" dirty="0">
+              <a:latin typeface="Aptos" panose="020B0004020202020204" pitchFamily="34" charset="0"/>
+            </a:endParaRPr>
           </a:p>
         </p:txBody>
       </p:sp>
@@ -1449,8 +1534,10 @@
               </a:spcAft>
             </a:pPr>
             <a:r>
-              <a:rPr lang="it-IT" sz="2800" dirty="0"/>
-              <a:t>A.Y. 2023-2024</a:t>
+              <a:rPr lang="it-IT" sz="2800" dirty="0">
+                <a:latin typeface="Aptos" panose="020B0004020202020204" pitchFamily="34" charset="0"/>
+              </a:rPr>
+              <a:t>A.Y. 2024-2025</a:t>
             </a:r>
           </a:p>
           <a:p>
@@ -1460,10 +1547,14 @@
               </a:spcAft>
             </a:pPr>
             <a:r>
-              <a:rPr lang="it-IT" sz="2800" baseline="0" dirty="0"/>
+              <a:rPr lang="it-IT" sz="2800" baseline="0" dirty="0">
+                <a:latin typeface="Aptos" panose="020B0004020202020204" pitchFamily="34" charset="0"/>
+              </a:rPr>
               <a:t>Giacomo Cappon</a:t>
             </a:r>
-            <a:endParaRPr lang="en-GB" sz="2800" dirty="0"/>
+            <a:endParaRPr lang="en-GB" sz="2800" dirty="0">
+              <a:latin typeface="Aptos" panose="020B0004020202020204" pitchFamily="34" charset="0"/>
+            </a:endParaRPr>
           </a:p>
         </p:txBody>
       </p:sp>
@@ -1501,7 +1592,7 @@
                 <a:effectLst/>
                 <a:uLnTx/>
                 <a:uFillTx/>
-                <a:latin typeface="Palatino Linotype" panose="02040502050505030304" pitchFamily="18" charset="0"/>
+                <a:latin typeface="Aptos" panose="020B0004020202020204" pitchFamily="34" charset="0"/>
                 <a:ea typeface="+mj-ea"/>
                 <a:cs typeface="+mj-cs"/>
               </a:rPr>
@@ -1518,7 +1609,7 @@
                 <a:effectLst/>
                 <a:uLnTx/>
                 <a:uFillTx/>
-                <a:latin typeface="Palatino Linotype" panose="02040502050505030304" pitchFamily="18" charset="0"/>
+                <a:latin typeface="Aptos" panose="020B0004020202020204" pitchFamily="34" charset="0"/>
                 <a:ea typeface="+mj-ea"/>
                 <a:cs typeface="+mj-cs"/>
               </a:rPr>
@@ -1535,7 +1626,7 @@
                 <a:effectLst/>
                 <a:uLnTx/>
                 <a:uFillTx/>
-                <a:latin typeface="Palatino Linotype" panose="02040502050505030304" pitchFamily="18" charset="0"/>
+                <a:latin typeface="Aptos" panose="020B0004020202020204" pitchFamily="34" charset="0"/>
                 <a:ea typeface="+mj-ea"/>
                 <a:cs typeface="+mj-cs"/>
               </a:rPr>
@@ -1551,7 +1642,7 @@
                 <a:effectLst/>
                 <a:uLnTx/>
                 <a:uFillTx/>
-                <a:latin typeface="Palatino Linotype" panose="02040502050505030304" pitchFamily="18" charset="0"/>
+                <a:latin typeface="Aptos" panose="020B0004020202020204" pitchFamily="34" charset="0"/>
                 <a:ea typeface="+mj-ea"/>
                 <a:cs typeface="+mj-cs"/>
               </a:rPr>
@@ -1568,7 +1659,7 @@
                 <a:effectLst/>
                 <a:uLnTx/>
                 <a:uFillTx/>
-                <a:latin typeface="Palatino Linotype" panose="02040502050505030304" pitchFamily="18" charset="0"/>
+                <a:latin typeface="Aptos" panose="020B0004020202020204" pitchFamily="34" charset="0"/>
                 <a:ea typeface="+mj-ea"/>
                 <a:cs typeface="+mj-cs"/>
               </a:rPr>
@@ -1585,13 +1676,15 @@
                 <a:effectLst/>
                 <a:uLnTx/>
                 <a:uFillTx/>
-                <a:latin typeface="Palatino Linotype" panose="02040502050505030304" pitchFamily="18" charset="0"/>
+                <a:latin typeface="Aptos" panose="020B0004020202020204" pitchFamily="34" charset="0"/>
                 <a:ea typeface="+mj-ea"/>
                 <a:cs typeface="+mj-cs"/>
               </a:rPr>
               <a:t>Engineering</a:t>
             </a:r>
-            <a:endParaRPr lang="en-GB" sz="1100" cap="small" baseline="0" dirty="0"/>
+            <a:endParaRPr lang="en-GB" sz="1100" cap="small" baseline="0" dirty="0">
+              <a:latin typeface="Aptos" panose="020B0004020202020204" pitchFamily="34" charset="0"/>
+            </a:endParaRPr>
           </a:p>
         </p:txBody>
       </p:sp>
@@ -2062,12 +2155,14 @@
                     <a:tint val="75000"/>
                   </a:schemeClr>
                 </a:solidFill>
+                <a:latin typeface="Aptos" panose="020B0004020202020204" pitchFamily="34" charset="0"/>
               </a:defRPr>
             </a:lvl1pPr>
           </a:lstStyle>
           <a:p>
             <a:fld id="{31DE2C5B-556E-47B8-A792-024C2FCA4ACC}" type="slidenum">
               <a:rPr lang="en-GB" smtClean="0"/>
+              <a:pPr/>
               <a:t>‹#›</a:t>
             </a:fld>
             <a:endParaRPr lang="en-GB"/>
@@ -2103,7 +2198,7 @@
           <a:solidFill>
             <a:schemeClr val="tx1"/>
           </a:solidFill>
-          <a:latin typeface="Palatino Linotype" panose="02040502050505030304" pitchFamily="18" charset="0"/>
+          <a:latin typeface="Aptos" panose="020B0004020202020204" pitchFamily="34" charset="0"/>
           <a:ea typeface="+mj-ea"/>
           <a:cs typeface="+mj-cs"/>
         </a:defRPr>
@@ -2126,7 +2221,7 @@
           <a:solidFill>
             <a:schemeClr val="tx1"/>
           </a:solidFill>
-          <a:latin typeface="Palatino Linotype" panose="02040502050505030304" pitchFamily="18" charset="0"/>
+          <a:latin typeface="Aptos" panose="020B0004020202020204" pitchFamily="34" charset="0"/>
           <a:ea typeface="+mn-ea"/>
           <a:cs typeface="+mn-cs"/>
         </a:defRPr>
@@ -2147,7 +2242,7 @@
           <a:solidFill>
             <a:schemeClr val="tx1"/>
           </a:solidFill>
-          <a:latin typeface="Palatino Linotype" panose="02040502050505030304" pitchFamily="18" charset="0"/>
+          <a:latin typeface="Aptos" panose="020B0004020202020204" pitchFamily="34" charset="0"/>
           <a:ea typeface="+mn-ea"/>
           <a:cs typeface="+mn-cs"/>
         </a:defRPr>
@@ -2168,7 +2263,7 @@
           <a:solidFill>
             <a:schemeClr val="tx1"/>
           </a:solidFill>
-          <a:latin typeface="Palatino Linotype" panose="02040502050505030304" pitchFamily="18" charset="0"/>
+          <a:latin typeface="Aptos" panose="020B0004020202020204" pitchFamily="34" charset="0"/>
           <a:ea typeface="+mn-ea"/>
           <a:cs typeface="+mn-cs"/>
         </a:defRPr>
@@ -2189,7 +2284,7 @@
           <a:solidFill>
             <a:schemeClr val="tx1"/>
           </a:solidFill>
-          <a:latin typeface="Palatino Linotype" panose="02040502050505030304" pitchFamily="18" charset="0"/>
+          <a:latin typeface="Aptos" panose="020B0004020202020204" pitchFamily="34" charset="0"/>
           <a:ea typeface="+mn-ea"/>
           <a:cs typeface="+mn-cs"/>
         </a:defRPr>
@@ -2210,7 +2305,7 @@
           <a:solidFill>
             <a:schemeClr val="tx1"/>
           </a:solidFill>
-          <a:latin typeface="Palatino Linotype" panose="02040502050505030304" pitchFamily="18" charset="0"/>
+          <a:latin typeface="Aptos" panose="020B0004020202020204" pitchFamily="34" charset="0"/>
           <a:ea typeface="+mn-ea"/>
           <a:cs typeface="+mn-cs"/>
         </a:defRPr>
@@ -2647,12 +2742,12 @@
             <a:pPr algn="ctr"/>
             <a:r>
               <a:rPr lang="it-IT" sz="2200" dirty="0">
-                <a:latin typeface="Palatino Linotype" panose="02040502050505030304" pitchFamily="18" charset="0"/>
+                <a:latin typeface="Aptos" panose="020B0004020202020204" pitchFamily="34" charset="0"/>
               </a:rPr>
               <a:t>Client</a:t>
             </a:r>
             <a:endParaRPr lang="en-GB" sz="2200" dirty="0">
-              <a:latin typeface="Palatino Linotype" panose="02040502050505030304" pitchFamily="18" charset="0"/>
+              <a:latin typeface="Aptos" panose="020B0004020202020204" pitchFamily="34" charset="0"/>
             </a:endParaRPr>
           </a:p>
         </p:txBody>
@@ -2717,12 +2812,12 @@
           <a:p>
             <a:r>
               <a:rPr lang="it-IT" dirty="0" err="1">
-                <a:latin typeface="Palatino Linotype" panose="02040502050505030304" pitchFamily="18" charset="0"/>
+                <a:latin typeface="Aptos" panose="020B0004020202020204" pitchFamily="34" charset="0"/>
               </a:rPr>
               <a:t>Request</a:t>
             </a:r>
             <a:endParaRPr lang="en-GB" dirty="0">
-              <a:latin typeface="Palatino Linotype" panose="02040502050505030304" pitchFamily="18" charset="0"/>
+              <a:latin typeface="Aptos" panose="020B0004020202020204" pitchFamily="34" charset="0"/>
             </a:endParaRPr>
           </a:p>
         </p:txBody>
@@ -2799,7 +2894,9 @@
           <a:lstStyle/>
           <a:p>
             <a:pPr algn="ctr"/>
-            <a:endParaRPr lang="en-GB"/>
+            <a:endParaRPr lang="en-GB">
+              <a:latin typeface="Aptos" panose="020B0004020202020204" pitchFamily="34" charset="0"/>
+            </a:endParaRPr>
           </a:p>
         </p:txBody>
       </p:sp>
@@ -2844,12 +2941,12 @@
             <a:pPr algn="ctr"/>
             <a:r>
               <a:rPr lang="it-IT" sz="2200" dirty="0">
-                <a:latin typeface="Palatino Linotype" panose="02040502050505030304" pitchFamily="18" charset="0"/>
+                <a:latin typeface="Aptos" panose="020B0004020202020204" pitchFamily="34" charset="0"/>
               </a:rPr>
               <a:t>Data server</a:t>
             </a:r>
             <a:endParaRPr lang="en-GB" sz="2200" dirty="0">
-              <a:latin typeface="Palatino Linotype" panose="02040502050505030304" pitchFamily="18" charset="0"/>
+              <a:latin typeface="Aptos" panose="020B0004020202020204" pitchFamily="34" charset="0"/>
             </a:endParaRPr>
           </a:p>
         </p:txBody>
@@ -2895,12 +2992,12 @@
             <a:pPr algn="ctr"/>
             <a:r>
               <a:rPr lang="it-IT" sz="2200" dirty="0">
-                <a:latin typeface="Palatino Linotype" panose="02040502050505030304" pitchFamily="18" charset="0"/>
+                <a:latin typeface="Aptos" panose="020B0004020202020204" pitchFamily="34" charset="0"/>
               </a:rPr>
               <a:t>Proxy</a:t>
             </a:r>
             <a:endParaRPr lang="en-GB" sz="2200" dirty="0">
-              <a:latin typeface="Palatino Linotype" panose="02040502050505030304" pitchFamily="18" charset="0"/>
+              <a:latin typeface="Aptos" panose="020B0004020202020204" pitchFamily="34" charset="0"/>
             </a:endParaRPr>
           </a:p>
         </p:txBody>
@@ -2941,7 +3038,9 @@
           <a:lstStyle/>
           <a:p>
             <a:pPr algn="ctr"/>
-            <a:endParaRPr lang="en-GB"/>
+            <a:endParaRPr lang="en-GB">
+              <a:latin typeface="Aptos" panose="020B0004020202020204" pitchFamily="34" charset="0"/>
+            </a:endParaRPr>
           </a:p>
         </p:txBody>
       </p:sp>
@@ -2969,12 +3068,12 @@
           <a:p>
             <a:r>
               <a:rPr lang="it-IT" dirty="0" err="1">
-                <a:latin typeface="Palatino Linotype" panose="02040502050505030304" pitchFamily="18" charset="0"/>
+                <a:latin typeface="Aptos" panose="020B0004020202020204" pitchFamily="34" charset="0"/>
               </a:rPr>
               <a:t>Response</a:t>
             </a:r>
             <a:endParaRPr lang="en-GB" dirty="0">
-              <a:latin typeface="Palatino Linotype" panose="02040502050505030304" pitchFamily="18" charset="0"/>
+              <a:latin typeface="Aptos" panose="020B0004020202020204" pitchFamily="34" charset="0"/>
             </a:endParaRPr>
           </a:p>
         </p:txBody>
@@ -3039,12 +3138,12 @@
           <a:p>
             <a:r>
               <a:rPr lang="it-IT" dirty="0" err="1">
-                <a:latin typeface="Palatino Linotype" panose="02040502050505030304" pitchFamily="18" charset="0"/>
+                <a:latin typeface="Aptos" panose="020B0004020202020204" pitchFamily="34" charset="0"/>
               </a:rPr>
               <a:t>Request</a:t>
             </a:r>
             <a:endParaRPr lang="en-GB" dirty="0">
-              <a:latin typeface="Palatino Linotype" panose="02040502050505030304" pitchFamily="18" charset="0"/>
+              <a:latin typeface="Aptos" panose="020B0004020202020204" pitchFamily="34" charset="0"/>
             </a:endParaRPr>
           </a:p>
         </p:txBody>
@@ -3121,7 +3220,9 @@
           <a:lstStyle/>
           <a:p>
             <a:pPr algn="ctr"/>
-            <a:endParaRPr lang="en-GB"/>
+            <a:endParaRPr lang="en-GB">
+              <a:latin typeface="Aptos" panose="020B0004020202020204" pitchFamily="34" charset="0"/>
+            </a:endParaRPr>
           </a:p>
         </p:txBody>
       </p:sp>
@@ -3149,12 +3250,12 @@
           <a:p>
             <a:r>
               <a:rPr lang="it-IT" dirty="0" err="1">
-                <a:latin typeface="Palatino Linotype" panose="02040502050505030304" pitchFamily="18" charset="0"/>
+                <a:latin typeface="Aptos" panose="020B0004020202020204" pitchFamily="34" charset="0"/>
               </a:rPr>
               <a:t>Response</a:t>
             </a:r>
             <a:endParaRPr lang="en-GB" dirty="0">
-              <a:latin typeface="Palatino Linotype" panose="02040502050505030304" pitchFamily="18" charset="0"/>
+              <a:latin typeface="Aptos" panose="020B0004020202020204" pitchFamily="34" charset="0"/>
             </a:endParaRPr>
           </a:p>
         </p:txBody>
@@ -3195,7 +3296,9 @@
           <a:lstStyle/>
           <a:p>
             <a:pPr algn="ctr"/>
-            <a:endParaRPr lang="en-GB"/>
+            <a:endParaRPr lang="en-GB">
+              <a:latin typeface="Aptos" panose="020B0004020202020204" pitchFamily="34" charset="0"/>
+            </a:endParaRPr>
           </a:p>
         </p:txBody>
       </p:sp>
@@ -3396,18 +3499,18 @@
             <a:pPr algn="ctr"/>
             <a:r>
               <a:rPr lang="it-IT" sz="2200" dirty="0">
-                <a:latin typeface="Palatino Linotype" panose="02040502050505030304" pitchFamily="18" charset="0"/>
+                <a:latin typeface="Aptos" panose="020B0004020202020204" pitchFamily="34" charset="0"/>
               </a:rPr>
               <a:t>Presentation </a:t>
             </a:r>
             <a:r>
               <a:rPr lang="it-IT" sz="2200" dirty="0" err="1">
-                <a:latin typeface="Palatino Linotype" panose="02040502050505030304" pitchFamily="18" charset="0"/>
+                <a:latin typeface="Aptos" panose="020B0004020202020204" pitchFamily="34" charset="0"/>
               </a:rPr>
               <a:t>tier</a:t>
             </a:r>
             <a:endParaRPr lang="en-GB" sz="2200" dirty="0">
-              <a:latin typeface="Palatino Linotype" panose="02040502050505030304" pitchFamily="18" charset="0"/>
+              <a:latin typeface="Aptos" panose="020B0004020202020204" pitchFamily="34" charset="0"/>
             </a:endParaRPr>
           </a:p>
         </p:txBody>
@@ -3472,12 +3575,12 @@
           <a:p>
             <a:r>
               <a:rPr lang="it-IT" dirty="0" err="1">
-                <a:latin typeface="Palatino Linotype" panose="02040502050505030304" pitchFamily="18" charset="0"/>
+                <a:latin typeface="Aptos" panose="020B0004020202020204" pitchFamily="34" charset="0"/>
               </a:rPr>
               <a:t>Request</a:t>
             </a:r>
             <a:endParaRPr lang="en-GB" dirty="0">
-              <a:latin typeface="Palatino Linotype" panose="02040502050505030304" pitchFamily="18" charset="0"/>
+              <a:latin typeface="Aptos" panose="020B0004020202020204" pitchFamily="34" charset="0"/>
             </a:endParaRPr>
           </a:p>
         </p:txBody>
@@ -3554,7 +3657,9 @@
           <a:lstStyle/>
           <a:p>
             <a:pPr algn="ctr"/>
-            <a:endParaRPr lang="en-GB"/>
+            <a:endParaRPr lang="en-GB">
+              <a:latin typeface="Aptos" panose="020B0004020202020204" pitchFamily="34" charset="0"/>
+            </a:endParaRPr>
           </a:p>
         </p:txBody>
       </p:sp>
@@ -3599,18 +3704,18 @@
             <a:pPr algn="ctr"/>
             <a:r>
               <a:rPr lang="it-IT" sz="2200" dirty="0">
-                <a:latin typeface="Palatino Linotype" panose="02040502050505030304" pitchFamily="18" charset="0"/>
+                <a:latin typeface="Aptos" panose="020B0004020202020204" pitchFamily="34" charset="0"/>
               </a:rPr>
               <a:t>Data </a:t>
             </a:r>
             <a:r>
               <a:rPr lang="it-IT" sz="2200" dirty="0" err="1">
-                <a:latin typeface="Palatino Linotype" panose="02040502050505030304" pitchFamily="18" charset="0"/>
+                <a:latin typeface="Aptos" panose="020B0004020202020204" pitchFamily="34" charset="0"/>
               </a:rPr>
               <a:t>tier</a:t>
             </a:r>
             <a:endParaRPr lang="en-GB" sz="2200" dirty="0">
-              <a:latin typeface="Palatino Linotype" panose="02040502050505030304" pitchFamily="18" charset="0"/>
+              <a:latin typeface="Aptos" panose="020B0004020202020204" pitchFamily="34" charset="0"/>
             </a:endParaRPr>
           </a:p>
         </p:txBody>
@@ -3656,30 +3761,30 @@
             <a:pPr algn="ctr"/>
             <a:r>
               <a:rPr lang="it-IT" sz="2200" dirty="0">
-                <a:latin typeface="Palatino Linotype" panose="02040502050505030304" pitchFamily="18" charset="0"/>
+                <a:latin typeface="Aptos" panose="020B0004020202020204" pitchFamily="34" charset="0"/>
               </a:rPr>
               <a:t>Application or </a:t>
             </a:r>
             <a:r>
               <a:rPr lang="it-IT" sz="2200" dirty="0" err="1">
-                <a:latin typeface="Palatino Linotype" panose="02040502050505030304" pitchFamily="18" charset="0"/>
+                <a:latin typeface="Aptos" panose="020B0004020202020204" pitchFamily="34" charset="0"/>
               </a:rPr>
               <a:t>logic</a:t>
             </a:r>
             <a:r>
               <a:rPr lang="it-IT" sz="2200" dirty="0">
-                <a:latin typeface="Palatino Linotype" panose="02040502050505030304" pitchFamily="18" charset="0"/>
+                <a:latin typeface="Aptos" panose="020B0004020202020204" pitchFamily="34" charset="0"/>
               </a:rPr>
               <a:t> </a:t>
             </a:r>
             <a:r>
               <a:rPr lang="it-IT" sz="2200" dirty="0" err="1">
-                <a:latin typeface="Palatino Linotype" panose="02040502050505030304" pitchFamily="18" charset="0"/>
+                <a:latin typeface="Aptos" panose="020B0004020202020204" pitchFamily="34" charset="0"/>
               </a:rPr>
               <a:t>tier</a:t>
             </a:r>
             <a:endParaRPr lang="en-GB" sz="2200" dirty="0">
-              <a:latin typeface="Palatino Linotype" panose="02040502050505030304" pitchFamily="18" charset="0"/>
+              <a:latin typeface="Aptos" panose="020B0004020202020204" pitchFamily="34" charset="0"/>
             </a:endParaRPr>
           </a:p>
         </p:txBody>
@@ -3720,7 +3825,9 @@
           <a:lstStyle/>
           <a:p>
             <a:pPr algn="ctr"/>
-            <a:endParaRPr lang="en-GB"/>
+            <a:endParaRPr lang="en-GB">
+              <a:latin typeface="Aptos" panose="020B0004020202020204" pitchFamily="34" charset="0"/>
+            </a:endParaRPr>
           </a:p>
         </p:txBody>
       </p:sp>
@@ -3748,12 +3855,12 @@
           <a:p>
             <a:r>
               <a:rPr lang="it-IT" dirty="0" err="1">
-                <a:latin typeface="Palatino Linotype" panose="02040502050505030304" pitchFamily="18" charset="0"/>
+                <a:latin typeface="Aptos" panose="020B0004020202020204" pitchFamily="34" charset="0"/>
               </a:rPr>
               <a:t>Response</a:t>
             </a:r>
             <a:endParaRPr lang="en-GB" dirty="0">
-              <a:latin typeface="Palatino Linotype" panose="02040502050505030304" pitchFamily="18" charset="0"/>
+              <a:latin typeface="Aptos" panose="020B0004020202020204" pitchFamily="34" charset="0"/>
             </a:endParaRPr>
           </a:p>
         </p:txBody>
@@ -3818,12 +3925,12 @@
           <a:p>
             <a:r>
               <a:rPr lang="it-IT" dirty="0" err="1">
-                <a:latin typeface="Palatino Linotype" panose="02040502050505030304" pitchFamily="18" charset="0"/>
+                <a:latin typeface="Aptos" panose="020B0004020202020204" pitchFamily="34" charset="0"/>
               </a:rPr>
               <a:t>Request</a:t>
             </a:r>
             <a:endParaRPr lang="en-GB" dirty="0">
-              <a:latin typeface="Palatino Linotype" panose="02040502050505030304" pitchFamily="18" charset="0"/>
+              <a:latin typeface="Aptos" panose="020B0004020202020204" pitchFamily="34" charset="0"/>
             </a:endParaRPr>
           </a:p>
         </p:txBody>
@@ -3900,7 +4007,9 @@
           <a:lstStyle/>
           <a:p>
             <a:pPr algn="ctr"/>
-            <a:endParaRPr lang="en-GB"/>
+            <a:endParaRPr lang="en-GB">
+              <a:latin typeface="Aptos" panose="020B0004020202020204" pitchFamily="34" charset="0"/>
+            </a:endParaRPr>
           </a:p>
         </p:txBody>
       </p:sp>
@@ -3928,12 +4037,12 @@
           <a:p>
             <a:r>
               <a:rPr lang="it-IT" dirty="0" err="1">
-                <a:latin typeface="Palatino Linotype" panose="02040502050505030304" pitchFamily="18" charset="0"/>
+                <a:latin typeface="Aptos" panose="020B0004020202020204" pitchFamily="34" charset="0"/>
               </a:rPr>
               <a:t>Response</a:t>
             </a:r>
             <a:endParaRPr lang="en-GB" dirty="0">
-              <a:latin typeface="Palatino Linotype" panose="02040502050505030304" pitchFamily="18" charset="0"/>
+              <a:latin typeface="Aptos" panose="020B0004020202020204" pitchFamily="34" charset="0"/>
             </a:endParaRPr>
           </a:p>
         </p:txBody>
@@ -3974,7 +4083,9 @@
           <a:lstStyle/>
           <a:p>
             <a:pPr algn="ctr"/>
-            <a:endParaRPr lang="en-GB"/>
+            <a:endParaRPr lang="en-GB">
+              <a:latin typeface="Aptos" panose="020B0004020202020204" pitchFamily="34" charset="0"/>
+            </a:endParaRPr>
           </a:p>
         </p:txBody>
       </p:sp>
@@ -4002,18 +4113,18 @@
           <a:p>
             <a:r>
               <a:rPr lang="it-IT" sz="2000" dirty="0">
-                <a:latin typeface="Palatino Linotype" panose="02040502050505030304" pitchFamily="18" charset="0"/>
+                <a:latin typeface="Aptos" panose="020B0004020202020204" pitchFamily="34" charset="0"/>
               </a:rPr>
               <a:t>User </a:t>
             </a:r>
             <a:r>
               <a:rPr lang="it-IT" sz="2000" dirty="0" err="1">
-                <a:latin typeface="Palatino Linotype" panose="02040502050505030304" pitchFamily="18" charset="0"/>
+                <a:latin typeface="Aptos" panose="020B0004020202020204" pitchFamily="34" charset="0"/>
               </a:rPr>
               <a:t>interface</a:t>
             </a:r>
             <a:endParaRPr lang="en-GB" sz="2000" dirty="0">
-              <a:latin typeface="Palatino Linotype" panose="02040502050505030304" pitchFamily="18" charset="0"/>
+              <a:latin typeface="Aptos" panose="020B0004020202020204" pitchFamily="34" charset="0"/>
             </a:endParaRPr>
           </a:p>
         </p:txBody>
@@ -4043,36 +4154,36 @@
             <a:pPr algn="ctr"/>
             <a:r>
               <a:rPr lang="it-IT" sz="2000" dirty="0">
-                <a:latin typeface="Palatino Linotype" panose="02040502050505030304" pitchFamily="18" charset="0"/>
+                <a:latin typeface="Aptos" panose="020B0004020202020204" pitchFamily="34" charset="0"/>
               </a:rPr>
               <a:t>Control of </a:t>
             </a:r>
             <a:r>
               <a:rPr lang="it-IT" sz="2000" dirty="0" err="1">
-                <a:latin typeface="Palatino Linotype" panose="02040502050505030304" pitchFamily="18" charset="0"/>
+                <a:latin typeface="Aptos" panose="020B0004020202020204" pitchFamily="34" charset="0"/>
               </a:rPr>
               <a:t>app</a:t>
             </a:r>
             <a:r>
               <a:rPr lang="it-IT" sz="2000" dirty="0">
-                <a:latin typeface="Palatino Linotype" panose="02040502050505030304" pitchFamily="18" charset="0"/>
+                <a:latin typeface="Aptos" panose="020B0004020202020204" pitchFamily="34" charset="0"/>
               </a:rPr>
               <a:t> </a:t>
             </a:r>
             <a:r>
               <a:rPr lang="it-IT" sz="2000" dirty="0" err="1">
-                <a:latin typeface="Palatino Linotype" panose="02040502050505030304" pitchFamily="18" charset="0"/>
+                <a:latin typeface="Aptos" panose="020B0004020202020204" pitchFamily="34" charset="0"/>
               </a:rPr>
               <a:t>functionalities</a:t>
             </a:r>
             <a:r>
               <a:rPr lang="it-IT" sz="2000" dirty="0">
-                <a:latin typeface="Palatino Linotype" panose="02040502050505030304" pitchFamily="18" charset="0"/>
+                <a:latin typeface="Aptos" panose="020B0004020202020204" pitchFamily="34" charset="0"/>
               </a:rPr>
               <a:t> and data processing</a:t>
             </a:r>
             <a:endParaRPr lang="en-GB" sz="2000" dirty="0">
-              <a:latin typeface="Palatino Linotype" panose="02040502050505030304" pitchFamily="18" charset="0"/>
+              <a:latin typeface="Aptos" panose="020B0004020202020204" pitchFamily="34" charset="0"/>
             </a:endParaRPr>
           </a:p>
         </p:txBody>
@@ -4101,18 +4212,18 @@
           <a:p>
             <a:r>
               <a:rPr lang="it-IT" sz="2000" dirty="0">
-                <a:latin typeface="Palatino Linotype" panose="02040502050505030304" pitchFamily="18" charset="0"/>
+                <a:latin typeface="Aptos" panose="020B0004020202020204" pitchFamily="34" charset="0"/>
               </a:rPr>
               <a:t>Data </a:t>
             </a:r>
             <a:r>
               <a:rPr lang="it-IT" sz="2000" dirty="0" err="1">
-                <a:latin typeface="Palatino Linotype" panose="02040502050505030304" pitchFamily="18" charset="0"/>
+                <a:latin typeface="Aptos" panose="020B0004020202020204" pitchFamily="34" charset="0"/>
               </a:rPr>
               <a:t>storage</a:t>
             </a:r>
             <a:endParaRPr lang="en-GB" sz="2000" dirty="0">
-              <a:latin typeface="Palatino Linotype" panose="02040502050505030304" pitchFamily="18" charset="0"/>
+              <a:latin typeface="Aptos" panose="020B0004020202020204" pitchFamily="34" charset="0"/>
             </a:endParaRPr>
           </a:p>
         </p:txBody>
@@ -4731,275 +4842,986 @@
           </a:p>
         </p:txBody>
       </p:sp>
-      <mc:AlternateContent xmlns:mc="http://schemas.openxmlformats.org/markup-compatibility/2006" xmlns:a14="http://schemas.microsoft.com/office/drawing/2010/main">
-        <mc:Choice Requires="a14">
-          <p:sp>
-            <p:nvSpPr>
-              <p:cNvPr id="3" name="Segnaposto contenuto 2"/>
-              <p:cNvSpPr>
-                <a:spLocks noGrp="1"/>
-              </p:cNvSpPr>
-              <p:nvPr>
-                <p:ph idx="1"/>
-              </p:nvPr>
-            </p:nvSpPr>
-            <p:spPr>
-              <a:xfrm>
-                <a:off x="428172" y="1361167"/>
-                <a:ext cx="9182967" cy="5360308"/>
-              </a:xfrm>
-            </p:spPr>
-            <p:txBody>
-              <a:bodyPr>
-                <a:normAutofit/>
-              </a:bodyPr>
-              <a:lstStyle/>
-              <a:p>
-                <a:r>
-                  <a:rPr lang="en-US" sz="2000" b="1" dirty="0"/>
-                  <a:t>Resource</a:t>
-                </a:r>
-                <a:r>
-                  <a:rPr lang="en-US" sz="2000" dirty="0"/>
-                  <a:t>: any information or concept that can be named and be the target of a hypertext (a document, an image, a collection of other resources, a temporal service, e.g., “today’s weather in Padova”...).</a:t>
-                </a:r>
-              </a:p>
-              <a:p>
-                <a:r>
-                  <a:rPr lang="en-US" sz="2000" dirty="0"/>
-                  <a:t>More precisely, the resource is the conceptual mapping to an entity or a set of entities.</a:t>
-                </a:r>
-              </a:p>
-              <a:p>
-                <a:r>
-                  <a:rPr lang="en-US" sz="2000" dirty="0"/>
-                  <a:t>Formally, a resource</a:t>
-                </a:r>
-                <a:r>
-                  <a:rPr lang="en-US" sz="2000" i="1" dirty="0"/>
-                  <a:t> R </a:t>
-                </a:r>
-                <a:r>
-                  <a:rPr lang="en-US" sz="2000" dirty="0"/>
-                  <a:t>is a temporally varying membership function </a:t>
-                </a:r>
-                <a:r>
-                  <a:rPr lang="en-US" sz="2000" i="1" dirty="0"/>
-                  <a:t>M</a:t>
-                </a:r>
-                <a:r>
-                  <a:rPr lang="en-US" sz="2000" i="1" baseline="-25000" dirty="0"/>
-                  <a:t>R</a:t>
-                </a:r>
-                <a:r>
-                  <a:rPr lang="en-US" sz="2000" dirty="0"/>
-                  <a:t>(</a:t>
-                </a:r>
-                <a:r>
-                  <a:rPr lang="en-US" sz="2000" i="1" dirty="0"/>
-                  <a:t>.</a:t>
-                </a:r>
-                <a:r>
-                  <a:rPr lang="en-US" sz="2000" dirty="0"/>
-                  <a:t>), which for time </a:t>
-                </a:r>
-                <a:r>
-                  <a:rPr lang="en-US" sz="2000" i="1" dirty="0"/>
-                  <a:t>t </a:t>
-                </a:r>
-                <a:r>
-                  <a:rPr lang="en-US" sz="2000" dirty="0"/>
-                  <a:t>maps to an entity or a set of entities.</a:t>
-                </a:r>
-              </a:p>
-              <a:p>
-                <a:endParaRPr lang="en-US" sz="1050" b="0" i="1" dirty="0">
-                  <a:latin typeface="Cambria Math" panose="02040503050406030204" pitchFamily="18" charset="0"/>
-                </a:endParaRPr>
-              </a:p>
-              <a:p>
-                <a:pPr marL="0" indent="0">
-                  <a:buNone/>
-                </a:pPr>
-                <a:r>
-                  <a:rPr lang="it-IT" sz="2000" b="0" dirty="0"/>
-                  <a:t>    				     </a:t>
-                </a:r>
-                <a14:m>
-                  <m:oMath xmlns:m="http://schemas.openxmlformats.org/officeDocument/2006/math">
-                    <m:r>
-                      <a:rPr lang="it-IT" sz="2000" b="0" i="1" smtClean="0">
-                        <a:latin typeface="Cambria Math" panose="02040503050406030204" pitchFamily="18" charset="0"/>
-                      </a:rPr>
-                      <m:t>𝐸</m:t>
-                    </m:r>
-                    <m:r>
-                      <a:rPr lang="en-US" sz="2000" i="1" smtClean="0">
-                        <a:latin typeface="Cambria Math" panose="02040503050406030204" pitchFamily="18" charset="0"/>
-                      </a:rPr>
-                      <m:t>=</m:t>
-                    </m:r>
-                    <m:sSub>
-                      <m:sSubPr>
-                        <m:ctrlPr>
-                          <a:rPr lang="en-US" sz="2000" i="1" smtClean="0">
-                            <a:latin typeface="Cambria Math" panose="02040503050406030204" pitchFamily="18" charset="0"/>
-                          </a:rPr>
-                        </m:ctrlPr>
-                      </m:sSubPr>
-                      <m:e>
-                        <m:r>
-                          <a:rPr lang="it-IT" sz="2000" b="0" i="1" smtClean="0">
-                            <a:latin typeface="Cambria Math" panose="02040503050406030204" pitchFamily="18" charset="0"/>
-                          </a:rPr>
-                          <m:t>𝑀</m:t>
-                        </m:r>
-                      </m:e>
-                      <m:sub>
-                        <m:r>
-                          <a:rPr lang="it-IT" sz="2000" b="0" i="1" smtClean="0">
-                            <a:latin typeface="Cambria Math" panose="02040503050406030204" pitchFamily="18" charset="0"/>
-                          </a:rPr>
-                          <m:t>𝑅</m:t>
-                        </m:r>
-                      </m:sub>
-                    </m:sSub>
-                    <m:d>
-                      <m:dPr>
-                        <m:ctrlPr>
-                          <a:rPr lang="it-IT" sz="2000" b="0" i="1" smtClean="0">
-                            <a:latin typeface="Cambria Math" panose="02040503050406030204" pitchFamily="18" charset="0"/>
-                          </a:rPr>
-                        </m:ctrlPr>
-                      </m:dPr>
-                      <m:e>
-                        <m:r>
-                          <a:rPr lang="it-IT" sz="2000" b="0" i="1" smtClean="0">
-                            <a:latin typeface="Cambria Math" panose="02040503050406030204" pitchFamily="18" charset="0"/>
-                          </a:rPr>
-                          <m:t>𝑡</m:t>
-                        </m:r>
-                      </m:e>
-                    </m:d>
-                  </m:oMath>
-                </a14:m>
-                <a:endParaRPr lang="it-IT" sz="2000" b="0" dirty="0"/>
-              </a:p>
-              <a:p>
-                <a:pPr marL="0" indent="0">
-                  <a:buNone/>
-                </a:pPr>
-                <a:endParaRPr lang="it-IT" sz="2000" dirty="0"/>
-              </a:p>
-              <a:p>
-                <a:pPr marL="0" indent="0">
-                  <a:buNone/>
-                </a:pPr>
-                <a:endParaRPr lang="it-IT" sz="2000" b="0" dirty="0"/>
-              </a:p>
-              <a:p>
-                <a:r>
-                  <a:rPr lang="en-US" sz="2000" dirty="0"/>
-                  <a:t>The </a:t>
-                </a:r>
-                <a:r>
-                  <a:rPr lang="en-US" sz="2000" b="1" dirty="0"/>
-                  <a:t>entity</a:t>
-                </a:r>
-                <a:r>
-                  <a:rPr lang="en-US" sz="2000" dirty="0"/>
-                  <a:t> is the specific realization of the concept identified by the resource. </a:t>
-                </a:r>
-              </a:p>
-              <a:p>
-                <a:r>
-                  <a:rPr lang="en-US" sz="2000" dirty="0"/>
-                  <a:t>The entity to which a resource points is stored and manipulated in a specific format or representation </a:t>
-                </a:r>
-                <a:r>
-                  <a:rPr lang="en-US" sz="2000" dirty="0">
-                    <a:sym typeface="Wingdings" panose="05000000000000000000" pitchFamily="2" charset="2"/>
-                  </a:rPr>
-                  <a:t></a:t>
-                </a:r>
-                <a:r>
-                  <a:rPr lang="en-US" sz="2000" dirty="0"/>
-                  <a:t> </a:t>
-                </a:r>
-                <a:r>
-                  <a:rPr lang="en-US" sz="2000" b="1" dirty="0"/>
-                  <a:t>resource representation. </a:t>
-                </a:r>
-              </a:p>
-              <a:p>
-                <a:r>
-                  <a:rPr lang="en-US" sz="2000" dirty="0"/>
-                  <a:t>Each resource is identified by a label called </a:t>
-                </a:r>
-                <a:r>
-                  <a:rPr lang="en-US" sz="2000" b="1" dirty="0"/>
-                  <a:t>resource identifier.</a:t>
-                </a:r>
-                <a:endParaRPr lang="it-IT" dirty="0"/>
-              </a:p>
-            </p:txBody>
-          </p:sp>
-        </mc:Choice>
-        <mc:Fallback xmlns="">
-          <p:sp>
-            <p:nvSpPr>
-              <p:cNvPr id="3" name="Segnaposto contenuto 2"/>
-              <p:cNvSpPr>
-                <a:spLocks noGrp="1" noRot="1" noChangeAspect="1" noMove="1" noResize="1" noEditPoints="1" noAdjustHandles="1" noChangeArrowheads="1" noChangeShapeType="1" noTextEdit="1"/>
-              </p:cNvSpPr>
-              <p:nvPr>
-                <p:ph idx="1"/>
-              </p:nvPr>
-            </p:nvSpPr>
-            <p:spPr>
-              <a:xfrm>
-                <a:off x="428172" y="1361167"/>
-                <a:ext cx="9182967" cy="5360308"/>
-              </a:xfrm>
-              <a:blipFill>
-                <a:blip r:embed="rId2"/>
-                <a:stretch>
-                  <a:fillRect l="-552" t="-1418" r="-1105"/>
-                </a:stretch>
-              </a:blipFill>
-            </p:spPr>
-            <p:txBody>
-              <a:bodyPr/>
-              <a:lstStyle/>
-              <a:p>
-                <a:r>
-                  <a:rPr lang="en-US">
-                    <a:noFill/>
-                  </a:rPr>
-                  <a:t> </a:t>
-                </a:r>
-              </a:p>
-            </p:txBody>
-          </p:sp>
-        </mc:Fallback>
-      </mc:AlternateContent>
+      <p:sp>
+        <p:nvSpPr>
+          <p:cNvPr id="3" name="Segnaposto contenuto 2"/>
+          <p:cNvSpPr>
+            <a:spLocks noGrp="1"/>
+          </p:cNvSpPr>
+          <p:nvPr>
+            <p:ph idx="1"/>
+          </p:nvPr>
+        </p:nvSpPr>
+        <p:spPr>
+          <a:xfrm>
+            <a:off x="267760" y="1355772"/>
+            <a:ext cx="11882221" cy="2855845"/>
+          </a:xfrm>
+        </p:spPr>
+        <p:txBody>
+          <a:bodyPr>
+            <a:normAutofit/>
+          </a:bodyPr>
+          <a:lstStyle/>
+          <a:p>
+            <a:r>
+              <a:rPr lang="en-US" sz="2000" b="1" dirty="0"/>
+              <a:t>Resource</a:t>
+            </a:r>
+            <a:r>
+              <a:rPr lang="en-US" sz="2000" dirty="0"/>
+              <a:t>: any information or concept that can be named and be the target of a hypermedia (a document, an image, a collection of other resources, a temporal service, e.g., “today’s weather in Padova”...).</a:t>
+            </a:r>
+          </a:p>
+          <a:p>
+            <a:r>
+              <a:rPr lang="en-US" sz="2000" dirty="0"/>
+              <a:t>More precisely, the resource is the conceptual mapping to an entity or a set of entities.</a:t>
+            </a:r>
+          </a:p>
+          <a:p>
+            <a:r>
+              <a:rPr lang="en-US" sz="2000" dirty="0"/>
+              <a:t>The </a:t>
+            </a:r>
+            <a:r>
+              <a:rPr lang="en-US" sz="2000" b="1" dirty="0"/>
+              <a:t>entity</a:t>
+            </a:r>
+            <a:r>
+              <a:rPr lang="en-US" sz="2000" dirty="0"/>
+              <a:t> is the specific realization of the concept identified by the resource. </a:t>
+            </a:r>
+          </a:p>
+          <a:p>
+            <a:r>
+              <a:rPr lang="en-US" sz="2000" dirty="0"/>
+              <a:t>The entity to which a resource points is stored and manipulated in a specific </a:t>
+            </a:r>
+            <a:r>
+              <a:rPr lang="en-US" sz="2000" b="1" dirty="0"/>
+              <a:t>resource representation </a:t>
+            </a:r>
+          </a:p>
+          <a:p>
+            <a:r>
+              <a:rPr lang="en-US" sz="2000" dirty="0"/>
+              <a:t>Each resource is identified by a label called </a:t>
+            </a:r>
+            <a:r>
+              <a:rPr lang="en-US" sz="2000" b="1" dirty="0"/>
+              <a:t>resource identifier</a:t>
+            </a:r>
+            <a:endParaRPr lang="it-IT" dirty="0"/>
+          </a:p>
+        </p:txBody>
+      </p:sp>
+      <p:sp>
+        <p:nvSpPr>
+          <p:cNvPr id="4" name="Segnaposto numero diapositiva 3"/>
+          <p:cNvSpPr>
+            <a:spLocks noGrp="1"/>
+          </p:cNvSpPr>
+          <p:nvPr>
+            <p:ph type="sldNum" sz="quarter" idx="12"/>
+          </p:nvPr>
+        </p:nvSpPr>
+        <p:spPr/>
+        <p:txBody>
+          <a:bodyPr/>
+          <a:lstStyle/>
+          <a:p>
+            <a:fld id="{31DE2C5B-556E-47B8-A792-024C2FCA4ACC}" type="slidenum">
+              <a:rPr lang="en-GB" smtClean="0"/>
+              <a:t>15</a:t>
+            </a:fld>
+            <a:endParaRPr lang="en-GB"/>
+          </a:p>
+        </p:txBody>
+      </p:sp>
+      <p:pic>
+        <p:nvPicPr>
+          <p:cNvPr id="6" name="Picture 5" descr="A close-up of a person's photo&#10;&#10;Description automatically generated">
+            <a:extLst>
+              <a:ext uri="{FF2B5EF4-FFF2-40B4-BE49-F238E27FC236}">
+                <a16:creationId xmlns:a16="http://schemas.microsoft.com/office/drawing/2014/main" id="{B9EA1219-A615-96DC-1162-12DBB58DC757}"/>
+              </a:ext>
+            </a:extLst>
+          </p:cNvPr>
+          <p:cNvPicPr>
+            <a:picLocks noChangeAspect="1"/>
+          </p:cNvPicPr>
+          <p:nvPr/>
+        </p:nvPicPr>
+        <p:blipFill>
+          <a:blip r:embed="rId2">
+            <a:extLst>
+              <a:ext uri="{28A0092B-C50C-407E-A947-70E740481C1C}">
+                <a14:useLocalDpi xmlns:a14="http://schemas.microsoft.com/office/drawing/2010/main" val="0"/>
+              </a:ext>
+            </a:extLst>
+          </a:blip>
+          <a:stretch>
+            <a:fillRect/>
+          </a:stretch>
+        </p:blipFill>
+        <p:spPr>
+          <a:xfrm>
+            <a:off x="12571846" y="92616"/>
+            <a:ext cx="1501305" cy="1501305"/>
+          </a:xfrm>
+          <a:prstGeom prst="rect">
+            <a:avLst/>
+          </a:prstGeom>
+        </p:spPr>
+      </p:pic>
+      <p:sp>
+        <p:nvSpPr>
+          <p:cNvPr id="5" name="Ovale 3">
+            <a:extLst>
+              <a:ext uri="{FF2B5EF4-FFF2-40B4-BE49-F238E27FC236}">
+                <a16:creationId xmlns:a16="http://schemas.microsoft.com/office/drawing/2014/main" id="{1EB79D6E-FF97-61B4-26DE-9B0128C18D5F}"/>
+              </a:ext>
+            </a:extLst>
+          </p:cNvPr>
+          <p:cNvSpPr/>
+          <p:nvPr/>
+        </p:nvSpPr>
+        <p:spPr>
+          <a:xfrm>
+            <a:off x="901195" y="4960926"/>
+            <a:ext cx="944030" cy="904598"/>
+          </a:xfrm>
+          <a:prstGeom prst="ellipse">
+            <a:avLst/>
+          </a:prstGeom>
+        </p:spPr>
+        <p:style>
+          <a:lnRef idx="1">
+            <a:schemeClr val="accent6"/>
+          </a:lnRef>
+          <a:fillRef idx="2">
+            <a:schemeClr val="accent6"/>
+          </a:fillRef>
+          <a:effectRef idx="1">
+            <a:schemeClr val="accent6"/>
+          </a:effectRef>
+          <a:fontRef idx="minor">
+            <a:schemeClr val="dk1"/>
+          </a:fontRef>
+        </p:style>
+        <p:txBody>
+          <a:bodyPr rtlCol="0" anchor="ctr"/>
+          <a:lstStyle/>
+          <a:p>
+            <a:pPr algn="ctr"/>
+            <a:endParaRPr lang="en-GB">
+              <a:latin typeface="Aptos" panose="020B0004020202020204" pitchFamily="34" charset="0"/>
+            </a:endParaRPr>
+          </a:p>
+        </p:txBody>
+      </p:sp>
+      <p:sp>
+        <p:nvSpPr>
+          <p:cNvPr id="7" name="CasellaDiTesto 4">
+            <a:extLst>
+              <a:ext uri="{FF2B5EF4-FFF2-40B4-BE49-F238E27FC236}">
+                <a16:creationId xmlns:a16="http://schemas.microsoft.com/office/drawing/2014/main" id="{44BF784E-B4CE-BB8A-9B44-A497584BCA78}"/>
+              </a:ext>
+            </a:extLst>
+          </p:cNvPr>
+          <p:cNvSpPr txBox="1"/>
+          <p:nvPr/>
+        </p:nvSpPr>
+        <p:spPr>
+          <a:xfrm>
+            <a:off x="409417" y="5865524"/>
+            <a:ext cx="1966146" cy="830997"/>
+          </a:xfrm>
+          <a:prstGeom prst="rect">
+            <a:avLst/>
+          </a:prstGeom>
+          <a:noFill/>
+        </p:spPr>
+        <p:txBody>
+          <a:bodyPr wrap="square" rtlCol="0">
+            <a:spAutoFit/>
+          </a:bodyPr>
+          <a:lstStyle/>
+          <a:p>
+            <a:pPr algn="ctr"/>
+            <a:r>
+              <a:rPr lang="it-IT" sz="2400" b="1" dirty="0">
+                <a:latin typeface="Aptos" panose="020B0004020202020204" pitchFamily="34" charset="0"/>
+              </a:rPr>
+              <a:t>Resource</a:t>
+            </a:r>
+            <a:r>
+              <a:rPr lang="it-IT" sz="2400" dirty="0">
+                <a:latin typeface="Aptos" panose="020B0004020202020204" pitchFamily="34" charset="0"/>
+              </a:rPr>
+              <a:t>: </a:t>
+            </a:r>
+            <a:r>
+              <a:rPr lang="it-IT" sz="2400" dirty="0" err="1">
+                <a:latin typeface="Aptos" panose="020B0004020202020204" pitchFamily="34" charset="0"/>
+              </a:rPr>
+              <a:t>circle</a:t>
+            </a:r>
+            <a:endParaRPr lang="en-GB" sz="2400" dirty="0">
+              <a:latin typeface="Aptos" panose="020B0004020202020204" pitchFamily="34" charset="0"/>
+            </a:endParaRPr>
+          </a:p>
+        </p:txBody>
+      </p:sp>
+      <p:sp>
+        <p:nvSpPr>
+          <p:cNvPr id="8" name="CasellaDiTesto 6">
+            <a:extLst>
+              <a:ext uri="{FF2B5EF4-FFF2-40B4-BE49-F238E27FC236}">
+                <a16:creationId xmlns:a16="http://schemas.microsoft.com/office/drawing/2014/main" id="{8704E908-4EF8-A91B-C33E-A8E29D7E440A}"/>
+              </a:ext>
+            </a:extLst>
+          </p:cNvPr>
+          <p:cNvSpPr txBox="1"/>
+          <p:nvPr/>
+        </p:nvSpPr>
+        <p:spPr>
+          <a:xfrm>
+            <a:off x="7197327" y="4314545"/>
+            <a:ext cx="3945288" cy="1015663"/>
+          </a:xfrm>
+          <a:prstGeom prst="rect">
+            <a:avLst/>
+          </a:prstGeom>
+          <a:noFill/>
+        </p:spPr>
+        <p:txBody>
+          <a:bodyPr wrap="square" rtlCol="0">
+            <a:spAutoFit/>
+          </a:bodyPr>
+          <a:lstStyle/>
+          <a:p>
+            <a:pPr algn="ctr"/>
+            <a:r>
+              <a:rPr lang="it-IT" sz="2000" b="1" dirty="0" err="1">
+                <a:latin typeface="Aptos" panose="020B0004020202020204" pitchFamily="34" charset="0"/>
+              </a:rPr>
+              <a:t>Representation</a:t>
+            </a:r>
+            <a:r>
+              <a:rPr lang="it-IT" sz="2000" b="1" dirty="0">
+                <a:latin typeface="Aptos" panose="020B0004020202020204" pitchFamily="34" charset="0"/>
+              </a:rPr>
+              <a:t> 1:</a:t>
+            </a:r>
+            <a:r>
+              <a:rPr lang="it-IT" sz="2000" dirty="0">
+                <a:latin typeface="Aptos" panose="020B0004020202020204" pitchFamily="34" charset="0"/>
+              </a:rPr>
+              <a:t> </a:t>
+            </a:r>
+            <a:r>
+              <a:rPr lang="it-IT" sz="2000" dirty="0" err="1">
+                <a:latin typeface="Aptos" panose="020B0004020202020204" pitchFamily="34" charset="0"/>
+              </a:rPr>
+              <a:t>one</a:t>
+            </a:r>
+            <a:r>
+              <a:rPr lang="it-IT" sz="2000" dirty="0">
+                <a:latin typeface="Aptos" panose="020B0004020202020204" pitchFamily="34" charset="0"/>
+              </a:rPr>
+              <a:t> </a:t>
+            </a:r>
+            <a:r>
+              <a:rPr lang="it-IT" sz="2000" dirty="0" err="1">
+                <a:latin typeface="Aptos" panose="020B0004020202020204" pitchFamily="34" charset="0"/>
+              </a:rPr>
+              <a:t>point</a:t>
+            </a:r>
+            <a:r>
+              <a:rPr lang="it-IT" sz="2000" dirty="0">
+                <a:latin typeface="Aptos" panose="020B0004020202020204" pitchFamily="34" charset="0"/>
+              </a:rPr>
+              <a:t> for the </a:t>
+            </a:r>
+            <a:r>
+              <a:rPr lang="it-IT" sz="2000" dirty="0" err="1">
+                <a:latin typeface="Aptos" panose="020B0004020202020204" pitchFamily="34" charset="0"/>
+              </a:rPr>
+              <a:t>circle</a:t>
+            </a:r>
+            <a:r>
+              <a:rPr lang="it-IT" sz="2000" dirty="0">
+                <a:latin typeface="Aptos" panose="020B0004020202020204" pitchFamily="34" charset="0"/>
+              </a:rPr>
+              <a:t> center and </a:t>
+            </a:r>
+            <a:r>
+              <a:rPr lang="it-IT" sz="2000" dirty="0" err="1">
+                <a:latin typeface="Aptos" panose="020B0004020202020204" pitchFamily="34" charset="0"/>
+              </a:rPr>
+              <a:t>one</a:t>
+            </a:r>
+            <a:r>
+              <a:rPr lang="it-IT" sz="2000" dirty="0">
+                <a:latin typeface="Aptos" panose="020B0004020202020204" pitchFamily="34" charset="0"/>
+              </a:rPr>
+              <a:t> </a:t>
+            </a:r>
+            <a:r>
+              <a:rPr lang="it-IT" sz="2000" dirty="0" err="1">
+                <a:latin typeface="Aptos" panose="020B0004020202020204" pitchFamily="34" charset="0"/>
+              </a:rPr>
+              <a:t>vector</a:t>
+            </a:r>
+            <a:r>
+              <a:rPr lang="it-IT" sz="2000" dirty="0">
+                <a:latin typeface="Aptos" panose="020B0004020202020204" pitchFamily="34" charset="0"/>
+              </a:rPr>
+              <a:t> for the </a:t>
+            </a:r>
+            <a:r>
+              <a:rPr lang="it-IT" sz="2000" dirty="0" err="1">
+                <a:latin typeface="Aptos" panose="020B0004020202020204" pitchFamily="34" charset="0"/>
+              </a:rPr>
+              <a:t>circle</a:t>
+            </a:r>
+            <a:r>
+              <a:rPr lang="it-IT" sz="2000" dirty="0">
+                <a:latin typeface="Aptos" panose="020B0004020202020204" pitchFamily="34" charset="0"/>
+              </a:rPr>
+              <a:t> </a:t>
+            </a:r>
+            <a:r>
+              <a:rPr lang="it-IT" sz="2000" dirty="0" err="1">
+                <a:latin typeface="Aptos" panose="020B0004020202020204" pitchFamily="34" charset="0"/>
+              </a:rPr>
+              <a:t>radius</a:t>
+            </a:r>
+            <a:r>
+              <a:rPr lang="it-IT" sz="2000" dirty="0">
+                <a:latin typeface="Aptos" panose="020B0004020202020204" pitchFamily="34" charset="0"/>
+              </a:rPr>
+              <a:t> in SVG format</a:t>
+            </a:r>
+            <a:endParaRPr lang="en-GB" sz="2000" dirty="0">
+              <a:latin typeface="Aptos" panose="020B0004020202020204" pitchFamily="34" charset="0"/>
+            </a:endParaRPr>
+          </a:p>
+        </p:txBody>
+      </p:sp>
+      <p:sp>
+        <p:nvSpPr>
+          <p:cNvPr id="9" name="Ovale 7">
+            <a:extLst>
+              <a:ext uri="{FF2B5EF4-FFF2-40B4-BE49-F238E27FC236}">
+                <a16:creationId xmlns:a16="http://schemas.microsoft.com/office/drawing/2014/main" id="{5F7970A5-765B-4FEA-BBDA-DEC394CA9609}"/>
+              </a:ext>
+            </a:extLst>
+          </p:cNvPr>
+          <p:cNvSpPr/>
+          <p:nvPr/>
+        </p:nvSpPr>
+        <p:spPr>
+          <a:xfrm>
+            <a:off x="3164414" y="4960397"/>
+            <a:ext cx="758955" cy="707887"/>
+          </a:xfrm>
+          <a:prstGeom prst="ellipse">
+            <a:avLst/>
+          </a:prstGeom>
+        </p:spPr>
+        <p:style>
+          <a:lnRef idx="1">
+            <a:schemeClr val="accent4"/>
+          </a:lnRef>
+          <a:fillRef idx="2">
+            <a:schemeClr val="accent4"/>
+          </a:fillRef>
+          <a:effectRef idx="1">
+            <a:schemeClr val="accent4"/>
+          </a:effectRef>
+          <a:fontRef idx="minor">
+            <a:schemeClr val="dk1"/>
+          </a:fontRef>
+        </p:style>
+        <p:txBody>
+          <a:bodyPr rtlCol="0" anchor="ctr"/>
+          <a:lstStyle/>
+          <a:p>
+            <a:pPr algn="ctr"/>
+            <a:endParaRPr lang="en-GB">
+              <a:latin typeface="Aptos" panose="020B0004020202020204" pitchFamily="34" charset="0"/>
+            </a:endParaRPr>
+          </a:p>
+        </p:txBody>
+      </p:sp>
+      <p:sp>
+        <p:nvSpPr>
+          <p:cNvPr id="12" name="CasellaDiTesto 8">
+            <a:extLst>
+              <a:ext uri="{FF2B5EF4-FFF2-40B4-BE49-F238E27FC236}">
+                <a16:creationId xmlns:a16="http://schemas.microsoft.com/office/drawing/2014/main" id="{6AE185BE-3328-E921-44C8-34688C86F01F}"/>
+              </a:ext>
+            </a:extLst>
+          </p:cNvPr>
+          <p:cNvSpPr txBox="1"/>
+          <p:nvPr/>
+        </p:nvSpPr>
+        <p:spPr>
+          <a:xfrm>
+            <a:off x="2358089" y="5863825"/>
+            <a:ext cx="2358190" cy="830997"/>
+          </a:xfrm>
+          <a:prstGeom prst="rect">
+            <a:avLst/>
+          </a:prstGeom>
+          <a:noFill/>
+        </p:spPr>
+        <p:txBody>
+          <a:bodyPr wrap="square" rtlCol="0">
+            <a:spAutoFit/>
+          </a:bodyPr>
+          <a:lstStyle/>
+          <a:p>
+            <a:pPr algn="ctr"/>
+            <a:r>
+              <a:rPr lang="it-IT" sz="2400" b="1" dirty="0" err="1">
+                <a:latin typeface="Aptos" panose="020B0004020202020204" pitchFamily="34" charset="0"/>
+              </a:rPr>
+              <a:t>Entity</a:t>
+            </a:r>
+            <a:r>
+              <a:rPr lang="it-IT" sz="2400" dirty="0">
+                <a:latin typeface="Aptos" panose="020B0004020202020204" pitchFamily="34" charset="0"/>
+              </a:rPr>
+              <a:t>: a </a:t>
+            </a:r>
+            <a:r>
+              <a:rPr lang="it-IT" sz="2400" dirty="0" err="1">
+                <a:latin typeface="Aptos" panose="020B0004020202020204" pitchFamily="34" charset="0"/>
+              </a:rPr>
+              <a:t>circle</a:t>
+            </a:r>
+            <a:r>
+              <a:rPr lang="it-IT" sz="2400" dirty="0">
+                <a:latin typeface="Aptos" panose="020B0004020202020204" pitchFamily="34" charset="0"/>
+              </a:rPr>
+              <a:t> </a:t>
+            </a:r>
+            <a:r>
+              <a:rPr lang="it-IT" sz="2400" dirty="0" err="1">
+                <a:latin typeface="Aptos" panose="020B0004020202020204" pitchFamily="34" charset="0"/>
+              </a:rPr>
+              <a:t>realization</a:t>
+            </a:r>
+            <a:endParaRPr lang="en-GB" sz="2400" dirty="0">
+              <a:latin typeface="Aptos" panose="020B0004020202020204" pitchFamily="34" charset="0"/>
+            </a:endParaRPr>
+          </a:p>
+        </p:txBody>
+      </p:sp>
+      <p:sp>
+        <p:nvSpPr>
+          <p:cNvPr id="14" name="Ovale 9">
+            <a:extLst>
+              <a:ext uri="{FF2B5EF4-FFF2-40B4-BE49-F238E27FC236}">
+                <a16:creationId xmlns:a16="http://schemas.microsoft.com/office/drawing/2014/main" id="{F32FEA9E-3BD9-06EF-DC50-1B122C44974F}"/>
+              </a:ext>
+            </a:extLst>
+          </p:cNvPr>
+          <p:cNvSpPr/>
+          <p:nvPr/>
+        </p:nvSpPr>
+        <p:spPr>
+          <a:xfrm>
+            <a:off x="6234327" y="4423659"/>
+            <a:ext cx="666000" cy="666000"/>
+          </a:xfrm>
+          <a:prstGeom prst="ellipse">
+            <a:avLst/>
+          </a:prstGeom>
+        </p:spPr>
+        <p:style>
+          <a:lnRef idx="1">
+            <a:schemeClr val="accent4"/>
+          </a:lnRef>
+          <a:fillRef idx="2">
+            <a:schemeClr val="accent4"/>
+          </a:fillRef>
+          <a:effectRef idx="1">
+            <a:schemeClr val="accent4"/>
+          </a:effectRef>
+          <a:fontRef idx="minor">
+            <a:schemeClr val="dk1"/>
+          </a:fontRef>
+        </p:style>
+        <p:txBody>
+          <a:bodyPr rtlCol="0" anchor="ctr"/>
+          <a:lstStyle/>
+          <a:p>
+            <a:pPr algn="ctr"/>
+            <a:endParaRPr lang="en-GB">
+              <a:latin typeface="Aptos" panose="020B0004020202020204" pitchFamily="34" charset="0"/>
+            </a:endParaRPr>
+          </a:p>
+        </p:txBody>
+      </p:sp>
+      <p:sp>
+        <p:nvSpPr>
+          <p:cNvPr id="15" name="Ovale 10">
+            <a:extLst>
+              <a:ext uri="{FF2B5EF4-FFF2-40B4-BE49-F238E27FC236}">
+                <a16:creationId xmlns:a16="http://schemas.microsoft.com/office/drawing/2014/main" id="{EE051371-1634-50B8-DA99-2C8037241CE2}"/>
+              </a:ext>
+            </a:extLst>
+          </p:cNvPr>
+          <p:cNvSpPr/>
+          <p:nvPr/>
+        </p:nvSpPr>
+        <p:spPr>
+          <a:xfrm>
+            <a:off x="6208871" y="5662683"/>
+            <a:ext cx="666000" cy="666001"/>
+          </a:xfrm>
+          <a:prstGeom prst="ellipse">
+            <a:avLst/>
+          </a:prstGeom>
+        </p:spPr>
+        <p:style>
+          <a:lnRef idx="1">
+            <a:schemeClr val="accent4"/>
+          </a:lnRef>
+          <a:fillRef idx="2">
+            <a:schemeClr val="accent4"/>
+          </a:fillRef>
+          <a:effectRef idx="1">
+            <a:schemeClr val="accent4"/>
+          </a:effectRef>
+          <a:fontRef idx="minor">
+            <a:schemeClr val="dk1"/>
+          </a:fontRef>
+        </p:style>
+        <p:txBody>
+          <a:bodyPr rtlCol="0" anchor="ctr"/>
+          <a:lstStyle/>
+          <a:p>
+            <a:pPr algn="ctr"/>
+            <a:endParaRPr lang="en-GB">
+              <a:latin typeface="Aptos" panose="020B0004020202020204" pitchFamily="34" charset="0"/>
+            </a:endParaRPr>
+          </a:p>
+        </p:txBody>
+      </p:sp>
+      <p:sp>
+        <p:nvSpPr>
+          <p:cNvPr id="16" name="Ovale 11">
+            <a:extLst>
+              <a:ext uri="{FF2B5EF4-FFF2-40B4-BE49-F238E27FC236}">
+                <a16:creationId xmlns:a16="http://schemas.microsoft.com/office/drawing/2014/main" id="{61750C30-2836-4D19-1543-96FCE7FBFA7D}"/>
+              </a:ext>
+            </a:extLst>
+          </p:cNvPr>
+          <p:cNvSpPr/>
+          <p:nvPr/>
+        </p:nvSpPr>
+        <p:spPr>
+          <a:xfrm>
+            <a:off x="6531327" y="4724688"/>
+            <a:ext cx="72000" cy="72000"/>
+          </a:xfrm>
+          <a:prstGeom prst="ellipse">
+            <a:avLst/>
+          </a:prstGeom>
+          <a:solidFill>
+            <a:srgbClr val="C00000"/>
+          </a:solidFill>
+          <a:ln>
+            <a:solidFill>
+              <a:srgbClr val="C00000"/>
+            </a:solidFill>
+          </a:ln>
+        </p:spPr>
+        <p:style>
+          <a:lnRef idx="2">
+            <a:schemeClr val="accent1">
+              <a:shade val="50000"/>
+            </a:schemeClr>
+          </a:lnRef>
+          <a:fillRef idx="1">
+            <a:schemeClr val="accent1"/>
+          </a:fillRef>
+          <a:effectRef idx="0">
+            <a:schemeClr val="accent1"/>
+          </a:effectRef>
+          <a:fontRef idx="minor">
+            <a:schemeClr val="lt1"/>
+          </a:fontRef>
+        </p:style>
+        <p:txBody>
+          <a:bodyPr rtlCol="0" anchor="ctr"/>
+          <a:lstStyle/>
+          <a:p>
+            <a:pPr algn="ctr"/>
+            <a:endParaRPr lang="en-GB">
+              <a:latin typeface="Aptos" panose="020B0004020202020204" pitchFamily="34" charset="0"/>
+            </a:endParaRPr>
+          </a:p>
+        </p:txBody>
+      </p:sp>
       <p:cxnSp>
         <p:nvCxnSpPr>
-          <p:cNvPr id="10" name="Connettore 2 9"/>
-          <p:cNvCxnSpPr/>
+          <p:cNvPr id="20" name="Connettore diritto 13">
+            <a:extLst>
+              <a:ext uri="{FF2B5EF4-FFF2-40B4-BE49-F238E27FC236}">
+                <a16:creationId xmlns:a16="http://schemas.microsoft.com/office/drawing/2014/main" id="{5FF576D5-85EE-F89A-32DC-E1965BF24808}"/>
+              </a:ext>
+            </a:extLst>
+          </p:cNvPr>
+          <p:cNvCxnSpPr>
+            <a:cxnSpLocks/>
+            <a:stCxn id="14" idx="3"/>
+            <a:endCxn id="16" idx="3"/>
+          </p:cNvCxnSpPr>
           <p:nvPr/>
         </p:nvCxnSpPr>
         <p:spPr>
-          <a:xfrm flipH="1">
-            <a:off x="4024613" y="4272646"/>
-            <a:ext cx="487279" cy="246647"/>
+          <a:xfrm flipV="1">
+            <a:off x="6331860" y="4786144"/>
+            <a:ext cx="210011" cy="205982"/>
+          </a:xfrm>
+          <a:prstGeom prst="line">
+            <a:avLst/>
+          </a:prstGeom>
+          <a:ln w="19050">
+            <a:solidFill>
+              <a:srgbClr val="C00000"/>
+            </a:solidFill>
+            <a:prstDash val="dash"/>
+          </a:ln>
+        </p:spPr>
+        <p:style>
+          <a:lnRef idx="1">
+            <a:schemeClr val="accent1"/>
+          </a:lnRef>
+          <a:fillRef idx="0">
+            <a:schemeClr val="accent1"/>
+          </a:fillRef>
+          <a:effectRef idx="0">
+            <a:schemeClr val="accent1"/>
+          </a:effectRef>
+          <a:fontRef idx="minor">
+            <a:schemeClr val="tx1"/>
+          </a:fontRef>
+        </p:style>
+      </p:cxnSp>
+      <p:sp>
+        <p:nvSpPr>
+          <p:cNvPr id="21" name="Ovale 14">
+            <a:extLst>
+              <a:ext uri="{FF2B5EF4-FFF2-40B4-BE49-F238E27FC236}">
+                <a16:creationId xmlns:a16="http://schemas.microsoft.com/office/drawing/2014/main" id="{1E509505-4DAA-E81A-80F4-DBA95585C6CC}"/>
+              </a:ext>
+            </a:extLst>
+          </p:cNvPr>
+          <p:cNvSpPr/>
+          <p:nvPr/>
+        </p:nvSpPr>
+        <p:spPr>
+          <a:xfrm>
+            <a:off x="6246596" y="5783981"/>
+            <a:ext cx="72000" cy="72000"/>
+          </a:xfrm>
+          <a:prstGeom prst="ellipse">
+            <a:avLst/>
+          </a:prstGeom>
+          <a:solidFill>
+            <a:srgbClr val="C00000"/>
+          </a:solidFill>
+          <a:ln>
+            <a:solidFill>
+              <a:srgbClr val="C00000"/>
+            </a:solidFill>
+          </a:ln>
+        </p:spPr>
+        <p:style>
+          <a:lnRef idx="2">
+            <a:schemeClr val="accent1">
+              <a:shade val="50000"/>
+            </a:schemeClr>
+          </a:lnRef>
+          <a:fillRef idx="1">
+            <a:schemeClr val="accent1"/>
+          </a:fillRef>
+          <a:effectRef idx="0">
+            <a:schemeClr val="accent1"/>
+          </a:effectRef>
+          <a:fontRef idx="minor">
+            <a:schemeClr val="lt1"/>
+          </a:fontRef>
+        </p:style>
+        <p:txBody>
+          <a:bodyPr rtlCol="0" anchor="ctr"/>
+          <a:lstStyle/>
+          <a:p>
+            <a:pPr algn="ctr"/>
+            <a:endParaRPr lang="en-GB">
+              <a:latin typeface="Aptos" panose="020B0004020202020204" pitchFamily="34" charset="0"/>
+            </a:endParaRPr>
+          </a:p>
+        </p:txBody>
+      </p:sp>
+      <p:sp>
+        <p:nvSpPr>
+          <p:cNvPr id="22" name="Ovale 15">
+            <a:extLst>
+              <a:ext uri="{FF2B5EF4-FFF2-40B4-BE49-F238E27FC236}">
+                <a16:creationId xmlns:a16="http://schemas.microsoft.com/office/drawing/2014/main" id="{F35E7759-A029-EE65-EFA2-9600CE470E79}"/>
+              </a:ext>
+            </a:extLst>
+          </p:cNvPr>
+          <p:cNvSpPr/>
+          <p:nvPr/>
+        </p:nvSpPr>
+        <p:spPr>
+          <a:xfrm>
+            <a:off x="6759814" y="5728052"/>
+            <a:ext cx="72000" cy="72000"/>
+          </a:xfrm>
+          <a:prstGeom prst="ellipse">
+            <a:avLst/>
+          </a:prstGeom>
+          <a:solidFill>
+            <a:srgbClr val="C00000"/>
+          </a:solidFill>
+          <a:ln>
+            <a:solidFill>
+              <a:srgbClr val="C00000"/>
+            </a:solidFill>
+          </a:ln>
+        </p:spPr>
+        <p:style>
+          <a:lnRef idx="2">
+            <a:schemeClr val="accent1">
+              <a:shade val="50000"/>
+            </a:schemeClr>
+          </a:lnRef>
+          <a:fillRef idx="1">
+            <a:schemeClr val="accent1"/>
+          </a:fillRef>
+          <a:effectRef idx="0">
+            <a:schemeClr val="accent1"/>
+          </a:effectRef>
+          <a:fontRef idx="minor">
+            <a:schemeClr val="lt1"/>
+          </a:fontRef>
+        </p:style>
+        <p:txBody>
+          <a:bodyPr rtlCol="0" anchor="ctr"/>
+          <a:lstStyle/>
+          <a:p>
+            <a:pPr algn="ctr"/>
+            <a:endParaRPr lang="en-GB">
+              <a:latin typeface="Aptos" panose="020B0004020202020204" pitchFamily="34" charset="0"/>
+            </a:endParaRPr>
+          </a:p>
+        </p:txBody>
+      </p:sp>
+      <p:sp>
+        <p:nvSpPr>
+          <p:cNvPr id="23" name="Ovale 16">
+            <a:extLst>
+              <a:ext uri="{FF2B5EF4-FFF2-40B4-BE49-F238E27FC236}">
+                <a16:creationId xmlns:a16="http://schemas.microsoft.com/office/drawing/2014/main" id="{4624890A-B3F3-2369-1CFC-E2341F3EDB8B}"/>
+              </a:ext>
+            </a:extLst>
+          </p:cNvPr>
+          <p:cNvSpPr/>
+          <p:nvPr/>
+        </p:nvSpPr>
+        <p:spPr>
+          <a:xfrm>
+            <a:off x="6759814" y="6207323"/>
+            <a:ext cx="72000" cy="72000"/>
+          </a:xfrm>
+          <a:prstGeom prst="ellipse">
+            <a:avLst/>
+          </a:prstGeom>
+          <a:solidFill>
+            <a:srgbClr val="C00000"/>
+          </a:solidFill>
+          <a:ln>
+            <a:solidFill>
+              <a:srgbClr val="C00000"/>
+            </a:solidFill>
+          </a:ln>
+        </p:spPr>
+        <p:style>
+          <a:lnRef idx="2">
+            <a:schemeClr val="accent1">
+              <a:shade val="50000"/>
+            </a:schemeClr>
+          </a:lnRef>
+          <a:fillRef idx="1">
+            <a:schemeClr val="accent1"/>
+          </a:fillRef>
+          <a:effectRef idx="0">
+            <a:schemeClr val="accent1"/>
+          </a:effectRef>
+          <a:fontRef idx="minor">
+            <a:schemeClr val="lt1"/>
+          </a:fontRef>
+        </p:style>
+        <p:txBody>
+          <a:bodyPr rtlCol="0" anchor="ctr"/>
+          <a:lstStyle/>
+          <a:p>
+            <a:pPr algn="ctr"/>
+            <a:endParaRPr lang="en-GB">
+              <a:latin typeface="Aptos" panose="020B0004020202020204" pitchFamily="34" charset="0"/>
+            </a:endParaRPr>
+          </a:p>
+        </p:txBody>
+      </p:sp>
+      <p:sp>
+        <p:nvSpPr>
+          <p:cNvPr id="24" name="CasellaDiTesto 17">
+            <a:extLst>
+              <a:ext uri="{FF2B5EF4-FFF2-40B4-BE49-F238E27FC236}">
+                <a16:creationId xmlns:a16="http://schemas.microsoft.com/office/drawing/2014/main" id="{512F1C76-FFED-A272-AA19-05A1D634DD8E}"/>
+              </a:ext>
+            </a:extLst>
+          </p:cNvPr>
+          <p:cNvSpPr txBox="1"/>
+          <p:nvPr/>
+        </p:nvSpPr>
+        <p:spPr>
+          <a:xfrm>
+            <a:off x="7382757" y="5783981"/>
+            <a:ext cx="3631355" cy="1015663"/>
+          </a:xfrm>
+          <a:prstGeom prst="rect">
+            <a:avLst/>
+          </a:prstGeom>
+          <a:noFill/>
+        </p:spPr>
+        <p:txBody>
+          <a:bodyPr wrap="square" rtlCol="0">
+            <a:spAutoFit/>
+          </a:bodyPr>
+          <a:lstStyle/>
+          <a:p>
+            <a:pPr algn="ctr"/>
+            <a:r>
+              <a:rPr lang="it-IT" sz="2000" b="1" dirty="0" err="1">
+                <a:latin typeface="Aptos" panose="020B0004020202020204" pitchFamily="34" charset="0"/>
+              </a:rPr>
+              <a:t>Representation</a:t>
+            </a:r>
+            <a:r>
+              <a:rPr lang="it-IT" sz="2000" b="1" dirty="0">
+                <a:latin typeface="Aptos" panose="020B0004020202020204" pitchFamily="34" charset="0"/>
+              </a:rPr>
+              <a:t> 2</a:t>
+            </a:r>
+            <a:r>
+              <a:rPr lang="it-IT" sz="2000" dirty="0">
+                <a:latin typeface="Aptos" panose="020B0004020202020204" pitchFamily="34" charset="0"/>
+              </a:rPr>
+              <a:t>: </a:t>
+            </a:r>
+            <a:r>
+              <a:rPr lang="it-IT" sz="2000" dirty="0" err="1">
+                <a:latin typeface="Aptos" panose="020B0004020202020204" pitchFamily="34" charset="0"/>
+              </a:rPr>
+              <a:t>coordinates</a:t>
+            </a:r>
+            <a:r>
+              <a:rPr lang="it-IT" sz="2000" dirty="0">
+                <a:latin typeface="Aptos" panose="020B0004020202020204" pitchFamily="34" charset="0"/>
+              </a:rPr>
+              <a:t> of </a:t>
+            </a:r>
+            <a:r>
+              <a:rPr lang="it-IT" sz="2000" dirty="0" err="1">
+                <a:latin typeface="Aptos" panose="020B0004020202020204" pitchFamily="34" charset="0"/>
+              </a:rPr>
+              <a:t>three</a:t>
+            </a:r>
+            <a:r>
+              <a:rPr lang="it-IT" sz="2000" dirty="0">
+                <a:latin typeface="Aptos" panose="020B0004020202020204" pitchFamily="34" charset="0"/>
+              </a:rPr>
+              <a:t> </a:t>
+            </a:r>
+            <a:r>
+              <a:rPr lang="it-IT" sz="2000" dirty="0" err="1">
+                <a:latin typeface="Aptos" panose="020B0004020202020204" pitchFamily="34" charset="0"/>
+              </a:rPr>
+              <a:t>points</a:t>
+            </a:r>
+            <a:r>
+              <a:rPr lang="it-IT" sz="2000" dirty="0">
+                <a:latin typeface="Aptos" panose="020B0004020202020204" pitchFamily="34" charset="0"/>
+              </a:rPr>
+              <a:t> of the </a:t>
+            </a:r>
+            <a:r>
+              <a:rPr lang="it-IT" sz="2000" dirty="0" err="1">
+                <a:latin typeface="Aptos" panose="020B0004020202020204" pitchFamily="34" charset="0"/>
+              </a:rPr>
+              <a:t>circumference</a:t>
+            </a:r>
+            <a:r>
+              <a:rPr lang="it-IT" sz="2000" dirty="0">
+                <a:latin typeface="Aptos" panose="020B0004020202020204" pitchFamily="34" charset="0"/>
+              </a:rPr>
+              <a:t> in a </a:t>
+            </a:r>
+            <a:r>
+              <a:rPr lang="it-IT" sz="2000" dirty="0" err="1">
+                <a:latin typeface="Aptos" panose="020B0004020202020204" pitchFamily="34" charset="0"/>
+              </a:rPr>
+              <a:t>csv</a:t>
+            </a:r>
+            <a:r>
+              <a:rPr lang="it-IT" sz="2000" dirty="0">
+                <a:latin typeface="Aptos" panose="020B0004020202020204" pitchFamily="34" charset="0"/>
+              </a:rPr>
+              <a:t> file</a:t>
+            </a:r>
+            <a:endParaRPr lang="en-GB" sz="2000" dirty="0">
+              <a:latin typeface="Aptos" panose="020B0004020202020204" pitchFamily="34" charset="0"/>
+            </a:endParaRPr>
+          </a:p>
+        </p:txBody>
+      </p:sp>
+      <p:cxnSp>
+        <p:nvCxnSpPr>
+          <p:cNvPr id="25" name="Connettore 2 19">
+            <a:extLst>
+              <a:ext uri="{FF2B5EF4-FFF2-40B4-BE49-F238E27FC236}">
+                <a16:creationId xmlns:a16="http://schemas.microsoft.com/office/drawing/2014/main" id="{06053AE3-7267-3764-5B70-E26F42747E91}"/>
+              </a:ext>
+            </a:extLst>
+          </p:cNvPr>
+          <p:cNvCxnSpPr>
+            <a:cxnSpLocks/>
+          </p:cNvCxnSpPr>
+          <p:nvPr/>
+        </p:nvCxnSpPr>
+        <p:spPr>
+          <a:xfrm flipV="1">
+            <a:off x="4349754" y="4894769"/>
+            <a:ext cx="1508242" cy="253734"/>
           </a:xfrm>
           <a:prstGeom prst="straightConnector1">
             <a:avLst/>
           </a:prstGeom>
-          <a:ln w="28575">
+          <a:ln w="57150">
             <a:solidFill>
-              <a:srgbClr val="00B050"/>
+              <a:schemeClr val="tx1"/>
             </a:solidFill>
             <a:tailEnd type="triangle"/>
           </a:ln>
@@ -5021,21 +5843,29 @@
       </p:cxnSp>
       <p:cxnSp>
         <p:nvCxnSpPr>
-          <p:cNvPr id="11" name="Connettore 2 10"/>
-          <p:cNvCxnSpPr/>
+          <p:cNvPr id="26" name="Connettore 2 20">
+            <a:extLst>
+              <a:ext uri="{FF2B5EF4-FFF2-40B4-BE49-F238E27FC236}">
+                <a16:creationId xmlns:a16="http://schemas.microsoft.com/office/drawing/2014/main" id="{F913C906-ACA9-67F1-AF3C-F516FF8C8766}"/>
+              </a:ext>
+            </a:extLst>
+          </p:cNvPr>
+          <p:cNvCxnSpPr>
+            <a:cxnSpLocks/>
+          </p:cNvCxnSpPr>
           <p:nvPr/>
         </p:nvCxnSpPr>
         <p:spPr>
-          <a:xfrm flipH="1">
-            <a:off x="5171951" y="4274757"/>
-            <a:ext cx="1" cy="328863"/>
+          <a:xfrm>
+            <a:off x="4349754" y="5396470"/>
+            <a:ext cx="1508242" cy="573580"/>
           </a:xfrm>
           <a:prstGeom prst="straightConnector1">
             <a:avLst/>
           </a:prstGeom>
-          <a:ln w="28575">
+          <a:ln w="57150">
             <a:solidFill>
-              <a:srgbClr val="00B050"/>
+              <a:schemeClr val="tx1"/>
             </a:solidFill>
             <a:tailEnd type="triangle"/>
           </a:ln>
@@ -5055,194 +5885,6 @@
           </a:fontRef>
         </p:style>
       </p:cxnSp>
-      <p:cxnSp>
-        <p:nvCxnSpPr>
-          <p:cNvPr id="13" name="Connettore 2 12"/>
-          <p:cNvCxnSpPr/>
-          <p:nvPr/>
-        </p:nvCxnSpPr>
-        <p:spPr>
-          <a:xfrm>
-            <a:off x="5540120" y="4251588"/>
-            <a:ext cx="378420" cy="267705"/>
-          </a:xfrm>
-          <a:prstGeom prst="straightConnector1">
-            <a:avLst/>
-          </a:prstGeom>
-          <a:ln w="28575">
-            <a:solidFill>
-              <a:srgbClr val="00B050"/>
-            </a:solidFill>
-            <a:tailEnd type="triangle"/>
-          </a:ln>
-        </p:spPr>
-        <p:style>
-          <a:lnRef idx="1">
-            <a:schemeClr val="accent1"/>
-          </a:lnRef>
-          <a:fillRef idx="0">
-            <a:schemeClr val="accent1"/>
-          </a:fillRef>
-          <a:effectRef idx="0">
-            <a:schemeClr val="accent1"/>
-          </a:effectRef>
-          <a:fontRef idx="minor">
-            <a:schemeClr val="tx1"/>
-          </a:fontRef>
-        </p:style>
-      </p:cxnSp>
-      <p:sp>
-        <p:nvSpPr>
-          <p:cNvPr id="17" name="CasellaDiTesto 16"/>
-          <p:cNvSpPr txBox="1"/>
-          <p:nvPr/>
-        </p:nvSpPr>
-        <p:spPr>
-          <a:xfrm>
-            <a:off x="3468748" y="4506343"/>
-            <a:ext cx="1043144" cy="400110"/>
-          </a:xfrm>
-          <a:prstGeom prst="rect">
-            <a:avLst/>
-          </a:prstGeom>
-          <a:noFill/>
-        </p:spPr>
-        <p:txBody>
-          <a:bodyPr wrap="square" rtlCol="0">
-            <a:spAutoFit/>
-          </a:bodyPr>
-          <a:lstStyle/>
-          <a:p>
-            <a:r>
-              <a:rPr lang="en-US" sz="2000" dirty="0">
-                <a:latin typeface="Palatino Linotype" panose="02040502050505030304" pitchFamily="18" charset="0"/>
-              </a:rPr>
-              <a:t>Entity</a:t>
-            </a:r>
-          </a:p>
-        </p:txBody>
-      </p:sp>
-      <p:sp>
-        <p:nvSpPr>
-          <p:cNvPr id="18" name="CasellaDiTesto 17"/>
-          <p:cNvSpPr txBox="1"/>
-          <p:nvPr/>
-        </p:nvSpPr>
-        <p:spPr>
-          <a:xfrm>
-            <a:off x="4511892" y="4519293"/>
-            <a:ext cx="1290720" cy="400110"/>
-          </a:xfrm>
-          <a:prstGeom prst="rect">
-            <a:avLst/>
-          </a:prstGeom>
-          <a:noFill/>
-        </p:spPr>
-        <p:txBody>
-          <a:bodyPr wrap="square" rtlCol="0">
-            <a:spAutoFit/>
-          </a:bodyPr>
-          <a:lstStyle/>
-          <a:p>
-            <a:r>
-              <a:rPr lang="en-US" sz="2000" dirty="0">
-                <a:latin typeface="Palatino Linotype" panose="02040502050505030304" pitchFamily="18" charset="0"/>
-              </a:rPr>
-              <a:t>Resource</a:t>
-            </a:r>
-          </a:p>
-        </p:txBody>
-      </p:sp>
-      <p:sp>
-        <p:nvSpPr>
-          <p:cNvPr id="19" name="CasellaDiTesto 18"/>
-          <p:cNvSpPr txBox="1"/>
-          <p:nvPr/>
-        </p:nvSpPr>
-        <p:spPr>
-          <a:xfrm>
-            <a:off x="5729330" y="4519293"/>
-            <a:ext cx="1290720" cy="400110"/>
-          </a:xfrm>
-          <a:prstGeom prst="rect">
-            <a:avLst/>
-          </a:prstGeom>
-          <a:noFill/>
-        </p:spPr>
-        <p:txBody>
-          <a:bodyPr wrap="square" rtlCol="0">
-            <a:spAutoFit/>
-          </a:bodyPr>
-          <a:lstStyle/>
-          <a:p>
-            <a:r>
-              <a:rPr lang="en-US" sz="2000" dirty="0">
-                <a:latin typeface="Palatino Linotype" panose="02040502050505030304" pitchFamily="18" charset="0"/>
-              </a:rPr>
-              <a:t>Time</a:t>
-            </a:r>
-          </a:p>
-        </p:txBody>
-      </p:sp>
-      <p:sp>
-        <p:nvSpPr>
-          <p:cNvPr id="4" name="Segnaposto numero diapositiva 3"/>
-          <p:cNvSpPr>
-            <a:spLocks noGrp="1"/>
-          </p:cNvSpPr>
-          <p:nvPr>
-            <p:ph type="sldNum" sz="quarter" idx="12"/>
-          </p:nvPr>
-        </p:nvSpPr>
-        <p:spPr/>
-        <p:txBody>
-          <a:bodyPr/>
-          <a:lstStyle/>
-          <a:p>
-            <a:fld id="{31DE2C5B-556E-47B8-A792-024C2FCA4ACC}" type="slidenum">
-              <a:rPr lang="en-GB" smtClean="0"/>
-              <a:t>15</a:t>
-            </a:fld>
-            <a:endParaRPr lang="en-GB"/>
-          </a:p>
-        </p:txBody>
-      </p:sp>
-      <p:pic>
-        <p:nvPicPr>
-          <p:cNvPr id="6" name="Picture 5" descr="A close-up of a person's photo&#10;&#10;Description automatically generated">
-            <a:extLst>
-              <a:ext uri="{FF2B5EF4-FFF2-40B4-BE49-F238E27FC236}">
-                <a16:creationId xmlns:a16="http://schemas.microsoft.com/office/drawing/2014/main" id="{B9EA1219-A615-96DC-1162-12DBB58DC757}"/>
-              </a:ext>
-            </a:extLst>
-          </p:cNvPr>
-          <p:cNvPicPr>
-            <a:picLocks noChangeAspect="1"/>
-          </p:cNvPicPr>
-          <p:nvPr/>
-        </p:nvPicPr>
-        <p:blipFill>
-          <a:blip r:embed="rId3">
-            <a:extLst>
-              <a:ext uri="{28A0092B-C50C-407E-A947-70E740481C1C}">
-                <a14:useLocalDpi xmlns:a14="http://schemas.microsoft.com/office/drawing/2010/main" val="0"/>
-              </a:ext>
-            </a:extLst>
-          </a:blip>
-          <a:stretch>
-            <a:fillRect/>
-          </a:stretch>
-        </p:blipFill>
-        <p:spPr>
-          <a:xfrm>
-            <a:off x="10425651" y="4664616"/>
-            <a:ext cx="1501305" cy="1501305"/>
-          </a:xfrm>
-          <a:prstGeom prst="rect">
-            <a:avLst/>
-          </a:prstGeom>
-        </p:spPr>
-      </p:pic>
     </p:spTree>
     <p:extLst>
       <p:ext uri="{BB962C8B-B14F-4D97-AF65-F5344CB8AC3E}">
@@ -5368,34 +6010,9 @@
             <a:endParaRPr lang="en-US" dirty="0"/>
           </a:p>
           <a:p>
-            <a:pPr lvl="1"/>
-            <a:endParaRPr lang="en-US" dirty="0"/>
-          </a:p>
-          <a:p>
-            <a:pPr lvl="1"/>
-            <a:endParaRPr lang="en-US" dirty="0"/>
-          </a:p>
-          <a:p>
-            <a:r>
-              <a:rPr lang="en-US" sz="2000" dirty="0"/>
-              <a:t>A resource can also point to the empty set </a:t>
-            </a:r>
-            <a:r>
-              <a:rPr lang="en-US" sz="2000" dirty="0">
-                <a:sym typeface="Wingdings" panose="05000000000000000000" pitchFamily="2" charset="2"/>
-              </a:rPr>
-              <a:t> t</a:t>
-            </a:r>
-            <a:r>
-              <a:rPr lang="en-US" sz="2000" dirty="0"/>
-              <a:t>his </a:t>
-            </a:r>
-            <a:r>
-              <a:rPr lang="en-GB" sz="2000" dirty="0"/>
-              <a:t>allows to map a concept, i.e., to make references to that concept, before any realization of that concept exists. </a:t>
-            </a:r>
-          </a:p>
-          <a:p>
+            <a:pPr marL="0" indent="0">
+              <a:buNone/>
+            </a:pPr>
             <a:endParaRPr lang="en-US" dirty="0"/>
           </a:p>
         </p:txBody>
@@ -5439,7 +6056,9 @@
           <a:lstStyle/>
           <a:p>
             <a:pPr algn="ctr"/>
-            <a:endParaRPr lang="en-GB"/>
+            <a:endParaRPr lang="en-GB">
+              <a:latin typeface="Aptos" panose="020B0004020202020204" pitchFamily="34" charset="0"/>
+            </a:endParaRPr>
           </a:p>
         </p:txBody>
       </p:sp>
@@ -5467,13 +6086,13 @@
           <a:p>
             <a:r>
               <a:rPr lang="en-US" sz="2000" b="1" dirty="0">
-                <a:latin typeface="Palatino Linotype" panose="02040502050505030304" pitchFamily="18" charset="0"/>
+                <a:latin typeface="Aptos" panose="020B0004020202020204" pitchFamily="34" charset="0"/>
               </a:rPr>
               <a:t>Static resources</a:t>
             </a:r>
             <a:r>
               <a:rPr lang="en-US" sz="2000" dirty="0">
-                <a:latin typeface="Palatino Linotype" panose="02040502050505030304" pitchFamily="18" charset="0"/>
+                <a:latin typeface="Aptos" panose="020B0004020202020204" pitchFamily="34" charset="0"/>
               </a:rPr>
               <a:t>: they always point to the same entity (with a specific representation), in this case a precise document version. </a:t>
             </a:r>
@@ -5504,13 +6123,13 @@
           <a:p>
             <a:r>
               <a:rPr lang="en-US" sz="2000" b="1" dirty="0">
-                <a:latin typeface="Palatino Linotype" panose="02040502050505030304" pitchFamily="18" charset="0"/>
+                <a:latin typeface="Aptos" panose="020B0004020202020204" pitchFamily="34" charset="0"/>
               </a:rPr>
               <a:t>Dynamic resource</a:t>
             </a:r>
             <a:r>
               <a:rPr lang="en-US" sz="2000" dirty="0">
-                <a:latin typeface="Palatino Linotype" panose="02040502050505030304" pitchFamily="18" charset="0"/>
+                <a:latin typeface="Aptos" panose="020B0004020202020204" pitchFamily="34" charset="0"/>
               </a:rPr>
               <a:t>: the pointed entity can change over time. At some time, the resource «the latest version of document X» will point to the same entity of «the revision 1.1 of document X». </a:t>
             </a:r>
@@ -5622,8 +6241,12 @@
           <a:lstStyle/>
           <a:p>
             <a:r>
+              <a:rPr lang="it-IT" dirty="0"/>
+              <a:t>Resource </a:t>
+            </a:r>
+            <a:r>
               <a:rPr lang="it-IT" dirty="0" err="1"/>
-              <a:t>Resources</a:t>
+              <a:t>representations</a:t>
             </a:r>
             <a:endParaRPr lang="en-GB" dirty="0"/>
           </a:p>
@@ -5641,61 +6264,626 @@
         </p:nvSpPr>
         <p:spPr/>
         <p:txBody>
-          <a:bodyPr>
-            <a:normAutofit/>
+          <a:bodyPr/>
+          <a:lstStyle/>
+          <a:p>
+            <a:r>
+              <a:rPr lang="en-US" b="1" dirty="0"/>
+              <a:t>Resource representation</a:t>
+            </a:r>
+            <a:r>
+              <a:rPr lang="en-US" dirty="0"/>
+              <a:t>: a view of the current state (or realization) of the resource at the time of the request. </a:t>
+            </a:r>
+          </a:p>
+          <a:p>
+            <a:r>
+              <a:rPr lang="en-US" dirty="0"/>
+              <a:t>In a client-server interaction, the client asks to the server a resource (by the resource identifier), and the server answers by sending the corresponding resource representation. </a:t>
+            </a:r>
+          </a:p>
+          <a:p>
+            <a:r>
+              <a:rPr lang="en-US" b="1" dirty="0"/>
+              <a:t>Note</a:t>
+            </a:r>
+            <a:r>
+              <a:rPr lang="en-US" dirty="0"/>
+              <a:t>: The representation sent to the client is not necessarily the same used to store the data in the server.  </a:t>
+            </a:r>
+          </a:p>
+          <a:p>
+            <a:endParaRPr lang="en-GB" dirty="0"/>
+          </a:p>
+        </p:txBody>
+      </p:sp>
+      <p:sp>
+        <p:nvSpPr>
+          <p:cNvPr id="4" name="Rettangolo 3"/>
+          <p:cNvSpPr/>
+          <p:nvPr/>
+        </p:nvSpPr>
+        <p:spPr>
+          <a:xfrm>
+            <a:off x="1714500" y="4677276"/>
+            <a:ext cx="2225842" cy="1287379"/>
+          </a:xfrm>
+          <a:prstGeom prst="rect">
+            <a:avLst/>
+          </a:prstGeom>
+          <a:ln w="38100">
+            <a:solidFill>
+              <a:srgbClr val="00B050"/>
+            </a:solidFill>
+          </a:ln>
+        </p:spPr>
+        <p:style>
+          <a:lnRef idx="2">
+            <a:schemeClr val="accent6"/>
+          </a:lnRef>
+          <a:fillRef idx="1">
+            <a:schemeClr val="lt1"/>
+          </a:fillRef>
+          <a:effectRef idx="0">
+            <a:schemeClr val="accent6"/>
+          </a:effectRef>
+          <a:fontRef idx="minor">
+            <a:schemeClr val="dk1"/>
+          </a:fontRef>
+        </p:style>
+        <p:txBody>
+          <a:bodyPr rtlCol="0" anchor="ctr"/>
+          <a:lstStyle/>
+          <a:p>
+            <a:pPr algn="ctr"/>
+            <a:r>
+              <a:rPr lang="it-IT" sz="2800" dirty="0">
+                <a:latin typeface="Aptos" panose="020B0004020202020204" pitchFamily="34" charset="0"/>
+              </a:rPr>
+              <a:t>Client</a:t>
+            </a:r>
+            <a:endParaRPr lang="en-GB" sz="2800" dirty="0">
+              <a:latin typeface="Aptos" panose="020B0004020202020204" pitchFamily="34" charset="0"/>
+            </a:endParaRPr>
+          </a:p>
+        </p:txBody>
+      </p:sp>
+      <p:sp>
+        <p:nvSpPr>
+          <p:cNvPr id="5" name="Rettangolo 4"/>
+          <p:cNvSpPr/>
+          <p:nvPr/>
+        </p:nvSpPr>
+        <p:spPr>
+          <a:xfrm>
+            <a:off x="8339890" y="4265195"/>
+            <a:ext cx="2225842" cy="2111542"/>
+          </a:xfrm>
+          <a:prstGeom prst="rect">
+            <a:avLst/>
+          </a:prstGeom>
+          <a:ln w="38100">
+            <a:solidFill>
+              <a:srgbClr val="00B050"/>
+            </a:solidFill>
+          </a:ln>
+        </p:spPr>
+        <p:style>
+          <a:lnRef idx="2">
+            <a:schemeClr val="accent6"/>
+          </a:lnRef>
+          <a:fillRef idx="1">
+            <a:schemeClr val="lt1"/>
+          </a:fillRef>
+          <a:effectRef idx="0">
+            <a:schemeClr val="accent6"/>
+          </a:effectRef>
+          <a:fontRef idx="minor">
+            <a:schemeClr val="dk1"/>
+          </a:fontRef>
+        </p:style>
+        <p:txBody>
+          <a:bodyPr rtlCol="0" anchor="t"/>
+          <a:lstStyle/>
+          <a:p>
+            <a:pPr algn="ctr"/>
+            <a:r>
+              <a:rPr lang="it-IT" sz="2400" dirty="0">
+                <a:latin typeface="Aptos" panose="020B0004020202020204" pitchFamily="34" charset="0"/>
+              </a:rPr>
+              <a:t>Server</a:t>
+            </a:r>
+          </a:p>
+        </p:txBody>
+      </p:sp>
+      <p:cxnSp>
+        <p:nvCxnSpPr>
+          <p:cNvPr id="7" name="Connettore 2 6"/>
+          <p:cNvCxnSpPr/>
+          <p:nvPr/>
+        </p:nvCxnSpPr>
+        <p:spPr>
+          <a:xfrm flipV="1">
+            <a:off x="4421605" y="4746458"/>
+            <a:ext cx="3410953" cy="24063"/>
+          </a:xfrm>
+          <a:prstGeom prst="straightConnector1">
+            <a:avLst/>
+          </a:prstGeom>
+          <a:ln w="28575">
+            <a:solidFill>
+              <a:schemeClr val="tx1"/>
+            </a:solidFill>
+            <a:tailEnd type="triangle"/>
+          </a:ln>
+        </p:spPr>
+        <p:style>
+          <a:lnRef idx="1">
+            <a:schemeClr val="accent1"/>
+          </a:lnRef>
+          <a:fillRef idx="0">
+            <a:schemeClr val="accent1"/>
+          </a:fillRef>
+          <a:effectRef idx="0">
+            <a:schemeClr val="accent1"/>
+          </a:effectRef>
+          <a:fontRef idx="minor">
+            <a:schemeClr val="tx1"/>
+          </a:fontRef>
+        </p:style>
+      </p:cxnSp>
+      <p:sp>
+        <p:nvSpPr>
+          <p:cNvPr id="9" name="CasellaDiTesto 8"/>
+          <p:cNvSpPr txBox="1"/>
+          <p:nvPr/>
+        </p:nvSpPr>
+        <p:spPr>
+          <a:xfrm>
+            <a:off x="5075183" y="4310555"/>
+            <a:ext cx="2358190" cy="369332"/>
+          </a:xfrm>
+          <a:prstGeom prst="rect">
+            <a:avLst/>
+          </a:prstGeom>
+          <a:noFill/>
+        </p:spPr>
+        <p:txBody>
+          <a:bodyPr wrap="square" rtlCol="0">
+            <a:spAutoFit/>
           </a:bodyPr>
           <a:lstStyle/>
           <a:p>
-            <a:pPr marL="0" indent="0">
-              <a:buNone/>
-            </a:pPr>
-            <a:r>
-              <a:rPr lang="en-GB" dirty="0"/>
-              <a:t>The </a:t>
-            </a:r>
-            <a:r>
-              <a:rPr lang="en-GB" b="1" dirty="0"/>
-              <a:t>abstract</a:t>
-            </a:r>
-            <a:r>
-              <a:rPr lang="en-GB" dirty="0"/>
-              <a:t> definition of resources in REST facilitates </a:t>
-            </a:r>
-            <a:r>
-              <a:rPr lang="en-GB" b="1" dirty="0"/>
-              <a:t>content negotiation</a:t>
-            </a:r>
-            <a:r>
-              <a:rPr lang="en-GB" dirty="0"/>
-              <a:t>, which is the process of selecting the most appropriate representation of a resource based on the characteristics of the request. </a:t>
-            </a:r>
-          </a:p>
-          <a:p>
-            <a:pPr marL="0" indent="0">
-              <a:buNone/>
-            </a:pPr>
-            <a:endParaRPr lang="en-GB" dirty="0"/>
-          </a:p>
-          <a:p>
-            <a:pPr marL="0" indent="0">
-              <a:buNone/>
-            </a:pPr>
-            <a:endParaRPr lang="en-GB" dirty="0"/>
-          </a:p>
-          <a:p>
-            <a:pPr marL="0" indent="0">
-              <a:buNone/>
-            </a:pPr>
-            <a:r>
-              <a:rPr lang="en-GB" dirty="0"/>
-              <a:t>Let's break down why this is possible</a:t>
-            </a:r>
-          </a:p>
-        </p:txBody>
-      </p:sp>
-      <p:sp>
-        <p:nvSpPr>
-          <p:cNvPr id="4" name="Segnaposto numero diapositiva 3"/>
+            <a:r>
+              <a:rPr lang="it-IT" dirty="0">
+                <a:latin typeface="Aptos" panose="020B0004020202020204" pitchFamily="34" charset="0"/>
+              </a:rPr>
+              <a:t>Resource </a:t>
+            </a:r>
+            <a:r>
+              <a:rPr lang="it-IT" dirty="0" err="1">
+                <a:latin typeface="Aptos" panose="020B0004020202020204" pitchFamily="34" charset="0"/>
+              </a:rPr>
+              <a:t>identifier</a:t>
+            </a:r>
+            <a:endParaRPr lang="en-GB" dirty="0">
+              <a:latin typeface="Aptos" panose="020B0004020202020204" pitchFamily="34" charset="0"/>
+            </a:endParaRPr>
+          </a:p>
+        </p:txBody>
+      </p:sp>
+      <p:cxnSp>
+        <p:nvCxnSpPr>
+          <p:cNvPr id="10" name="Connettore 2 9"/>
+          <p:cNvCxnSpPr/>
+          <p:nvPr/>
+        </p:nvCxnSpPr>
+        <p:spPr>
+          <a:xfrm flipH="1">
+            <a:off x="4421605" y="5759639"/>
+            <a:ext cx="3384884" cy="0"/>
+          </a:xfrm>
+          <a:prstGeom prst="straightConnector1">
+            <a:avLst/>
+          </a:prstGeom>
+          <a:ln w="28575">
+            <a:solidFill>
+              <a:schemeClr val="tx1"/>
+            </a:solidFill>
+            <a:tailEnd type="triangle"/>
+          </a:ln>
+        </p:spPr>
+        <p:style>
+          <a:lnRef idx="1">
+            <a:schemeClr val="accent1"/>
+          </a:lnRef>
+          <a:fillRef idx="0">
+            <a:schemeClr val="accent1"/>
+          </a:fillRef>
+          <a:effectRef idx="0">
+            <a:schemeClr val="accent1"/>
+          </a:effectRef>
+          <a:fontRef idx="minor">
+            <a:schemeClr val="tx1"/>
+          </a:fontRef>
+        </p:style>
+      </p:cxnSp>
+      <p:sp>
+        <p:nvSpPr>
+          <p:cNvPr id="14" name="Ovale 13"/>
+          <p:cNvSpPr/>
+          <p:nvPr/>
+        </p:nvSpPr>
+        <p:spPr>
+          <a:xfrm>
+            <a:off x="8844214" y="4882291"/>
+            <a:ext cx="1217194" cy="877348"/>
+          </a:xfrm>
+          <a:prstGeom prst="ellipse">
+            <a:avLst/>
+          </a:prstGeom>
+          <a:solidFill>
+            <a:srgbClr val="00B050"/>
+          </a:solidFill>
+          <a:ln>
+            <a:solidFill>
+              <a:schemeClr val="tx1"/>
+            </a:solidFill>
+          </a:ln>
+        </p:spPr>
+        <p:style>
+          <a:lnRef idx="2">
+            <a:schemeClr val="accent1">
+              <a:shade val="50000"/>
+            </a:schemeClr>
+          </a:lnRef>
+          <a:fillRef idx="1">
+            <a:schemeClr val="accent1"/>
+          </a:fillRef>
+          <a:effectRef idx="0">
+            <a:schemeClr val="accent1"/>
+          </a:effectRef>
+          <a:fontRef idx="minor">
+            <a:schemeClr val="lt1"/>
+          </a:fontRef>
+        </p:style>
+        <p:txBody>
+          <a:bodyPr rtlCol="0" anchor="ctr"/>
+          <a:lstStyle/>
+          <a:p>
+            <a:pPr algn="ctr"/>
+            <a:r>
+              <a:rPr lang="it-IT" dirty="0" err="1">
+                <a:latin typeface="Aptos" panose="020B0004020202020204" pitchFamily="34" charset="0"/>
+              </a:rPr>
+              <a:t>Entity</a:t>
+            </a:r>
+            <a:endParaRPr lang="en-GB" dirty="0">
+              <a:latin typeface="Aptos" panose="020B0004020202020204" pitchFamily="34" charset="0"/>
+            </a:endParaRPr>
+          </a:p>
+          <a:p>
+            <a:pPr algn="ctr"/>
+            <a:endParaRPr lang="it-IT" dirty="0">
+              <a:latin typeface="Aptos" panose="020B0004020202020204" pitchFamily="34" charset="0"/>
+            </a:endParaRPr>
+          </a:p>
+        </p:txBody>
+      </p:sp>
+      <p:sp>
+        <p:nvSpPr>
+          <p:cNvPr id="15" name="Rettangolo 14"/>
+          <p:cNvSpPr/>
+          <p:nvPr/>
+        </p:nvSpPr>
+        <p:spPr>
+          <a:xfrm>
+            <a:off x="8201814" y="4634527"/>
+            <a:ext cx="264695" cy="1330128"/>
+          </a:xfrm>
+          <a:prstGeom prst="rect">
+            <a:avLst/>
+          </a:prstGeom>
+        </p:spPr>
+        <p:style>
+          <a:lnRef idx="2">
+            <a:schemeClr val="dk1">
+              <a:shade val="50000"/>
+            </a:schemeClr>
+          </a:lnRef>
+          <a:fillRef idx="1">
+            <a:schemeClr val="dk1"/>
+          </a:fillRef>
+          <a:effectRef idx="0">
+            <a:schemeClr val="dk1"/>
+          </a:effectRef>
+          <a:fontRef idx="minor">
+            <a:schemeClr val="lt1"/>
+          </a:fontRef>
+        </p:style>
+        <p:txBody>
+          <a:bodyPr rtlCol="0" anchor="ctr"/>
+          <a:lstStyle/>
+          <a:p>
+            <a:pPr algn="ctr"/>
+            <a:endParaRPr lang="en-GB">
+              <a:latin typeface="Aptos" panose="020B0004020202020204" pitchFamily="34" charset="0"/>
+            </a:endParaRPr>
+          </a:p>
+        </p:txBody>
+      </p:sp>
+      <p:sp>
+        <p:nvSpPr>
+          <p:cNvPr id="16" name="Rettangolo 15"/>
+          <p:cNvSpPr/>
+          <p:nvPr/>
+        </p:nvSpPr>
+        <p:spPr>
+          <a:xfrm>
+            <a:off x="3807994" y="4806569"/>
+            <a:ext cx="264695" cy="986043"/>
+          </a:xfrm>
+          <a:prstGeom prst="rect">
+            <a:avLst/>
+          </a:prstGeom>
+        </p:spPr>
+        <p:style>
+          <a:lnRef idx="2">
+            <a:schemeClr val="dk1">
+              <a:shade val="50000"/>
+            </a:schemeClr>
+          </a:lnRef>
+          <a:fillRef idx="1">
+            <a:schemeClr val="dk1"/>
+          </a:fillRef>
+          <a:effectRef idx="0">
+            <a:schemeClr val="dk1"/>
+          </a:effectRef>
+          <a:fontRef idx="minor">
+            <a:schemeClr val="lt1"/>
+          </a:fontRef>
+        </p:style>
+        <p:txBody>
+          <a:bodyPr rtlCol="0" anchor="ctr"/>
+          <a:lstStyle/>
+          <a:p>
+            <a:pPr algn="ctr"/>
+            <a:endParaRPr lang="en-GB">
+              <a:latin typeface="Aptos" panose="020B0004020202020204" pitchFamily="34" charset="0"/>
+            </a:endParaRPr>
+          </a:p>
+        </p:txBody>
+      </p:sp>
+      <p:cxnSp>
+        <p:nvCxnSpPr>
+          <p:cNvPr id="19" name="Connettore 2 18"/>
+          <p:cNvCxnSpPr/>
+          <p:nvPr/>
+        </p:nvCxnSpPr>
+        <p:spPr>
+          <a:xfrm>
+            <a:off x="8515784" y="4770521"/>
+            <a:ext cx="475247" cy="186489"/>
+          </a:xfrm>
+          <a:prstGeom prst="straightConnector1">
+            <a:avLst/>
+          </a:prstGeom>
+          <a:ln w="28575">
+            <a:solidFill>
+              <a:schemeClr val="tx1"/>
+            </a:solidFill>
+            <a:prstDash val="sysDash"/>
+            <a:tailEnd type="triangle"/>
+          </a:ln>
+        </p:spPr>
+        <p:style>
+          <a:lnRef idx="1">
+            <a:schemeClr val="accent1"/>
+          </a:lnRef>
+          <a:fillRef idx="0">
+            <a:schemeClr val="accent1"/>
+          </a:fillRef>
+          <a:effectRef idx="0">
+            <a:schemeClr val="accent1"/>
+          </a:effectRef>
+          <a:fontRef idx="minor">
+            <a:schemeClr val="tx1"/>
+          </a:fontRef>
+        </p:style>
+      </p:cxnSp>
+      <p:cxnSp>
+        <p:nvCxnSpPr>
+          <p:cNvPr id="20" name="Connettore 2 19"/>
+          <p:cNvCxnSpPr/>
+          <p:nvPr/>
+        </p:nvCxnSpPr>
+        <p:spPr>
+          <a:xfrm flipH="1">
+            <a:off x="8515784" y="5618747"/>
+            <a:ext cx="423679" cy="232001"/>
+          </a:xfrm>
+          <a:prstGeom prst="straightConnector1">
+            <a:avLst/>
+          </a:prstGeom>
+          <a:ln w="28575">
+            <a:solidFill>
+              <a:schemeClr val="tx1"/>
+            </a:solidFill>
+            <a:prstDash val="sysDash"/>
+            <a:tailEnd type="triangle"/>
+          </a:ln>
+        </p:spPr>
+        <p:style>
+          <a:lnRef idx="1">
+            <a:schemeClr val="accent1"/>
+          </a:lnRef>
+          <a:fillRef idx="0">
+            <a:schemeClr val="accent1"/>
+          </a:fillRef>
+          <a:effectRef idx="0">
+            <a:schemeClr val="accent1"/>
+          </a:effectRef>
+          <a:fontRef idx="minor">
+            <a:schemeClr val="tx1"/>
+          </a:fontRef>
+        </p:style>
+      </p:cxnSp>
+      <p:sp>
+        <p:nvSpPr>
+          <p:cNvPr id="24" name="CasellaDiTesto 23"/>
+          <p:cNvSpPr txBox="1"/>
+          <p:nvPr/>
+        </p:nvSpPr>
+        <p:spPr>
+          <a:xfrm>
+            <a:off x="8835765" y="5269287"/>
+            <a:ext cx="1553076" cy="307777"/>
+          </a:xfrm>
+          <a:prstGeom prst="rect">
+            <a:avLst/>
+          </a:prstGeom>
+          <a:noFill/>
+        </p:spPr>
+        <p:txBody>
+          <a:bodyPr wrap="square" rtlCol="0">
+            <a:spAutoFit/>
+          </a:bodyPr>
+          <a:lstStyle/>
+          <a:p>
+            <a:r>
+              <a:rPr lang="it-IT" sz="1400" dirty="0">
+                <a:solidFill>
+                  <a:schemeClr val="bg1"/>
+                </a:solidFill>
+                <a:latin typeface="Aptos" panose="020B0004020202020204" pitchFamily="34" charset="0"/>
+              </a:rPr>
+              <a:t>(</a:t>
+            </a:r>
+            <a:r>
+              <a:rPr lang="it-IT" sz="1400" dirty="0" err="1">
+                <a:solidFill>
+                  <a:schemeClr val="bg1"/>
+                </a:solidFill>
+                <a:latin typeface="Aptos" panose="020B0004020202020204" pitchFamily="34" charset="0"/>
+              </a:rPr>
+              <a:t>raw</a:t>
+            </a:r>
+            <a:r>
+              <a:rPr lang="it-IT" sz="1400" dirty="0">
+                <a:solidFill>
+                  <a:schemeClr val="bg1"/>
+                </a:solidFill>
+                <a:latin typeface="Aptos" panose="020B0004020202020204" pitchFamily="34" charset="0"/>
+              </a:rPr>
+              <a:t> format)</a:t>
+            </a:r>
+            <a:endParaRPr lang="en-GB" sz="1400" dirty="0">
+              <a:solidFill>
+                <a:schemeClr val="bg1"/>
+              </a:solidFill>
+              <a:latin typeface="Aptos" panose="020B0004020202020204" pitchFamily="34" charset="0"/>
+            </a:endParaRPr>
+          </a:p>
+        </p:txBody>
+      </p:sp>
+      <p:sp>
+        <p:nvSpPr>
+          <p:cNvPr id="25" name="Pentagono regolare 24"/>
+          <p:cNvSpPr/>
+          <p:nvPr/>
+        </p:nvSpPr>
+        <p:spPr>
+          <a:xfrm>
+            <a:off x="5075184" y="5047540"/>
+            <a:ext cx="1957564" cy="876830"/>
+          </a:xfrm>
+          <a:prstGeom prst="pentagon">
+            <a:avLst/>
+          </a:prstGeom>
+          <a:solidFill>
+            <a:srgbClr val="00B050"/>
+          </a:solidFill>
+        </p:spPr>
+        <p:style>
+          <a:lnRef idx="2">
+            <a:schemeClr val="accent1">
+              <a:shade val="50000"/>
+            </a:schemeClr>
+          </a:lnRef>
+          <a:fillRef idx="1">
+            <a:schemeClr val="accent1"/>
+          </a:fillRef>
+          <a:effectRef idx="0">
+            <a:schemeClr val="accent1"/>
+          </a:effectRef>
+          <a:fontRef idx="minor">
+            <a:schemeClr val="lt1"/>
+          </a:fontRef>
+        </p:style>
+        <p:txBody>
+          <a:bodyPr rtlCol="0" anchor="ctr"/>
+          <a:lstStyle/>
+          <a:p>
+            <a:pPr algn="ctr"/>
+            <a:endParaRPr lang="en-GB">
+              <a:latin typeface="Aptos" panose="020B0004020202020204" pitchFamily="34" charset="0"/>
+            </a:endParaRPr>
+          </a:p>
+        </p:txBody>
+      </p:sp>
+      <p:sp>
+        <p:nvSpPr>
+          <p:cNvPr id="13" name="CasellaDiTesto 12"/>
+          <p:cNvSpPr txBox="1"/>
+          <p:nvPr/>
+        </p:nvSpPr>
+        <p:spPr>
+          <a:xfrm>
+            <a:off x="5075183" y="5180682"/>
+            <a:ext cx="1949116" cy="646331"/>
+          </a:xfrm>
+          <a:prstGeom prst="rect">
+            <a:avLst/>
+          </a:prstGeom>
+          <a:noFill/>
+        </p:spPr>
+        <p:txBody>
+          <a:bodyPr wrap="square" rtlCol="0">
+            <a:spAutoFit/>
+          </a:bodyPr>
+          <a:lstStyle/>
+          <a:p>
+            <a:pPr algn="ctr"/>
+            <a:r>
+              <a:rPr lang="it-IT" dirty="0">
+                <a:solidFill>
+                  <a:schemeClr val="bg1"/>
+                </a:solidFill>
+                <a:latin typeface="Aptos" panose="020B0004020202020204" pitchFamily="34" charset="0"/>
+              </a:rPr>
+              <a:t>Resource </a:t>
+            </a:r>
+            <a:r>
+              <a:rPr lang="it-IT" dirty="0" err="1">
+                <a:solidFill>
+                  <a:schemeClr val="bg1"/>
+                </a:solidFill>
+                <a:latin typeface="Aptos" panose="020B0004020202020204" pitchFamily="34" charset="0"/>
+              </a:rPr>
+              <a:t>representation</a:t>
+            </a:r>
+            <a:endParaRPr lang="en-GB" dirty="0">
+              <a:solidFill>
+                <a:schemeClr val="bg1"/>
+              </a:solidFill>
+              <a:latin typeface="Aptos" panose="020B0004020202020204" pitchFamily="34" charset="0"/>
+            </a:endParaRPr>
+          </a:p>
+        </p:txBody>
+      </p:sp>
+      <p:sp>
+        <p:nvSpPr>
+          <p:cNvPr id="6" name="Segnaposto numero diapositiva 5"/>
           <p:cNvSpPr>
             <a:spLocks noGrp="1"/>
           </p:cNvSpPr>
@@ -5716,61 +6904,10 @@
           </a:p>
         </p:txBody>
       </p:sp>
-      <p:sp>
-        <p:nvSpPr>
-          <p:cNvPr id="5" name="Rectangle 4">
-            <a:extLst>
-              <a:ext uri="{FF2B5EF4-FFF2-40B4-BE49-F238E27FC236}">
-                <a16:creationId xmlns:a16="http://schemas.microsoft.com/office/drawing/2014/main" id="{B0B3BBEA-C95D-89F0-4566-995A69BE879B}"/>
-              </a:ext>
-            </a:extLst>
-          </p:cNvPr>
-          <p:cNvSpPr/>
-          <p:nvPr/>
-        </p:nvSpPr>
-        <p:spPr>
-          <a:xfrm>
-            <a:off x="8894618" y="259773"/>
-            <a:ext cx="2587337" cy="561109"/>
-          </a:xfrm>
-          <a:prstGeom prst="rect">
-            <a:avLst/>
-          </a:prstGeom>
-        </p:spPr>
-        <p:style>
-          <a:lnRef idx="2">
-            <a:schemeClr val="accent4">
-              <a:shade val="15000"/>
-            </a:schemeClr>
-          </a:lnRef>
-          <a:fillRef idx="1">
-            <a:schemeClr val="accent4"/>
-          </a:fillRef>
-          <a:effectRef idx="0">
-            <a:schemeClr val="accent4"/>
-          </a:effectRef>
-          <a:fontRef idx="minor">
-            <a:schemeClr val="lt1"/>
-          </a:fontRef>
-        </p:style>
-        <p:txBody>
-          <a:bodyPr rtlCol="0" anchor="ctr"/>
-          <a:lstStyle/>
-          <a:p>
-            <a:pPr algn="ctr"/>
-            <a:r>
-              <a:rPr lang="en-US" sz="2400" b="1" dirty="0">
-                <a:latin typeface="Palatino Linotype" panose="02040502050505030304" pitchFamily="18" charset="0"/>
-              </a:rPr>
-              <a:t>NEW SLIDE</a:t>
-            </a:r>
-          </a:p>
-        </p:txBody>
-      </p:sp>
     </p:spTree>
     <p:extLst>
       <p:ext uri="{BB962C8B-B14F-4D97-AF65-F5344CB8AC3E}">
-        <p14:creationId xmlns:p14="http://schemas.microsoft.com/office/powerpoint/2010/main" val="3491970060"/>
+        <p14:creationId xmlns:p14="http://schemas.microsoft.com/office/powerpoint/2010/main" val="194815998"/>
       </p:ext>
     </p:extLst>
   </p:cSld>
@@ -5813,8 +6950,20 @@
           <a:lstStyle/>
           <a:p>
             <a:r>
+              <a:rPr lang="it-IT" dirty="0"/>
+              <a:t>REST self-</a:t>
+            </a:r>
+            <a:r>
               <a:rPr lang="it-IT" dirty="0" err="1"/>
-              <a:t>Resources</a:t>
+              <a:t>descriptive</a:t>
+            </a:r>
+            <a:r>
+              <a:rPr lang="it-IT" dirty="0"/>
+              <a:t> </a:t>
+            </a:r>
+            <a:r>
+              <a:rPr lang="it-IT" dirty="0" err="1"/>
+              <a:t>messages</a:t>
             </a:r>
             <a:endParaRPr lang="en-GB" dirty="0"/>
           </a:p>
@@ -5822,56 +6971,1054 @@
       </p:sp>
       <p:sp>
         <p:nvSpPr>
-          <p:cNvPr id="3" name="Segnaposto contenuto 2"/>
-          <p:cNvSpPr>
-            <a:spLocks noGrp="1"/>
-          </p:cNvSpPr>
-          <p:nvPr>
-            <p:ph idx="1"/>
-          </p:nvPr>
-        </p:nvSpPr>
-        <p:spPr/>
-        <p:txBody>
-          <a:bodyPr>
-            <a:normAutofit/>
+          <p:cNvPr id="4" name="Rettangolo 3"/>
+          <p:cNvSpPr/>
+          <p:nvPr/>
+        </p:nvSpPr>
+        <p:spPr>
+          <a:xfrm>
+            <a:off x="473459" y="3308140"/>
+            <a:ext cx="2225842" cy="1287379"/>
+          </a:xfrm>
+          <a:prstGeom prst="rect">
+            <a:avLst/>
+          </a:prstGeom>
+          <a:ln w="38100">
+            <a:solidFill>
+              <a:srgbClr val="00B050"/>
+            </a:solidFill>
+          </a:ln>
+        </p:spPr>
+        <p:style>
+          <a:lnRef idx="2">
+            <a:schemeClr val="accent6"/>
+          </a:lnRef>
+          <a:fillRef idx="1">
+            <a:schemeClr val="lt1"/>
+          </a:fillRef>
+          <a:effectRef idx="0">
+            <a:schemeClr val="accent6"/>
+          </a:effectRef>
+          <a:fontRef idx="minor">
+            <a:schemeClr val="dk1"/>
+          </a:fontRef>
+        </p:style>
+        <p:txBody>
+          <a:bodyPr rtlCol="0" anchor="ctr"/>
+          <a:lstStyle/>
+          <a:p>
+            <a:pPr algn="ctr"/>
+            <a:r>
+              <a:rPr lang="it-IT" sz="2800" dirty="0">
+                <a:latin typeface="Aptos" panose="020B0004020202020204" pitchFamily="34" charset="0"/>
+              </a:rPr>
+              <a:t>Client</a:t>
+            </a:r>
+            <a:endParaRPr lang="en-GB" sz="2800" dirty="0">
+              <a:latin typeface="Aptos" panose="020B0004020202020204" pitchFamily="34" charset="0"/>
+            </a:endParaRPr>
+          </a:p>
+        </p:txBody>
+      </p:sp>
+      <p:sp>
+        <p:nvSpPr>
+          <p:cNvPr id="5" name="Rettangolo 4"/>
+          <p:cNvSpPr/>
+          <p:nvPr/>
+        </p:nvSpPr>
+        <p:spPr>
+          <a:xfrm>
+            <a:off x="9035497" y="2971801"/>
+            <a:ext cx="2225842" cy="2111542"/>
+          </a:xfrm>
+          <a:prstGeom prst="rect">
+            <a:avLst/>
+          </a:prstGeom>
+          <a:ln w="38100">
+            <a:solidFill>
+              <a:srgbClr val="00B050"/>
+            </a:solidFill>
+          </a:ln>
+        </p:spPr>
+        <p:style>
+          <a:lnRef idx="2">
+            <a:schemeClr val="accent6"/>
+          </a:lnRef>
+          <a:fillRef idx="1">
+            <a:schemeClr val="lt1"/>
+          </a:fillRef>
+          <a:effectRef idx="0">
+            <a:schemeClr val="accent6"/>
+          </a:effectRef>
+          <a:fontRef idx="minor">
+            <a:schemeClr val="dk1"/>
+          </a:fontRef>
+        </p:style>
+        <p:txBody>
+          <a:bodyPr rtlCol="0" anchor="t"/>
+          <a:lstStyle/>
+          <a:p>
+            <a:pPr algn="ctr"/>
+            <a:r>
+              <a:rPr lang="it-IT" sz="2400" dirty="0">
+                <a:latin typeface="Aptos" panose="020B0004020202020204" pitchFamily="34" charset="0"/>
+              </a:rPr>
+              <a:t>Server</a:t>
+            </a:r>
+          </a:p>
+        </p:txBody>
+      </p:sp>
+      <p:cxnSp>
+        <p:nvCxnSpPr>
+          <p:cNvPr id="6" name="Connettore 2 5"/>
+          <p:cNvCxnSpPr/>
+          <p:nvPr/>
+        </p:nvCxnSpPr>
+        <p:spPr>
+          <a:xfrm>
+            <a:off x="3441031" y="3595773"/>
+            <a:ext cx="4866774" cy="0"/>
+          </a:xfrm>
+          <a:prstGeom prst="straightConnector1">
+            <a:avLst/>
+          </a:prstGeom>
+          <a:ln w="28575">
+            <a:solidFill>
+              <a:schemeClr val="tx1"/>
+            </a:solidFill>
+            <a:tailEnd type="triangle"/>
+          </a:ln>
+        </p:spPr>
+        <p:style>
+          <a:lnRef idx="1">
+            <a:schemeClr val="accent1"/>
+          </a:lnRef>
+          <a:fillRef idx="0">
+            <a:schemeClr val="accent1"/>
+          </a:fillRef>
+          <a:effectRef idx="0">
+            <a:schemeClr val="accent1"/>
+          </a:effectRef>
+          <a:fontRef idx="minor">
+            <a:schemeClr val="tx1"/>
+          </a:fontRef>
+        </p:style>
+      </p:cxnSp>
+      <p:cxnSp>
+        <p:nvCxnSpPr>
+          <p:cNvPr id="8" name="Connettore 2 7"/>
+          <p:cNvCxnSpPr/>
+          <p:nvPr/>
+        </p:nvCxnSpPr>
+        <p:spPr>
+          <a:xfrm flipH="1">
+            <a:off x="3441031" y="4351945"/>
+            <a:ext cx="4788000" cy="0"/>
+          </a:xfrm>
+          <a:prstGeom prst="straightConnector1">
+            <a:avLst/>
+          </a:prstGeom>
+          <a:ln w="28575">
+            <a:solidFill>
+              <a:schemeClr val="tx1"/>
+            </a:solidFill>
+            <a:tailEnd type="triangle"/>
+          </a:ln>
+        </p:spPr>
+        <p:style>
+          <a:lnRef idx="1">
+            <a:schemeClr val="accent1"/>
+          </a:lnRef>
+          <a:fillRef idx="0">
+            <a:schemeClr val="accent1"/>
+          </a:fillRef>
+          <a:effectRef idx="0">
+            <a:schemeClr val="accent1"/>
+          </a:effectRef>
+          <a:fontRef idx="minor">
+            <a:schemeClr val="tx1"/>
+          </a:fontRef>
+        </p:style>
+      </p:cxnSp>
+      <p:sp>
+        <p:nvSpPr>
+          <p:cNvPr id="9" name="Ovale 8"/>
+          <p:cNvSpPr/>
+          <p:nvPr/>
+        </p:nvSpPr>
+        <p:spPr>
+          <a:xfrm>
+            <a:off x="9539821" y="3588897"/>
+            <a:ext cx="1217194" cy="877348"/>
+          </a:xfrm>
+          <a:prstGeom prst="ellipse">
+            <a:avLst/>
+          </a:prstGeom>
+          <a:solidFill>
+            <a:srgbClr val="00B050"/>
+          </a:solidFill>
+          <a:ln>
+            <a:solidFill>
+              <a:schemeClr val="tx1"/>
+            </a:solidFill>
+          </a:ln>
+        </p:spPr>
+        <p:style>
+          <a:lnRef idx="2">
+            <a:schemeClr val="accent1">
+              <a:shade val="50000"/>
+            </a:schemeClr>
+          </a:lnRef>
+          <a:fillRef idx="1">
+            <a:schemeClr val="accent1"/>
+          </a:fillRef>
+          <a:effectRef idx="0">
+            <a:schemeClr val="accent1"/>
+          </a:effectRef>
+          <a:fontRef idx="minor">
+            <a:schemeClr val="lt1"/>
+          </a:fontRef>
+        </p:style>
+        <p:txBody>
+          <a:bodyPr rtlCol="0" anchor="ctr"/>
+          <a:lstStyle/>
+          <a:p>
+            <a:pPr algn="ctr"/>
+            <a:r>
+              <a:rPr lang="it-IT" dirty="0" err="1">
+                <a:latin typeface="Aptos" panose="020B0004020202020204" pitchFamily="34" charset="0"/>
+              </a:rPr>
+              <a:t>Entity</a:t>
+            </a:r>
+            <a:endParaRPr lang="en-GB" dirty="0">
+              <a:latin typeface="Aptos" panose="020B0004020202020204" pitchFamily="34" charset="0"/>
+            </a:endParaRPr>
+          </a:p>
+          <a:p>
+            <a:pPr algn="ctr"/>
+            <a:endParaRPr lang="it-IT" dirty="0">
+              <a:latin typeface="Aptos" panose="020B0004020202020204" pitchFamily="34" charset="0"/>
+            </a:endParaRPr>
+          </a:p>
+        </p:txBody>
+      </p:sp>
+      <p:sp>
+        <p:nvSpPr>
+          <p:cNvPr id="10" name="Rettangolo 9"/>
+          <p:cNvSpPr/>
+          <p:nvPr/>
+        </p:nvSpPr>
+        <p:spPr>
+          <a:xfrm>
+            <a:off x="8897421" y="3341133"/>
+            <a:ext cx="264695" cy="1330128"/>
+          </a:xfrm>
+          <a:prstGeom prst="rect">
+            <a:avLst/>
+          </a:prstGeom>
+        </p:spPr>
+        <p:style>
+          <a:lnRef idx="2">
+            <a:schemeClr val="dk1">
+              <a:shade val="50000"/>
+            </a:schemeClr>
+          </a:lnRef>
+          <a:fillRef idx="1">
+            <a:schemeClr val="dk1"/>
+          </a:fillRef>
+          <a:effectRef idx="0">
+            <a:schemeClr val="dk1"/>
+          </a:effectRef>
+          <a:fontRef idx="minor">
+            <a:schemeClr val="lt1"/>
+          </a:fontRef>
+        </p:style>
+        <p:txBody>
+          <a:bodyPr rtlCol="0" anchor="ctr"/>
+          <a:lstStyle/>
+          <a:p>
+            <a:pPr algn="ctr"/>
+            <a:endParaRPr lang="en-GB">
+              <a:latin typeface="Aptos" panose="020B0004020202020204" pitchFamily="34" charset="0"/>
+            </a:endParaRPr>
+          </a:p>
+        </p:txBody>
+      </p:sp>
+      <p:sp>
+        <p:nvSpPr>
+          <p:cNvPr id="11" name="Rettangolo 10"/>
+          <p:cNvSpPr/>
+          <p:nvPr/>
+        </p:nvSpPr>
+        <p:spPr>
+          <a:xfrm>
+            <a:off x="2566953" y="3437433"/>
+            <a:ext cx="264695" cy="986043"/>
+          </a:xfrm>
+          <a:prstGeom prst="rect">
+            <a:avLst/>
+          </a:prstGeom>
+        </p:spPr>
+        <p:style>
+          <a:lnRef idx="2">
+            <a:schemeClr val="dk1">
+              <a:shade val="50000"/>
+            </a:schemeClr>
+          </a:lnRef>
+          <a:fillRef idx="1">
+            <a:schemeClr val="dk1"/>
+          </a:fillRef>
+          <a:effectRef idx="0">
+            <a:schemeClr val="dk1"/>
+          </a:effectRef>
+          <a:fontRef idx="minor">
+            <a:schemeClr val="lt1"/>
+          </a:fontRef>
+        </p:style>
+        <p:txBody>
+          <a:bodyPr rtlCol="0" anchor="ctr"/>
+          <a:lstStyle/>
+          <a:p>
+            <a:pPr algn="ctr"/>
+            <a:endParaRPr lang="en-GB">
+              <a:latin typeface="Aptos" panose="020B0004020202020204" pitchFamily="34" charset="0"/>
+            </a:endParaRPr>
+          </a:p>
+        </p:txBody>
+      </p:sp>
+      <p:cxnSp>
+        <p:nvCxnSpPr>
+          <p:cNvPr id="12" name="Connettore 2 11"/>
+          <p:cNvCxnSpPr/>
+          <p:nvPr/>
+        </p:nvCxnSpPr>
+        <p:spPr>
+          <a:xfrm>
+            <a:off x="9211391" y="3477127"/>
+            <a:ext cx="475247" cy="186489"/>
+          </a:xfrm>
+          <a:prstGeom prst="straightConnector1">
+            <a:avLst/>
+          </a:prstGeom>
+          <a:ln w="28575">
+            <a:solidFill>
+              <a:schemeClr val="tx1"/>
+            </a:solidFill>
+            <a:prstDash val="sysDash"/>
+            <a:tailEnd type="triangle"/>
+          </a:ln>
+        </p:spPr>
+        <p:style>
+          <a:lnRef idx="1">
+            <a:schemeClr val="accent1"/>
+          </a:lnRef>
+          <a:fillRef idx="0">
+            <a:schemeClr val="accent1"/>
+          </a:fillRef>
+          <a:effectRef idx="0">
+            <a:schemeClr val="accent1"/>
+          </a:effectRef>
+          <a:fontRef idx="minor">
+            <a:schemeClr val="tx1"/>
+          </a:fontRef>
+        </p:style>
+      </p:cxnSp>
+      <p:cxnSp>
+        <p:nvCxnSpPr>
+          <p:cNvPr id="13" name="Connettore 2 12"/>
+          <p:cNvCxnSpPr/>
+          <p:nvPr/>
+        </p:nvCxnSpPr>
+        <p:spPr>
+          <a:xfrm flipH="1">
+            <a:off x="9211391" y="4325353"/>
+            <a:ext cx="423679" cy="232001"/>
+          </a:xfrm>
+          <a:prstGeom prst="straightConnector1">
+            <a:avLst/>
+          </a:prstGeom>
+          <a:ln w="28575">
+            <a:solidFill>
+              <a:schemeClr val="tx1"/>
+            </a:solidFill>
+            <a:prstDash val="sysDash"/>
+            <a:tailEnd type="triangle"/>
+          </a:ln>
+        </p:spPr>
+        <p:style>
+          <a:lnRef idx="1">
+            <a:schemeClr val="accent1"/>
+          </a:lnRef>
+          <a:fillRef idx="0">
+            <a:schemeClr val="accent1"/>
+          </a:fillRef>
+          <a:effectRef idx="0">
+            <a:schemeClr val="accent1"/>
+          </a:effectRef>
+          <a:fontRef idx="minor">
+            <a:schemeClr val="tx1"/>
+          </a:fontRef>
+        </p:style>
+      </p:cxnSp>
+      <p:sp>
+        <p:nvSpPr>
+          <p:cNvPr id="14" name="CasellaDiTesto 13"/>
+          <p:cNvSpPr txBox="1"/>
+          <p:nvPr/>
+        </p:nvSpPr>
+        <p:spPr>
+          <a:xfrm>
+            <a:off x="9531372" y="3975893"/>
+            <a:ext cx="1553076" cy="307777"/>
+          </a:xfrm>
+          <a:prstGeom prst="rect">
+            <a:avLst/>
+          </a:prstGeom>
+          <a:noFill/>
+        </p:spPr>
+        <p:txBody>
+          <a:bodyPr wrap="square" rtlCol="0">
+            <a:spAutoFit/>
           </a:bodyPr>
           <a:lstStyle/>
           <a:p>
             <a:r>
-              <a:rPr lang="en-GB" b="1" dirty="0"/>
-              <a:t>1. Resource-Centric Design</a:t>
-            </a:r>
-            <a:r>
-              <a:rPr lang="en-GB" dirty="0"/>
-              <a:t>: In REST, the focus is on resources rather than actions. Each resource is uniquely identified, and interactions with resources are typically performed using standard HTTP methods (GET, POST, PUT, DELETE). By abstracting away from specific actions, REST allows for a more flexible and adaptable system.</a:t>
-            </a:r>
-          </a:p>
-          <a:p>
-            <a:endParaRPr lang="en-GB" dirty="0"/>
-          </a:p>
-          <a:p>
-            <a:r>
-              <a:rPr lang="en-GB" b="1" dirty="0"/>
-              <a:t>2. Late Binding of Representations</a:t>
-            </a:r>
-            <a:r>
-              <a:rPr lang="en-GB" dirty="0"/>
-              <a:t>: The abstract definition of resources means that the server can provide different representations of the same resource based on the client's preferences or capabilities. This is known as </a:t>
-            </a:r>
-            <a:r>
-              <a:rPr lang="en-GB" b="1" dirty="0"/>
-              <a:t>late binding</a:t>
-            </a:r>
-            <a:r>
-              <a:rPr lang="en-GB" dirty="0"/>
-              <a:t>, as the specific representation is determined at runtime, typically in response to a client request. For example, a client might prefer to receive JSON representations of resources, while another client might prefer XML.</a:t>
-            </a:r>
-          </a:p>
-        </p:txBody>
-      </p:sp>
-      <p:sp>
-        <p:nvSpPr>
-          <p:cNvPr id="4" name="Segnaposto numero diapositiva 3"/>
+              <a:rPr lang="it-IT" sz="1400" dirty="0">
+                <a:solidFill>
+                  <a:schemeClr val="bg1"/>
+                </a:solidFill>
+                <a:latin typeface="Aptos" panose="020B0004020202020204" pitchFamily="34" charset="0"/>
+              </a:rPr>
+              <a:t>(</a:t>
+            </a:r>
+            <a:r>
+              <a:rPr lang="it-IT" sz="1400" dirty="0" err="1">
+                <a:solidFill>
+                  <a:schemeClr val="bg1"/>
+                </a:solidFill>
+                <a:latin typeface="Aptos" panose="020B0004020202020204" pitchFamily="34" charset="0"/>
+              </a:rPr>
+              <a:t>raw</a:t>
+            </a:r>
+            <a:r>
+              <a:rPr lang="it-IT" sz="1400" dirty="0">
+                <a:solidFill>
+                  <a:schemeClr val="bg1"/>
+                </a:solidFill>
+                <a:latin typeface="Aptos" panose="020B0004020202020204" pitchFamily="34" charset="0"/>
+              </a:rPr>
+              <a:t> format)</a:t>
+            </a:r>
+            <a:endParaRPr lang="en-GB" sz="1400" dirty="0">
+              <a:solidFill>
+                <a:schemeClr val="bg1"/>
+              </a:solidFill>
+              <a:latin typeface="Aptos" panose="020B0004020202020204" pitchFamily="34" charset="0"/>
+            </a:endParaRPr>
+          </a:p>
+        </p:txBody>
+      </p:sp>
+      <p:sp>
+        <p:nvSpPr>
+          <p:cNvPr id="17" name="Rettangolo arrotondato 16"/>
+          <p:cNvSpPr/>
+          <p:nvPr/>
+        </p:nvSpPr>
+        <p:spPr>
+          <a:xfrm>
+            <a:off x="3774689" y="4557354"/>
+            <a:ext cx="4138863" cy="2100055"/>
+          </a:xfrm>
+          <a:prstGeom prst="roundRect">
+            <a:avLst/>
+          </a:prstGeom>
+          <a:solidFill>
+            <a:schemeClr val="bg1"/>
+          </a:solidFill>
+          <a:ln w="19050">
+            <a:solidFill>
+              <a:schemeClr val="tx1"/>
+            </a:solidFill>
+          </a:ln>
+        </p:spPr>
+        <p:style>
+          <a:lnRef idx="2">
+            <a:schemeClr val="accent1">
+              <a:shade val="50000"/>
+            </a:schemeClr>
+          </a:lnRef>
+          <a:fillRef idx="1">
+            <a:schemeClr val="accent1"/>
+          </a:fillRef>
+          <a:effectRef idx="0">
+            <a:schemeClr val="accent1"/>
+          </a:effectRef>
+          <a:fontRef idx="minor">
+            <a:schemeClr val="lt1"/>
+          </a:fontRef>
+        </p:style>
+        <p:txBody>
+          <a:bodyPr rtlCol="0" anchor="t"/>
+          <a:lstStyle/>
+          <a:p>
+            <a:pPr algn="ctr"/>
+            <a:r>
+              <a:rPr lang="it-IT" b="1" dirty="0">
+                <a:solidFill>
+                  <a:schemeClr val="tx1"/>
+                </a:solidFill>
+                <a:latin typeface="Aptos" panose="020B0004020202020204" pitchFamily="34" charset="0"/>
+              </a:rPr>
+              <a:t>REST </a:t>
+            </a:r>
+            <a:r>
+              <a:rPr lang="it-IT" b="1" dirty="0" err="1">
+                <a:solidFill>
+                  <a:schemeClr val="tx1"/>
+                </a:solidFill>
+                <a:latin typeface="Aptos" panose="020B0004020202020204" pitchFamily="34" charset="0"/>
+              </a:rPr>
+              <a:t>response</a:t>
+            </a:r>
+            <a:r>
+              <a:rPr lang="it-IT" b="1" dirty="0">
+                <a:solidFill>
+                  <a:schemeClr val="tx1"/>
+                </a:solidFill>
+                <a:latin typeface="Aptos" panose="020B0004020202020204" pitchFamily="34" charset="0"/>
+              </a:rPr>
+              <a:t> </a:t>
+            </a:r>
+            <a:r>
+              <a:rPr lang="it-IT" b="1" dirty="0" err="1">
+                <a:solidFill>
+                  <a:schemeClr val="tx1"/>
+                </a:solidFill>
+                <a:latin typeface="Aptos" panose="020B0004020202020204" pitchFamily="34" charset="0"/>
+              </a:rPr>
+              <a:t>message</a:t>
+            </a:r>
+            <a:endParaRPr lang="en-GB" b="1" dirty="0">
+              <a:solidFill>
+                <a:schemeClr val="tx1"/>
+              </a:solidFill>
+              <a:latin typeface="Aptos" panose="020B0004020202020204" pitchFamily="34" charset="0"/>
+            </a:endParaRPr>
+          </a:p>
+        </p:txBody>
+      </p:sp>
+      <p:sp>
+        <p:nvSpPr>
+          <p:cNvPr id="18" name="Rettangolo arrotondato 17"/>
+          <p:cNvSpPr/>
+          <p:nvPr/>
+        </p:nvSpPr>
+        <p:spPr>
+          <a:xfrm>
+            <a:off x="3949365" y="5691188"/>
+            <a:ext cx="1852863" cy="843206"/>
+          </a:xfrm>
+          <a:prstGeom prst="roundRect">
+            <a:avLst/>
+          </a:prstGeom>
+          <a:solidFill>
+            <a:schemeClr val="accent6">
+              <a:lumMod val="20000"/>
+              <a:lumOff val="80000"/>
+            </a:schemeClr>
+          </a:solidFill>
+        </p:spPr>
+        <p:style>
+          <a:lnRef idx="2">
+            <a:schemeClr val="dk1"/>
+          </a:lnRef>
+          <a:fillRef idx="1">
+            <a:schemeClr val="lt1"/>
+          </a:fillRef>
+          <a:effectRef idx="0">
+            <a:schemeClr val="dk1"/>
+          </a:effectRef>
+          <a:fontRef idx="minor">
+            <a:schemeClr val="dk1"/>
+          </a:fontRef>
+        </p:style>
+        <p:txBody>
+          <a:bodyPr rtlCol="0" anchor="ctr"/>
+          <a:lstStyle/>
+          <a:p>
+            <a:pPr algn="ctr"/>
+            <a:r>
+              <a:rPr lang="it-IT" sz="1600" dirty="0" err="1">
+                <a:latin typeface="Aptos" panose="020B0004020202020204" pitchFamily="34" charset="0"/>
+              </a:rPr>
+              <a:t>Representation</a:t>
+            </a:r>
+            <a:endParaRPr lang="it-IT" sz="1600" dirty="0">
+              <a:latin typeface="Aptos" panose="020B0004020202020204" pitchFamily="34" charset="0"/>
+            </a:endParaRPr>
+          </a:p>
+          <a:p>
+            <a:pPr algn="ctr"/>
+            <a:r>
+              <a:rPr lang="it-IT" sz="1600" dirty="0">
+                <a:latin typeface="Aptos" panose="020B0004020202020204" pitchFamily="34" charset="0"/>
+              </a:rPr>
+              <a:t>(optional)</a:t>
+            </a:r>
+            <a:endParaRPr lang="en-GB" sz="1600" dirty="0">
+              <a:latin typeface="Aptos" panose="020B0004020202020204" pitchFamily="34" charset="0"/>
+            </a:endParaRPr>
+          </a:p>
+        </p:txBody>
+      </p:sp>
+      <p:sp>
+        <p:nvSpPr>
+          <p:cNvPr id="19" name="Rettangolo arrotondato 18"/>
+          <p:cNvSpPr/>
+          <p:nvPr/>
+        </p:nvSpPr>
+        <p:spPr>
+          <a:xfrm>
+            <a:off x="5913521" y="5691187"/>
+            <a:ext cx="1852863" cy="843207"/>
+          </a:xfrm>
+          <a:prstGeom prst="roundRect">
+            <a:avLst/>
+          </a:prstGeom>
+          <a:solidFill>
+            <a:schemeClr val="accent6">
+              <a:lumMod val="20000"/>
+              <a:lumOff val="80000"/>
+            </a:schemeClr>
+          </a:solidFill>
+        </p:spPr>
+        <p:style>
+          <a:lnRef idx="2">
+            <a:schemeClr val="dk1"/>
+          </a:lnRef>
+          <a:fillRef idx="1">
+            <a:schemeClr val="lt1"/>
+          </a:fillRef>
+          <a:effectRef idx="0">
+            <a:schemeClr val="dk1"/>
+          </a:effectRef>
+          <a:fontRef idx="minor">
+            <a:schemeClr val="dk1"/>
+          </a:fontRef>
+        </p:style>
+        <p:txBody>
+          <a:bodyPr rtlCol="0" anchor="ctr"/>
+          <a:lstStyle/>
+          <a:p>
+            <a:pPr algn="ctr"/>
+            <a:r>
+              <a:rPr lang="it-IT" sz="1600" dirty="0">
+                <a:latin typeface="Aptos" panose="020B0004020202020204" pitchFamily="34" charset="0"/>
+              </a:rPr>
+              <a:t>Resource </a:t>
+            </a:r>
+            <a:r>
+              <a:rPr lang="it-IT" sz="1600" dirty="0" err="1">
+                <a:latin typeface="Aptos" panose="020B0004020202020204" pitchFamily="34" charset="0"/>
+              </a:rPr>
+              <a:t>metadata</a:t>
+            </a:r>
+            <a:r>
+              <a:rPr lang="it-IT" sz="1600" dirty="0">
+                <a:latin typeface="Aptos" panose="020B0004020202020204" pitchFamily="34" charset="0"/>
+              </a:rPr>
+              <a:t> (optional)</a:t>
+            </a:r>
+            <a:endParaRPr lang="en-GB" sz="1600" dirty="0">
+              <a:latin typeface="Aptos" panose="020B0004020202020204" pitchFamily="34" charset="0"/>
+            </a:endParaRPr>
+          </a:p>
+        </p:txBody>
+      </p:sp>
+      <p:sp>
+        <p:nvSpPr>
+          <p:cNvPr id="20" name="Rettangolo arrotondato 19"/>
+          <p:cNvSpPr/>
+          <p:nvPr/>
+        </p:nvSpPr>
+        <p:spPr>
+          <a:xfrm>
+            <a:off x="5093366" y="5072180"/>
+            <a:ext cx="1574133" cy="558599"/>
+          </a:xfrm>
+          <a:prstGeom prst="roundRect">
+            <a:avLst/>
+          </a:prstGeom>
+          <a:solidFill>
+            <a:schemeClr val="accent6">
+              <a:lumMod val="20000"/>
+              <a:lumOff val="80000"/>
+            </a:schemeClr>
+          </a:solidFill>
+        </p:spPr>
+        <p:style>
+          <a:lnRef idx="2">
+            <a:schemeClr val="dk1"/>
+          </a:lnRef>
+          <a:fillRef idx="1">
+            <a:schemeClr val="lt1"/>
+          </a:fillRef>
+          <a:effectRef idx="0">
+            <a:schemeClr val="dk1"/>
+          </a:effectRef>
+          <a:fontRef idx="minor">
+            <a:schemeClr val="dk1"/>
+          </a:fontRef>
+        </p:style>
+        <p:txBody>
+          <a:bodyPr rtlCol="0" anchor="ctr"/>
+          <a:lstStyle/>
+          <a:p>
+            <a:pPr algn="ctr"/>
+            <a:r>
+              <a:rPr lang="it-IT" sz="1600" dirty="0">
+                <a:latin typeface="Aptos" panose="020B0004020202020204" pitchFamily="34" charset="0"/>
+              </a:rPr>
+              <a:t>Control data</a:t>
+            </a:r>
+          </a:p>
+          <a:p>
+            <a:pPr algn="ctr"/>
+            <a:r>
+              <a:rPr lang="it-IT" sz="1600" dirty="0">
+                <a:latin typeface="Aptos" panose="020B0004020202020204" pitchFamily="34" charset="0"/>
+              </a:rPr>
+              <a:t>(</a:t>
+            </a:r>
+            <a:r>
+              <a:rPr lang="it-IT" sz="1600" dirty="0" err="1">
+                <a:latin typeface="Aptos" panose="020B0004020202020204" pitchFamily="34" charset="0"/>
+              </a:rPr>
+              <a:t>mandatory</a:t>
+            </a:r>
+            <a:r>
+              <a:rPr lang="it-IT" sz="1600" dirty="0">
+                <a:latin typeface="Aptos" panose="020B0004020202020204" pitchFamily="34" charset="0"/>
+              </a:rPr>
+              <a:t>)</a:t>
+            </a:r>
+            <a:endParaRPr lang="en-GB" sz="1600" dirty="0">
+              <a:latin typeface="Aptos" panose="020B0004020202020204" pitchFamily="34" charset="0"/>
+            </a:endParaRPr>
+          </a:p>
+        </p:txBody>
+      </p:sp>
+      <p:sp>
+        <p:nvSpPr>
+          <p:cNvPr id="21" name="Rettangolo arrotondato 20"/>
+          <p:cNvSpPr/>
+          <p:nvPr/>
+        </p:nvSpPr>
+        <p:spPr>
+          <a:xfrm>
+            <a:off x="3821246" y="1313892"/>
+            <a:ext cx="4138863" cy="2076473"/>
+          </a:xfrm>
+          <a:prstGeom prst="roundRect">
+            <a:avLst/>
+          </a:prstGeom>
+          <a:solidFill>
+            <a:schemeClr val="bg1"/>
+          </a:solidFill>
+          <a:ln w="19050">
+            <a:solidFill>
+              <a:schemeClr val="tx1"/>
+            </a:solidFill>
+          </a:ln>
+        </p:spPr>
+        <p:style>
+          <a:lnRef idx="2">
+            <a:schemeClr val="accent1">
+              <a:shade val="50000"/>
+            </a:schemeClr>
+          </a:lnRef>
+          <a:fillRef idx="1">
+            <a:schemeClr val="accent1"/>
+          </a:fillRef>
+          <a:effectRef idx="0">
+            <a:schemeClr val="accent1"/>
+          </a:effectRef>
+          <a:fontRef idx="minor">
+            <a:schemeClr val="lt1"/>
+          </a:fontRef>
+        </p:style>
+        <p:txBody>
+          <a:bodyPr rtlCol="0" anchor="t"/>
+          <a:lstStyle/>
+          <a:p>
+            <a:pPr algn="ctr"/>
+            <a:r>
+              <a:rPr lang="it-IT" b="1" dirty="0">
+                <a:solidFill>
+                  <a:schemeClr val="tx1"/>
+                </a:solidFill>
+                <a:latin typeface="Aptos" panose="020B0004020202020204" pitchFamily="34" charset="0"/>
+              </a:rPr>
+              <a:t>REST </a:t>
+            </a:r>
+            <a:r>
+              <a:rPr lang="it-IT" b="1" dirty="0" err="1">
+                <a:solidFill>
+                  <a:schemeClr val="tx1"/>
+                </a:solidFill>
+                <a:latin typeface="Aptos" panose="020B0004020202020204" pitchFamily="34" charset="0"/>
+              </a:rPr>
+              <a:t>request</a:t>
+            </a:r>
+            <a:r>
+              <a:rPr lang="it-IT" b="1" dirty="0">
+                <a:solidFill>
+                  <a:schemeClr val="tx1"/>
+                </a:solidFill>
+                <a:latin typeface="Aptos" panose="020B0004020202020204" pitchFamily="34" charset="0"/>
+              </a:rPr>
+              <a:t> </a:t>
+            </a:r>
+            <a:r>
+              <a:rPr lang="it-IT" b="1" dirty="0" err="1">
+                <a:solidFill>
+                  <a:schemeClr val="tx1"/>
+                </a:solidFill>
+                <a:latin typeface="Aptos" panose="020B0004020202020204" pitchFamily="34" charset="0"/>
+              </a:rPr>
+              <a:t>message</a:t>
+            </a:r>
+            <a:endParaRPr lang="en-GB" b="1" dirty="0">
+              <a:solidFill>
+                <a:schemeClr val="tx1"/>
+              </a:solidFill>
+              <a:latin typeface="Aptos" panose="020B0004020202020204" pitchFamily="34" charset="0"/>
+            </a:endParaRPr>
+          </a:p>
+        </p:txBody>
+      </p:sp>
+      <p:sp>
+        <p:nvSpPr>
+          <p:cNvPr id="22" name="Rettangolo arrotondato 21"/>
+          <p:cNvSpPr/>
+          <p:nvPr/>
+        </p:nvSpPr>
+        <p:spPr>
+          <a:xfrm>
+            <a:off x="5029200" y="2720001"/>
+            <a:ext cx="1852863" cy="623972"/>
+          </a:xfrm>
+          <a:prstGeom prst="roundRect">
+            <a:avLst/>
+          </a:prstGeom>
+          <a:solidFill>
+            <a:schemeClr val="accent6">
+              <a:lumMod val="20000"/>
+              <a:lumOff val="80000"/>
+            </a:schemeClr>
+          </a:solidFill>
+        </p:spPr>
+        <p:style>
+          <a:lnRef idx="2">
+            <a:schemeClr val="dk1"/>
+          </a:lnRef>
+          <a:fillRef idx="1">
+            <a:schemeClr val="lt1"/>
+          </a:fillRef>
+          <a:effectRef idx="0">
+            <a:schemeClr val="dk1"/>
+          </a:effectRef>
+          <a:fontRef idx="minor">
+            <a:schemeClr val="dk1"/>
+          </a:fontRef>
+        </p:style>
+        <p:txBody>
+          <a:bodyPr rtlCol="0" anchor="ctr"/>
+          <a:lstStyle/>
+          <a:p>
+            <a:pPr algn="ctr"/>
+            <a:r>
+              <a:rPr lang="it-IT" sz="1600" dirty="0" err="1">
+                <a:latin typeface="Aptos" panose="020B0004020202020204" pitchFamily="34" charset="0"/>
+              </a:rPr>
+              <a:t>Representation</a:t>
+            </a:r>
+            <a:endParaRPr lang="it-IT" sz="1600" dirty="0">
+              <a:latin typeface="Aptos" panose="020B0004020202020204" pitchFamily="34" charset="0"/>
+            </a:endParaRPr>
+          </a:p>
+          <a:p>
+            <a:pPr algn="ctr"/>
+            <a:r>
+              <a:rPr lang="it-IT" sz="1600" dirty="0">
+                <a:latin typeface="Aptos" panose="020B0004020202020204" pitchFamily="34" charset="0"/>
+              </a:rPr>
+              <a:t>(optional)</a:t>
+            </a:r>
+            <a:endParaRPr lang="en-GB" sz="1600" dirty="0">
+              <a:latin typeface="Aptos" panose="020B0004020202020204" pitchFamily="34" charset="0"/>
+            </a:endParaRPr>
+          </a:p>
+        </p:txBody>
+      </p:sp>
+      <p:sp>
+        <p:nvSpPr>
+          <p:cNvPr id="23" name="Rettangolo arrotondato 22"/>
+          <p:cNvSpPr/>
+          <p:nvPr/>
+        </p:nvSpPr>
+        <p:spPr>
+          <a:xfrm>
+            <a:off x="5835031" y="1806657"/>
+            <a:ext cx="2062847" cy="843206"/>
+          </a:xfrm>
+          <a:prstGeom prst="roundRect">
+            <a:avLst/>
+          </a:prstGeom>
+          <a:solidFill>
+            <a:schemeClr val="accent6">
+              <a:lumMod val="20000"/>
+              <a:lumOff val="80000"/>
+            </a:schemeClr>
+          </a:solidFill>
+        </p:spPr>
+        <p:style>
+          <a:lnRef idx="2">
+            <a:schemeClr val="dk1"/>
+          </a:lnRef>
+          <a:fillRef idx="1">
+            <a:schemeClr val="lt1"/>
+          </a:fillRef>
+          <a:effectRef idx="0">
+            <a:schemeClr val="dk1"/>
+          </a:effectRef>
+          <a:fontRef idx="minor">
+            <a:schemeClr val="dk1"/>
+          </a:fontRef>
+        </p:style>
+        <p:txBody>
+          <a:bodyPr rtlCol="0" anchor="ctr"/>
+          <a:lstStyle/>
+          <a:p>
+            <a:pPr algn="ctr"/>
+            <a:r>
+              <a:rPr lang="it-IT" sz="1600" dirty="0">
+                <a:latin typeface="Aptos" panose="020B0004020202020204" pitchFamily="34" charset="0"/>
+              </a:rPr>
+              <a:t>Resource </a:t>
+            </a:r>
+            <a:r>
+              <a:rPr lang="it-IT" sz="1600" dirty="0" err="1">
+                <a:latin typeface="Aptos" panose="020B0004020202020204" pitchFamily="34" charset="0"/>
+              </a:rPr>
+              <a:t>identifier</a:t>
+            </a:r>
+            <a:endParaRPr lang="it-IT" sz="1600" dirty="0">
+              <a:latin typeface="Aptos" panose="020B0004020202020204" pitchFamily="34" charset="0"/>
+            </a:endParaRPr>
+          </a:p>
+          <a:p>
+            <a:pPr algn="ctr"/>
+            <a:r>
+              <a:rPr lang="it-IT" sz="1600" dirty="0">
+                <a:latin typeface="Aptos" panose="020B0004020202020204" pitchFamily="34" charset="0"/>
+              </a:rPr>
+              <a:t>(</a:t>
+            </a:r>
+            <a:r>
+              <a:rPr lang="it-IT" sz="1600" dirty="0" err="1">
+                <a:latin typeface="Aptos" panose="020B0004020202020204" pitchFamily="34" charset="0"/>
+              </a:rPr>
+              <a:t>mandatory</a:t>
+            </a:r>
+            <a:r>
+              <a:rPr lang="it-IT" sz="1600" dirty="0">
+                <a:latin typeface="Aptos" panose="020B0004020202020204" pitchFamily="34" charset="0"/>
+              </a:rPr>
+              <a:t>)</a:t>
+            </a:r>
+            <a:endParaRPr lang="en-GB" sz="1600" dirty="0">
+              <a:latin typeface="Aptos" panose="020B0004020202020204" pitchFamily="34" charset="0"/>
+            </a:endParaRPr>
+          </a:p>
+        </p:txBody>
+      </p:sp>
+      <p:sp>
+        <p:nvSpPr>
+          <p:cNvPr id="24" name="Rettangolo arrotondato 23"/>
+          <p:cNvSpPr/>
+          <p:nvPr/>
+        </p:nvSpPr>
+        <p:spPr>
+          <a:xfrm>
+            <a:off x="3978875" y="1828719"/>
+            <a:ext cx="1574133" cy="821144"/>
+          </a:xfrm>
+          <a:prstGeom prst="roundRect">
+            <a:avLst/>
+          </a:prstGeom>
+          <a:solidFill>
+            <a:schemeClr val="accent6">
+              <a:lumMod val="20000"/>
+              <a:lumOff val="80000"/>
+            </a:schemeClr>
+          </a:solidFill>
+        </p:spPr>
+        <p:style>
+          <a:lnRef idx="2">
+            <a:schemeClr val="dk1"/>
+          </a:lnRef>
+          <a:fillRef idx="1">
+            <a:schemeClr val="lt1"/>
+          </a:fillRef>
+          <a:effectRef idx="0">
+            <a:schemeClr val="dk1"/>
+          </a:effectRef>
+          <a:fontRef idx="minor">
+            <a:schemeClr val="dk1"/>
+          </a:fontRef>
+        </p:style>
+        <p:txBody>
+          <a:bodyPr rtlCol="0" anchor="ctr"/>
+          <a:lstStyle/>
+          <a:p>
+            <a:pPr algn="ctr"/>
+            <a:r>
+              <a:rPr lang="it-IT" sz="1600" dirty="0">
+                <a:latin typeface="Aptos" panose="020B0004020202020204" pitchFamily="34" charset="0"/>
+              </a:rPr>
+              <a:t>Control data</a:t>
+            </a:r>
+          </a:p>
+          <a:p>
+            <a:pPr algn="ctr"/>
+            <a:r>
+              <a:rPr lang="it-IT" sz="1600" dirty="0">
+                <a:latin typeface="Aptos" panose="020B0004020202020204" pitchFamily="34" charset="0"/>
+              </a:rPr>
+              <a:t>(</a:t>
+            </a:r>
+            <a:r>
+              <a:rPr lang="it-IT" sz="1600" dirty="0" err="1">
+                <a:latin typeface="Aptos" panose="020B0004020202020204" pitchFamily="34" charset="0"/>
+              </a:rPr>
+              <a:t>mandatory</a:t>
+            </a:r>
+            <a:r>
+              <a:rPr lang="it-IT" sz="1600" dirty="0">
+                <a:latin typeface="Aptos" panose="020B0004020202020204" pitchFamily="34" charset="0"/>
+              </a:rPr>
+              <a:t>)</a:t>
+            </a:r>
+            <a:endParaRPr lang="en-GB" sz="1600" dirty="0">
+              <a:latin typeface="Aptos" panose="020B0004020202020204" pitchFamily="34" charset="0"/>
+            </a:endParaRPr>
+          </a:p>
+        </p:txBody>
+      </p:sp>
+      <p:sp>
+        <p:nvSpPr>
+          <p:cNvPr id="3" name="Segnaposto numero diapositiva 2"/>
           <p:cNvSpPr>
             <a:spLocks noGrp="1"/>
           </p:cNvSpPr>
@@ -5892,61 +8039,10 @@
           </a:p>
         </p:txBody>
       </p:sp>
-      <p:sp>
-        <p:nvSpPr>
-          <p:cNvPr id="5" name="Rectangle 4">
-            <a:extLst>
-              <a:ext uri="{FF2B5EF4-FFF2-40B4-BE49-F238E27FC236}">
-                <a16:creationId xmlns:a16="http://schemas.microsoft.com/office/drawing/2014/main" id="{86FB9C28-2315-F221-703C-C385452006F9}"/>
-              </a:ext>
-            </a:extLst>
-          </p:cNvPr>
-          <p:cNvSpPr/>
-          <p:nvPr/>
-        </p:nvSpPr>
-        <p:spPr>
-          <a:xfrm>
-            <a:off x="8894618" y="259773"/>
-            <a:ext cx="2587337" cy="561109"/>
-          </a:xfrm>
-          <a:prstGeom prst="rect">
-            <a:avLst/>
-          </a:prstGeom>
-        </p:spPr>
-        <p:style>
-          <a:lnRef idx="2">
-            <a:schemeClr val="accent4">
-              <a:shade val="15000"/>
-            </a:schemeClr>
-          </a:lnRef>
-          <a:fillRef idx="1">
-            <a:schemeClr val="accent4"/>
-          </a:fillRef>
-          <a:effectRef idx="0">
-            <a:schemeClr val="accent4"/>
-          </a:effectRef>
-          <a:fontRef idx="minor">
-            <a:schemeClr val="lt1"/>
-          </a:fontRef>
-        </p:style>
-        <p:txBody>
-          <a:bodyPr rtlCol="0" anchor="ctr"/>
-          <a:lstStyle/>
-          <a:p>
-            <a:pPr algn="ctr"/>
-            <a:r>
-              <a:rPr lang="en-US" sz="2400" b="1" dirty="0">
-                <a:latin typeface="Palatino Linotype" panose="02040502050505030304" pitchFamily="18" charset="0"/>
-              </a:rPr>
-              <a:t>NEW SLIDE</a:t>
-            </a:r>
-          </a:p>
-        </p:txBody>
-      </p:sp>
     </p:spTree>
     <p:extLst>
       <p:ext uri="{BB962C8B-B14F-4D97-AF65-F5344CB8AC3E}">
-        <p14:creationId xmlns:p14="http://schemas.microsoft.com/office/powerpoint/2010/main" val="3534462049"/>
+        <p14:creationId xmlns:p14="http://schemas.microsoft.com/office/powerpoint/2010/main" val="1812340316"/>
       </p:ext>
     </p:extLst>
   </p:cSld>
@@ -5989,8 +8085,20 @@
           <a:lstStyle/>
           <a:p>
             <a:r>
+              <a:rPr lang="it-IT" dirty="0"/>
+              <a:t>Resource </a:t>
+            </a:r>
+            <a:r>
               <a:rPr lang="it-IT" dirty="0" err="1"/>
-              <a:t>Resources</a:t>
+              <a:t>representations</a:t>
+            </a:r>
+            <a:r>
+              <a:rPr lang="it-IT" dirty="0"/>
+              <a:t> and REST </a:t>
+            </a:r>
+            <a:r>
+              <a:rPr lang="it-IT" dirty="0" err="1"/>
+              <a:t>messages</a:t>
             </a:r>
             <a:endParaRPr lang="en-GB" dirty="0"/>
           </a:p>
@@ -6009,46 +8117,134 @@
         <p:spPr>
           <a:xfrm>
             <a:off x="428172" y="1361167"/>
-            <a:ext cx="11368314" cy="5205888"/>
+            <a:ext cx="11368314" cy="4564145"/>
           </a:xfrm>
         </p:spPr>
         <p:txBody>
           <a:bodyPr>
-            <a:normAutofit fontScale="92500" lnSpcReduction="10000"/>
+            <a:normAutofit/>
           </a:bodyPr>
           <a:lstStyle/>
           <a:p>
             <a:r>
-              <a:rPr lang="en-GB" b="1" dirty="0"/>
-              <a:t>3. Content Negotiation</a:t>
-            </a:r>
-            <a:r>
-              <a:rPr lang="en-GB" dirty="0"/>
-              <a:t>: Content negotiation is the mechanism by which the server and client agree on the most suitable representation of a resource. This negotiation can be based on various factors, including the client's preferences (as expressed in request headers), the capabilities of the client (such as supported media types), and the characteristics of the resource itself. The server examines these factors and selects the most appropriate representation to include in the response.</a:t>
-            </a:r>
-          </a:p>
-          <a:p>
+              <a:rPr lang="en-US" dirty="0"/>
+              <a:t>A resource </a:t>
+            </a:r>
+            <a:r>
+              <a:rPr lang="en-US" b="1" dirty="0"/>
+              <a:t>representation</a:t>
+            </a:r>
+            <a:r>
+              <a:rPr lang="en-US" dirty="0"/>
+              <a:t> includes: </a:t>
+            </a:r>
+          </a:p>
+          <a:p>
+            <a:pPr lvl="1"/>
+            <a:r>
+              <a:rPr lang="en-US" sz="2200" b="1" dirty="0"/>
+              <a:t>Data</a:t>
+            </a:r>
+            <a:r>
+              <a:rPr lang="en-US" sz="2200" dirty="0"/>
+              <a:t> (the actual representation)</a:t>
+            </a:r>
+          </a:p>
+          <a:p>
+            <a:pPr lvl="1"/>
+            <a:r>
+              <a:rPr lang="en-US" sz="2200" b="1" dirty="0"/>
+              <a:t>Metadata</a:t>
+            </a:r>
+            <a:r>
+              <a:rPr lang="en-US" sz="2200" dirty="0"/>
+              <a:t> (description of the representation)</a:t>
+            </a:r>
+            <a:r>
+              <a:rPr lang="en-US" sz="2200" dirty="0">
+                <a:sym typeface="Wingdings" panose="05000000000000000000" pitchFamily="2" charset="2"/>
+              </a:rPr>
+              <a:t>  </a:t>
+            </a:r>
+            <a:r>
+              <a:rPr lang="en-GB" sz="2200" dirty="0"/>
+              <a:t>typically, not displayed to the end user (e.g., data type, creation date, version number, …) </a:t>
+            </a:r>
+          </a:p>
+          <a:p>
+            <a:r>
+              <a:rPr lang="en-US" dirty="0">
+                <a:sym typeface="Wingdings" panose="05000000000000000000" pitchFamily="2" charset="2"/>
+              </a:rPr>
+              <a:t>The resource representation is provided to the client within a </a:t>
+            </a:r>
+            <a:r>
+              <a:rPr lang="en-US" b="1" dirty="0">
+                <a:sym typeface="Wingdings" panose="05000000000000000000" pitchFamily="2" charset="2"/>
+              </a:rPr>
+              <a:t>response message </a:t>
+            </a:r>
+            <a:r>
+              <a:rPr lang="en-US" dirty="0">
+                <a:sym typeface="Wingdings" panose="05000000000000000000" pitchFamily="2" charset="2"/>
+              </a:rPr>
+              <a:t>that contains some additional contents:</a:t>
+            </a:r>
+          </a:p>
+          <a:p>
+            <a:pPr lvl="1"/>
+            <a:r>
+              <a:rPr lang="en-US" sz="2200" b="1" dirty="0">
+                <a:sym typeface="Wingdings" panose="05000000000000000000" pitchFamily="2" charset="2"/>
+              </a:rPr>
+              <a:t>Resource metadata (optional)</a:t>
+            </a:r>
+            <a:r>
+              <a:rPr lang="en-US" sz="2200" dirty="0">
+                <a:sym typeface="Wingdings" panose="05000000000000000000" pitchFamily="2" charset="2"/>
+              </a:rPr>
+              <a:t>: </a:t>
+            </a:r>
+            <a:r>
+              <a:rPr lang="en-GB" sz="2200" dirty="0">
+                <a:sym typeface="Wingdings" panose="05000000000000000000" pitchFamily="2" charset="2"/>
+              </a:rPr>
+              <a:t>additional information about the resource that exists on the server (e.g., alternate text to be displayed in the event an image representation cannot be displayed for some reason). </a:t>
+            </a:r>
+            <a:endParaRPr lang="en-US" sz="2200" dirty="0">
+              <a:sym typeface="Wingdings" panose="05000000000000000000" pitchFamily="2" charset="2"/>
+            </a:endParaRPr>
+          </a:p>
+          <a:p>
+            <a:pPr lvl="1"/>
+            <a:r>
+              <a:rPr lang="en-US" sz="2200" b="1" dirty="0">
+                <a:sym typeface="Wingdings" panose="05000000000000000000" pitchFamily="2" charset="2"/>
+              </a:rPr>
+              <a:t>Control data (mandatory)</a:t>
+            </a:r>
+            <a:r>
+              <a:rPr lang="en-US" sz="2200" dirty="0">
+                <a:sym typeface="Wingdings" panose="05000000000000000000" pitchFamily="2" charset="2"/>
+              </a:rPr>
+              <a:t>: it deals with the v</a:t>
+            </a:r>
+            <a:r>
+              <a:rPr lang="en-GB" sz="2200" dirty="0" err="1"/>
+              <a:t>alidity</a:t>
+            </a:r>
+            <a:r>
+              <a:rPr lang="en-GB" sz="2200" dirty="0"/>
+              <a:t> of the resource and its representation on the client (e.g., if data is cacheable, the expiry time, a checksum for checking integrity, …).</a:t>
+            </a:r>
+          </a:p>
+          <a:p>
+            <a:pPr lvl="1"/>
+            <a:endParaRPr lang="it-IT" dirty="0"/>
+          </a:p>
+          <a:p>
+            <a:pPr lvl="1"/>
             <a:endParaRPr lang="en-GB" dirty="0"/>
-          </a:p>
-          <a:p>
-            <a:r>
-              <a:rPr lang="en-GB" b="1" dirty="0"/>
-              <a:t>4. Flexibility and Interoperability</a:t>
-            </a:r>
-            <a:r>
-              <a:rPr lang="en-GB" dirty="0"/>
-              <a:t>: By allowing content negotiation to take place based on the characteristics of the request, RESTful systems become more flexible and interoperable. Clients and servers can communicate effectively even if they have different preferences or capabilities. </a:t>
-            </a:r>
-          </a:p>
-          <a:p>
-            <a:endParaRPr lang="en-GB" dirty="0"/>
-          </a:p>
-          <a:p>
-            <a:r>
-              <a:rPr lang="en-GB" dirty="0"/>
-              <a:t>In summary, the abstract definition of resources in REST enables content negotiation by allowing specific representations to be late-bound to resources. This flexibility promotes interoperability and enhances the adaptability of RESTful systems to diverse client requirements.</a:t>
-            </a:r>
-            <a:endParaRPr lang="en-GB" sz="2400" dirty="0"/>
           </a:p>
         </p:txBody>
       </p:sp>
@@ -6075,61 +8271,10 @@
           </a:p>
         </p:txBody>
       </p:sp>
-      <p:sp>
-        <p:nvSpPr>
-          <p:cNvPr id="5" name="Rectangle 4">
-            <a:extLst>
-              <a:ext uri="{FF2B5EF4-FFF2-40B4-BE49-F238E27FC236}">
-                <a16:creationId xmlns:a16="http://schemas.microsoft.com/office/drawing/2014/main" id="{80507BD1-B8BD-6354-A921-43CD96DF8644}"/>
-              </a:ext>
-            </a:extLst>
-          </p:cNvPr>
-          <p:cNvSpPr/>
-          <p:nvPr/>
-        </p:nvSpPr>
-        <p:spPr>
-          <a:xfrm>
-            <a:off x="8894618" y="259773"/>
-            <a:ext cx="2587337" cy="561109"/>
-          </a:xfrm>
-          <a:prstGeom prst="rect">
-            <a:avLst/>
-          </a:prstGeom>
-        </p:spPr>
-        <p:style>
-          <a:lnRef idx="2">
-            <a:schemeClr val="accent4">
-              <a:shade val="15000"/>
-            </a:schemeClr>
-          </a:lnRef>
-          <a:fillRef idx="1">
-            <a:schemeClr val="accent4"/>
-          </a:fillRef>
-          <a:effectRef idx="0">
-            <a:schemeClr val="accent4"/>
-          </a:effectRef>
-          <a:fontRef idx="minor">
-            <a:schemeClr val="lt1"/>
-          </a:fontRef>
-        </p:style>
-        <p:txBody>
-          <a:bodyPr rtlCol="0" anchor="ctr"/>
-          <a:lstStyle/>
-          <a:p>
-            <a:pPr algn="ctr"/>
-            <a:r>
-              <a:rPr lang="en-US" sz="2400" b="1" dirty="0">
-                <a:latin typeface="Palatino Linotype" panose="02040502050505030304" pitchFamily="18" charset="0"/>
-              </a:rPr>
-              <a:t>NEW SLIDE</a:t>
-            </a:r>
-          </a:p>
-        </p:txBody>
-      </p:sp>
     </p:spTree>
     <p:extLst>
       <p:ext uri="{BB962C8B-B14F-4D97-AF65-F5344CB8AC3E}">
-        <p14:creationId xmlns:p14="http://schemas.microsoft.com/office/powerpoint/2010/main" val="3285413167"/>
+        <p14:creationId xmlns:p14="http://schemas.microsoft.com/office/powerpoint/2010/main" val="203690566"/>
       </p:ext>
     </p:extLst>
   </p:cSld>
@@ -6347,307 +8492,24 @@
       </p:grpSpPr>
       <p:sp>
         <p:nvSpPr>
-          <p:cNvPr id="2" name="Titolo 1"/>
-          <p:cNvSpPr>
-            <a:spLocks noGrp="1"/>
-          </p:cNvSpPr>
-          <p:nvPr>
-            <p:ph type="title"/>
-          </p:nvPr>
-        </p:nvSpPr>
-        <p:spPr/>
-        <p:txBody>
-          <a:bodyPr/>
-          <a:lstStyle/>
-          <a:p>
-            <a:r>
-              <a:rPr lang="it-IT" dirty="0"/>
-              <a:t>Resource </a:t>
-            </a:r>
-            <a:r>
-              <a:rPr lang="it-IT" dirty="0" err="1"/>
-              <a:t>representations</a:t>
-            </a:r>
-            <a:endParaRPr lang="en-GB" dirty="0"/>
-          </a:p>
-        </p:txBody>
-      </p:sp>
-      <p:sp>
-        <p:nvSpPr>
-          <p:cNvPr id="3" name="Segnaposto contenuto 2"/>
-          <p:cNvSpPr>
-            <a:spLocks noGrp="1"/>
-          </p:cNvSpPr>
-          <p:nvPr>
-            <p:ph idx="1"/>
-          </p:nvPr>
-        </p:nvSpPr>
-        <p:spPr/>
-        <p:txBody>
-          <a:bodyPr/>
-          <a:lstStyle/>
-          <a:p>
-            <a:r>
-              <a:rPr lang="en-US" b="1" dirty="0"/>
-              <a:t>Resource representation</a:t>
-            </a:r>
-            <a:r>
-              <a:rPr lang="en-US" dirty="0"/>
-              <a:t>: a view of the current state (or realization) of the resource at the time of the request. </a:t>
-            </a:r>
-          </a:p>
-          <a:p>
-            <a:r>
-              <a:rPr lang="en-US" dirty="0"/>
-              <a:t>In a client-server interaction, the client asks to the server a resource (by the resource identifier), and the server answers by sending the corresponding resource representation. </a:t>
-            </a:r>
-          </a:p>
-          <a:p>
-            <a:r>
-              <a:rPr lang="en-US" b="1" dirty="0"/>
-              <a:t>Note</a:t>
-            </a:r>
-            <a:r>
-              <a:rPr lang="en-US" dirty="0"/>
-              <a:t>: The representation sent to the client is not necessarily the same used to store the data in the server.  </a:t>
-            </a:r>
-          </a:p>
-          <a:p>
-            <a:endParaRPr lang="en-GB" dirty="0"/>
-          </a:p>
-        </p:txBody>
-      </p:sp>
-      <p:sp>
-        <p:nvSpPr>
-          <p:cNvPr id="4" name="Rettangolo 3"/>
+          <p:cNvPr id="5" name="Rettangolo arrotondato 4"/>
           <p:cNvSpPr/>
           <p:nvPr/>
         </p:nvSpPr>
         <p:spPr>
           <a:xfrm>
-            <a:off x="1714500" y="4677276"/>
-            <a:ext cx="2225842" cy="1287379"/>
-          </a:xfrm>
-          <a:prstGeom prst="rect">
-            <a:avLst/>
-          </a:prstGeom>
-          <a:ln w="38100">
+            <a:off x="320040" y="1325880"/>
+            <a:ext cx="4419600" cy="3970020"/>
+          </a:xfrm>
+          <a:prstGeom prst="roundRect">
+            <a:avLst>
+              <a:gd name="adj" fmla="val 9733"/>
+            </a:avLst>
+          </a:prstGeom>
+          <a:noFill/>
+          <a:ln>
             <a:solidFill>
               <a:srgbClr val="00B050"/>
-            </a:solidFill>
-          </a:ln>
-        </p:spPr>
-        <p:style>
-          <a:lnRef idx="2">
-            <a:schemeClr val="accent6"/>
-          </a:lnRef>
-          <a:fillRef idx="1">
-            <a:schemeClr val="lt1"/>
-          </a:fillRef>
-          <a:effectRef idx="0">
-            <a:schemeClr val="accent6"/>
-          </a:effectRef>
-          <a:fontRef idx="minor">
-            <a:schemeClr val="dk1"/>
-          </a:fontRef>
-        </p:style>
-        <p:txBody>
-          <a:bodyPr rtlCol="0" anchor="ctr"/>
-          <a:lstStyle/>
-          <a:p>
-            <a:pPr algn="ctr"/>
-            <a:r>
-              <a:rPr lang="it-IT" sz="2800" dirty="0">
-                <a:latin typeface="Palatino Linotype" panose="02040502050505030304" pitchFamily="18" charset="0"/>
-              </a:rPr>
-              <a:t>Client</a:t>
-            </a:r>
-            <a:endParaRPr lang="en-GB" sz="2800" dirty="0">
-              <a:latin typeface="Palatino Linotype" panose="02040502050505030304" pitchFamily="18" charset="0"/>
-            </a:endParaRPr>
-          </a:p>
-        </p:txBody>
-      </p:sp>
-      <p:sp>
-        <p:nvSpPr>
-          <p:cNvPr id="5" name="Rettangolo 4"/>
-          <p:cNvSpPr/>
-          <p:nvPr/>
-        </p:nvSpPr>
-        <p:spPr>
-          <a:xfrm>
-            <a:off x="8339890" y="4265195"/>
-            <a:ext cx="2225842" cy="2111542"/>
-          </a:xfrm>
-          <a:prstGeom prst="rect">
-            <a:avLst/>
-          </a:prstGeom>
-          <a:ln w="38100">
-            <a:solidFill>
-              <a:srgbClr val="00B050"/>
-            </a:solidFill>
-          </a:ln>
-        </p:spPr>
-        <p:style>
-          <a:lnRef idx="2">
-            <a:schemeClr val="accent6"/>
-          </a:lnRef>
-          <a:fillRef idx="1">
-            <a:schemeClr val="lt1"/>
-          </a:fillRef>
-          <a:effectRef idx="0">
-            <a:schemeClr val="accent6"/>
-          </a:effectRef>
-          <a:fontRef idx="minor">
-            <a:schemeClr val="dk1"/>
-          </a:fontRef>
-        </p:style>
-        <p:txBody>
-          <a:bodyPr rtlCol="0" anchor="t"/>
-          <a:lstStyle/>
-          <a:p>
-            <a:pPr algn="ctr"/>
-            <a:r>
-              <a:rPr lang="it-IT" sz="2400" dirty="0">
-                <a:latin typeface="Palatino Linotype" panose="02040502050505030304" pitchFamily="18" charset="0"/>
-              </a:rPr>
-              <a:t>Server</a:t>
-            </a:r>
-          </a:p>
-        </p:txBody>
-      </p:sp>
-      <p:cxnSp>
-        <p:nvCxnSpPr>
-          <p:cNvPr id="7" name="Connettore 2 6"/>
-          <p:cNvCxnSpPr/>
-          <p:nvPr/>
-        </p:nvCxnSpPr>
-        <p:spPr>
-          <a:xfrm flipV="1">
-            <a:off x="4421605" y="4746458"/>
-            <a:ext cx="3410953" cy="24063"/>
-          </a:xfrm>
-          <a:prstGeom prst="straightConnector1">
-            <a:avLst/>
-          </a:prstGeom>
-          <a:ln w="28575">
-            <a:solidFill>
-              <a:schemeClr val="tx1"/>
-            </a:solidFill>
-            <a:tailEnd type="triangle"/>
-          </a:ln>
-        </p:spPr>
-        <p:style>
-          <a:lnRef idx="1">
-            <a:schemeClr val="accent1"/>
-          </a:lnRef>
-          <a:fillRef idx="0">
-            <a:schemeClr val="accent1"/>
-          </a:fillRef>
-          <a:effectRef idx="0">
-            <a:schemeClr val="accent1"/>
-          </a:effectRef>
-          <a:fontRef idx="minor">
-            <a:schemeClr val="tx1"/>
-          </a:fontRef>
-        </p:style>
-      </p:cxnSp>
-      <p:sp>
-        <p:nvSpPr>
-          <p:cNvPr id="9" name="CasellaDiTesto 8"/>
-          <p:cNvSpPr txBox="1"/>
-          <p:nvPr/>
-        </p:nvSpPr>
-        <p:spPr>
-          <a:xfrm>
-            <a:off x="5075183" y="4310555"/>
-            <a:ext cx="2358190" cy="369332"/>
-          </a:xfrm>
-          <a:prstGeom prst="rect">
-            <a:avLst/>
-          </a:prstGeom>
-          <a:noFill/>
-        </p:spPr>
-        <p:txBody>
-          <a:bodyPr wrap="square" rtlCol="0">
-            <a:spAutoFit/>
-          </a:bodyPr>
-          <a:lstStyle/>
-          <a:p>
-            <a:r>
-              <a:rPr lang="it-IT" dirty="0">
-                <a:latin typeface="Palatino Linotype" panose="02040502050505030304" pitchFamily="18" charset="0"/>
-              </a:rPr>
-              <a:t>Resource </a:t>
-            </a:r>
-            <a:r>
-              <a:rPr lang="it-IT" dirty="0" err="1">
-                <a:latin typeface="Palatino Linotype" panose="02040502050505030304" pitchFamily="18" charset="0"/>
-              </a:rPr>
-              <a:t>identifier</a:t>
-            </a:r>
-            <a:endParaRPr lang="en-GB" dirty="0">
-              <a:latin typeface="Palatino Linotype" panose="02040502050505030304" pitchFamily="18" charset="0"/>
-            </a:endParaRPr>
-          </a:p>
-        </p:txBody>
-      </p:sp>
-      <p:cxnSp>
-        <p:nvCxnSpPr>
-          <p:cNvPr id="10" name="Connettore 2 9"/>
-          <p:cNvCxnSpPr/>
-          <p:nvPr/>
-        </p:nvCxnSpPr>
-        <p:spPr>
-          <a:xfrm flipH="1">
-            <a:off x="4421605" y="5759639"/>
-            <a:ext cx="3384884" cy="0"/>
-          </a:xfrm>
-          <a:prstGeom prst="straightConnector1">
-            <a:avLst/>
-          </a:prstGeom>
-          <a:ln w="28575">
-            <a:solidFill>
-              <a:schemeClr val="tx1"/>
-            </a:solidFill>
-            <a:tailEnd type="triangle"/>
-          </a:ln>
-        </p:spPr>
-        <p:style>
-          <a:lnRef idx="1">
-            <a:schemeClr val="accent1"/>
-          </a:lnRef>
-          <a:fillRef idx="0">
-            <a:schemeClr val="accent1"/>
-          </a:fillRef>
-          <a:effectRef idx="0">
-            <a:schemeClr val="accent1"/>
-          </a:effectRef>
-          <a:fontRef idx="minor">
-            <a:schemeClr val="tx1"/>
-          </a:fontRef>
-        </p:style>
-      </p:cxnSp>
-      <p:sp>
-        <p:nvSpPr>
-          <p:cNvPr id="14" name="Ovale 13"/>
-          <p:cNvSpPr/>
-          <p:nvPr/>
-        </p:nvSpPr>
-        <p:spPr>
-          <a:xfrm>
-            <a:off x="8844214" y="4882291"/>
-            <a:ext cx="1217194" cy="877348"/>
-          </a:xfrm>
-          <a:prstGeom prst="ellipse">
-            <a:avLst/>
-          </a:prstGeom>
-          <a:solidFill>
-            <a:srgbClr val="00B050"/>
-          </a:solidFill>
-          <a:ln>
-            <a:solidFill>
-              <a:schemeClr val="tx1"/>
             </a:solidFill>
           </a:ln>
         </p:spPr>
@@ -6672,2672 +8534,9 @@
           <a:lstStyle/>
           <a:p>
             <a:pPr algn="ctr"/>
-            <a:r>
-              <a:rPr lang="it-IT" dirty="0" err="1">
-                <a:latin typeface="Palatino Linotype" panose="02040502050505030304" pitchFamily="18" charset="0"/>
-              </a:rPr>
-              <a:t>Entity</a:t>
-            </a:r>
-            <a:endParaRPr lang="en-GB" dirty="0">
-              <a:latin typeface="Palatino Linotype" panose="02040502050505030304" pitchFamily="18" charset="0"/>
+            <a:endParaRPr lang="en-GB">
+              <a:latin typeface="Aptos" panose="020B0004020202020204" pitchFamily="34" charset="0"/>
             </a:endParaRPr>
-          </a:p>
-          <a:p>
-            <a:pPr algn="ctr"/>
-            <a:endParaRPr lang="it-IT" dirty="0">
-              <a:latin typeface="Palatino Linotype" panose="02040502050505030304" pitchFamily="18" charset="0"/>
-            </a:endParaRPr>
-          </a:p>
-        </p:txBody>
-      </p:sp>
-      <p:sp>
-        <p:nvSpPr>
-          <p:cNvPr id="15" name="Rettangolo 14"/>
-          <p:cNvSpPr/>
-          <p:nvPr/>
-        </p:nvSpPr>
-        <p:spPr>
-          <a:xfrm>
-            <a:off x="8201814" y="4634527"/>
-            <a:ext cx="264695" cy="1330128"/>
-          </a:xfrm>
-          <a:prstGeom prst="rect">
-            <a:avLst/>
-          </a:prstGeom>
-        </p:spPr>
-        <p:style>
-          <a:lnRef idx="2">
-            <a:schemeClr val="dk1">
-              <a:shade val="50000"/>
-            </a:schemeClr>
-          </a:lnRef>
-          <a:fillRef idx="1">
-            <a:schemeClr val="dk1"/>
-          </a:fillRef>
-          <a:effectRef idx="0">
-            <a:schemeClr val="dk1"/>
-          </a:effectRef>
-          <a:fontRef idx="minor">
-            <a:schemeClr val="lt1"/>
-          </a:fontRef>
-        </p:style>
-        <p:txBody>
-          <a:bodyPr rtlCol="0" anchor="ctr"/>
-          <a:lstStyle/>
-          <a:p>
-            <a:pPr algn="ctr"/>
-            <a:endParaRPr lang="en-GB"/>
-          </a:p>
-        </p:txBody>
-      </p:sp>
-      <p:sp>
-        <p:nvSpPr>
-          <p:cNvPr id="16" name="Rettangolo 15"/>
-          <p:cNvSpPr/>
-          <p:nvPr/>
-        </p:nvSpPr>
-        <p:spPr>
-          <a:xfrm>
-            <a:off x="3807994" y="4806569"/>
-            <a:ext cx="264695" cy="986043"/>
-          </a:xfrm>
-          <a:prstGeom prst="rect">
-            <a:avLst/>
-          </a:prstGeom>
-        </p:spPr>
-        <p:style>
-          <a:lnRef idx="2">
-            <a:schemeClr val="dk1">
-              <a:shade val="50000"/>
-            </a:schemeClr>
-          </a:lnRef>
-          <a:fillRef idx="1">
-            <a:schemeClr val="dk1"/>
-          </a:fillRef>
-          <a:effectRef idx="0">
-            <a:schemeClr val="dk1"/>
-          </a:effectRef>
-          <a:fontRef idx="minor">
-            <a:schemeClr val="lt1"/>
-          </a:fontRef>
-        </p:style>
-        <p:txBody>
-          <a:bodyPr rtlCol="0" anchor="ctr"/>
-          <a:lstStyle/>
-          <a:p>
-            <a:pPr algn="ctr"/>
-            <a:endParaRPr lang="en-GB"/>
-          </a:p>
-        </p:txBody>
-      </p:sp>
-      <p:cxnSp>
-        <p:nvCxnSpPr>
-          <p:cNvPr id="19" name="Connettore 2 18"/>
-          <p:cNvCxnSpPr/>
-          <p:nvPr/>
-        </p:nvCxnSpPr>
-        <p:spPr>
-          <a:xfrm>
-            <a:off x="8515784" y="4770521"/>
-            <a:ext cx="475247" cy="186489"/>
-          </a:xfrm>
-          <a:prstGeom prst="straightConnector1">
-            <a:avLst/>
-          </a:prstGeom>
-          <a:ln w="28575">
-            <a:solidFill>
-              <a:schemeClr val="tx1"/>
-            </a:solidFill>
-            <a:prstDash val="sysDash"/>
-            <a:tailEnd type="triangle"/>
-          </a:ln>
-        </p:spPr>
-        <p:style>
-          <a:lnRef idx="1">
-            <a:schemeClr val="accent1"/>
-          </a:lnRef>
-          <a:fillRef idx="0">
-            <a:schemeClr val="accent1"/>
-          </a:fillRef>
-          <a:effectRef idx="0">
-            <a:schemeClr val="accent1"/>
-          </a:effectRef>
-          <a:fontRef idx="minor">
-            <a:schemeClr val="tx1"/>
-          </a:fontRef>
-        </p:style>
-      </p:cxnSp>
-      <p:cxnSp>
-        <p:nvCxnSpPr>
-          <p:cNvPr id="20" name="Connettore 2 19"/>
-          <p:cNvCxnSpPr/>
-          <p:nvPr/>
-        </p:nvCxnSpPr>
-        <p:spPr>
-          <a:xfrm flipH="1">
-            <a:off x="8515784" y="5618747"/>
-            <a:ext cx="423679" cy="232001"/>
-          </a:xfrm>
-          <a:prstGeom prst="straightConnector1">
-            <a:avLst/>
-          </a:prstGeom>
-          <a:ln w="28575">
-            <a:solidFill>
-              <a:schemeClr val="tx1"/>
-            </a:solidFill>
-            <a:prstDash val="sysDash"/>
-            <a:tailEnd type="triangle"/>
-          </a:ln>
-        </p:spPr>
-        <p:style>
-          <a:lnRef idx="1">
-            <a:schemeClr val="accent1"/>
-          </a:lnRef>
-          <a:fillRef idx="0">
-            <a:schemeClr val="accent1"/>
-          </a:fillRef>
-          <a:effectRef idx="0">
-            <a:schemeClr val="accent1"/>
-          </a:effectRef>
-          <a:fontRef idx="minor">
-            <a:schemeClr val="tx1"/>
-          </a:fontRef>
-        </p:style>
-      </p:cxnSp>
-      <p:sp>
-        <p:nvSpPr>
-          <p:cNvPr id="24" name="CasellaDiTesto 23"/>
-          <p:cNvSpPr txBox="1"/>
-          <p:nvPr/>
-        </p:nvSpPr>
-        <p:spPr>
-          <a:xfrm>
-            <a:off x="8835765" y="5269287"/>
-            <a:ext cx="1553076" cy="307777"/>
-          </a:xfrm>
-          <a:prstGeom prst="rect">
-            <a:avLst/>
-          </a:prstGeom>
-          <a:noFill/>
-        </p:spPr>
-        <p:txBody>
-          <a:bodyPr wrap="square" rtlCol="0">
-            <a:spAutoFit/>
-          </a:bodyPr>
-          <a:lstStyle/>
-          <a:p>
-            <a:r>
-              <a:rPr lang="it-IT" sz="1400" dirty="0">
-                <a:solidFill>
-                  <a:schemeClr val="bg1"/>
-                </a:solidFill>
-                <a:latin typeface="Palatino Linotype" panose="02040502050505030304" pitchFamily="18" charset="0"/>
-              </a:rPr>
-              <a:t>(</a:t>
-            </a:r>
-            <a:r>
-              <a:rPr lang="it-IT" sz="1400" dirty="0" err="1">
-                <a:solidFill>
-                  <a:schemeClr val="bg1"/>
-                </a:solidFill>
-                <a:latin typeface="Palatino Linotype" panose="02040502050505030304" pitchFamily="18" charset="0"/>
-              </a:rPr>
-              <a:t>raw</a:t>
-            </a:r>
-            <a:r>
-              <a:rPr lang="it-IT" sz="1400" dirty="0">
-                <a:solidFill>
-                  <a:schemeClr val="bg1"/>
-                </a:solidFill>
-                <a:latin typeface="Palatino Linotype" panose="02040502050505030304" pitchFamily="18" charset="0"/>
-              </a:rPr>
-              <a:t> format)</a:t>
-            </a:r>
-            <a:endParaRPr lang="en-GB" sz="1400" dirty="0">
-              <a:solidFill>
-                <a:schemeClr val="bg1"/>
-              </a:solidFill>
-              <a:latin typeface="Palatino Linotype" panose="02040502050505030304" pitchFamily="18" charset="0"/>
-            </a:endParaRPr>
-          </a:p>
-        </p:txBody>
-      </p:sp>
-      <p:sp>
-        <p:nvSpPr>
-          <p:cNvPr id="25" name="Pentagono regolare 24"/>
-          <p:cNvSpPr/>
-          <p:nvPr/>
-        </p:nvSpPr>
-        <p:spPr>
-          <a:xfrm>
-            <a:off x="5075184" y="5047540"/>
-            <a:ext cx="1957564" cy="876830"/>
-          </a:xfrm>
-          <a:prstGeom prst="pentagon">
-            <a:avLst/>
-          </a:prstGeom>
-          <a:solidFill>
-            <a:srgbClr val="00B050"/>
-          </a:solidFill>
-        </p:spPr>
-        <p:style>
-          <a:lnRef idx="2">
-            <a:schemeClr val="accent1">
-              <a:shade val="50000"/>
-            </a:schemeClr>
-          </a:lnRef>
-          <a:fillRef idx="1">
-            <a:schemeClr val="accent1"/>
-          </a:fillRef>
-          <a:effectRef idx="0">
-            <a:schemeClr val="accent1"/>
-          </a:effectRef>
-          <a:fontRef idx="minor">
-            <a:schemeClr val="lt1"/>
-          </a:fontRef>
-        </p:style>
-        <p:txBody>
-          <a:bodyPr rtlCol="0" anchor="ctr"/>
-          <a:lstStyle/>
-          <a:p>
-            <a:pPr algn="ctr"/>
-            <a:endParaRPr lang="en-GB"/>
-          </a:p>
-        </p:txBody>
-      </p:sp>
-      <p:sp>
-        <p:nvSpPr>
-          <p:cNvPr id="13" name="CasellaDiTesto 12"/>
-          <p:cNvSpPr txBox="1"/>
-          <p:nvPr/>
-        </p:nvSpPr>
-        <p:spPr>
-          <a:xfrm>
-            <a:off x="5075183" y="5180682"/>
-            <a:ext cx="1949116" cy="646331"/>
-          </a:xfrm>
-          <a:prstGeom prst="rect">
-            <a:avLst/>
-          </a:prstGeom>
-          <a:noFill/>
-        </p:spPr>
-        <p:txBody>
-          <a:bodyPr wrap="square" rtlCol="0">
-            <a:spAutoFit/>
-          </a:bodyPr>
-          <a:lstStyle/>
-          <a:p>
-            <a:pPr algn="ctr"/>
-            <a:r>
-              <a:rPr lang="it-IT" dirty="0">
-                <a:solidFill>
-                  <a:schemeClr val="bg1"/>
-                </a:solidFill>
-                <a:latin typeface="Palatino Linotype" panose="02040502050505030304" pitchFamily="18" charset="0"/>
-              </a:rPr>
-              <a:t>Resource </a:t>
-            </a:r>
-            <a:r>
-              <a:rPr lang="it-IT" dirty="0" err="1">
-                <a:solidFill>
-                  <a:schemeClr val="bg1"/>
-                </a:solidFill>
-                <a:latin typeface="Palatino Linotype" panose="02040502050505030304" pitchFamily="18" charset="0"/>
-              </a:rPr>
-              <a:t>representation</a:t>
-            </a:r>
-            <a:endParaRPr lang="en-GB" dirty="0">
-              <a:solidFill>
-                <a:schemeClr val="bg1"/>
-              </a:solidFill>
-              <a:latin typeface="Palatino Linotype" panose="02040502050505030304" pitchFamily="18" charset="0"/>
-            </a:endParaRPr>
-          </a:p>
-        </p:txBody>
-      </p:sp>
-      <p:sp>
-        <p:nvSpPr>
-          <p:cNvPr id="6" name="Segnaposto numero diapositiva 5"/>
-          <p:cNvSpPr>
-            <a:spLocks noGrp="1"/>
-          </p:cNvSpPr>
-          <p:nvPr>
-            <p:ph type="sldNum" sz="quarter" idx="12"/>
-          </p:nvPr>
-        </p:nvSpPr>
-        <p:spPr/>
-        <p:txBody>
-          <a:bodyPr/>
-          <a:lstStyle/>
-          <a:p>
-            <a:fld id="{31DE2C5B-556E-47B8-A792-024C2FCA4ACC}" type="slidenum">
-              <a:rPr lang="en-GB" smtClean="0"/>
-              <a:t>20</a:t>
-            </a:fld>
-            <a:endParaRPr lang="en-GB"/>
-          </a:p>
-        </p:txBody>
-      </p:sp>
-    </p:spTree>
-    <p:extLst>
-      <p:ext uri="{BB962C8B-B14F-4D97-AF65-F5344CB8AC3E}">
-        <p14:creationId xmlns:p14="http://schemas.microsoft.com/office/powerpoint/2010/main" val="194815998"/>
-      </p:ext>
-    </p:extLst>
-  </p:cSld>
-  <p:clrMapOvr>
-    <a:masterClrMapping/>
-  </p:clrMapOvr>
-</p:sld>
-</file>
-
-<file path=ppt/slides/slide21.xml><?xml version="1.0" encoding="utf-8"?>
-<p:sld xmlns:a="http://schemas.openxmlformats.org/drawingml/2006/main" xmlns:r="http://schemas.openxmlformats.org/officeDocument/2006/relationships" xmlns:p="http://schemas.openxmlformats.org/presentationml/2006/main">
-  <p:cSld>
-    <p:spTree>
-      <p:nvGrpSpPr>
-        <p:cNvPr id="1" name=""/>
-        <p:cNvGrpSpPr/>
-        <p:nvPr/>
-      </p:nvGrpSpPr>
-      <p:grpSpPr>
-        <a:xfrm>
-          <a:off x="0" y="0"/>
-          <a:ext cx="0" cy="0"/>
-          <a:chOff x="0" y="0"/>
-          <a:chExt cx="0" cy="0"/>
-        </a:xfrm>
-      </p:grpSpPr>
-      <p:sp>
-        <p:nvSpPr>
-          <p:cNvPr id="2" name="Titolo 1"/>
-          <p:cNvSpPr>
-            <a:spLocks noGrp="1"/>
-          </p:cNvSpPr>
-          <p:nvPr>
-            <p:ph type="title"/>
-          </p:nvPr>
-        </p:nvSpPr>
-        <p:spPr/>
-        <p:txBody>
-          <a:bodyPr/>
-          <a:lstStyle/>
-          <a:p>
-            <a:r>
-              <a:rPr lang="it-IT" dirty="0" err="1"/>
-              <a:t>Representations</a:t>
-            </a:r>
-            <a:r>
-              <a:rPr lang="it-IT" dirty="0"/>
-              <a:t>: </a:t>
-            </a:r>
-            <a:r>
-              <a:rPr lang="it-IT" dirty="0" err="1"/>
-              <a:t>example</a:t>
-            </a:r>
-            <a:endParaRPr lang="en-GB" dirty="0"/>
-          </a:p>
-        </p:txBody>
-      </p:sp>
-      <p:sp>
-        <p:nvSpPr>
-          <p:cNvPr id="4" name="Ovale 3"/>
-          <p:cNvSpPr/>
-          <p:nvPr/>
-        </p:nvSpPr>
-        <p:spPr>
-          <a:xfrm>
-            <a:off x="428172" y="3164307"/>
-            <a:ext cx="1800000" cy="1800000"/>
-          </a:xfrm>
-          <a:prstGeom prst="ellipse">
-            <a:avLst/>
-          </a:prstGeom>
-        </p:spPr>
-        <p:style>
-          <a:lnRef idx="1">
-            <a:schemeClr val="accent6"/>
-          </a:lnRef>
-          <a:fillRef idx="2">
-            <a:schemeClr val="accent6"/>
-          </a:fillRef>
-          <a:effectRef idx="1">
-            <a:schemeClr val="accent6"/>
-          </a:effectRef>
-          <a:fontRef idx="minor">
-            <a:schemeClr val="dk1"/>
-          </a:fontRef>
-        </p:style>
-        <p:txBody>
-          <a:bodyPr rtlCol="0" anchor="ctr"/>
-          <a:lstStyle/>
-          <a:p>
-            <a:pPr algn="ctr"/>
-            <a:endParaRPr lang="en-GB"/>
-          </a:p>
-        </p:txBody>
-      </p:sp>
-      <p:sp>
-        <p:nvSpPr>
-          <p:cNvPr id="5" name="CasellaDiTesto 4"/>
-          <p:cNvSpPr txBox="1"/>
-          <p:nvPr/>
-        </p:nvSpPr>
-        <p:spPr>
-          <a:xfrm>
-            <a:off x="220215" y="2524154"/>
-            <a:ext cx="2358190" cy="461665"/>
-          </a:xfrm>
-          <a:prstGeom prst="rect">
-            <a:avLst/>
-          </a:prstGeom>
-          <a:noFill/>
-        </p:spPr>
-        <p:txBody>
-          <a:bodyPr wrap="square" rtlCol="0">
-            <a:spAutoFit/>
-          </a:bodyPr>
-          <a:lstStyle/>
-          <a:p>
-            <a:r>
-              <a:rPr lang="it-IT" sz="2400" b="1" dirty="0">
-                <a:latin typeface="Palatino Linotype" panose="02040502050505030304" pitchFamily="18" charset="0"/>
-              </a:rPr>
-              <a:t>Resource</a:t>
-            </a:r>
-            <a:r>
-              <a:rPr lang="it-IT" sz="2400" dirty="0">
-                <a:latin typeface="Palatino Linotype" panose="02040502050505030304" pitchFamily="18" charset="0"/>
-              </a:rPr>
-              <a:t>: </a:t>
-            </a:r>
-            <a:r>
-              <a:rPr lang="it-IT" sz="2400" dirty="0" err="1">
-                <a:latin typeface="Palatino Linotype" panose="02040502050505030304" pitchFamily="18" charset="0"/>
-              </a:rPr>
-              <a:t>circle</a:t>
-            </a:r>
-            <a:endParaRPr lang="en-GB" sz="2400" dirty="0">
-              <a:latin typeface="Palatino Linotype" panose="02040502050505030304" pitchFamily="18" charset="0"/>
-            </a:endParaRPr>
-          </a:p>
-        </p:txBody>
-      </p:sp>
-      <p:sp>
-        <p:nvSpPr>
-          <p:cNvPr id="7" name="CasellaDiTesto 6"/>
-          <p:cNvSpPr txBox="1"/>
-          <p:nvPr/>
-        </p:nvSpPr>
-        <p:spPr>
-          <a:xfrm>
-            <a:off x="6671510" y="1441200"/>
-            <a:ext cx="5077325" cy="1015663"/>
-          </a:xfrm>
-          <a:prstGeom prst="rect">
-            <a:avLst/>
-          </a:prstGeom>
-          <a:noFill/>
-        </p:spPr>
-        <p:txBody>
-          <a:bodyPr wrap="square" rtlCol="0">
-            <a:spAutoFit/>
-          </a:bodyPr>
-          <a:lstStyle/>
-          <a:p>
-            <a:pPr algn="ctr"/>
-            <a:r>
-              <a:rPr lang="it-IT" sz="2000" b="1" dirty="0" err="1">
-                <a:latin typeface="Palatino Linotype" panose="02040502050505030304" pitchFamily="18" charset="0"/>
-              </a:rPr>
-              <a:t>Representation</a:t>
-            </a:r>
-            <a:r>
-              <a:rPr lang="it-IT" sz="2000" b="1" dirty="0">
-                <a:latin typeface="Palatino Linotype" panose="02040502050505030304" pitchFamily="18" charset="0"/>
-              </a:rPr>
-              <a:t> 1:</a:t>
-            </a:r>
-            <a:r>
-              <a:rPr lang="it-IT" sz="2000" dirty="0">
-                <a:latin typeface="Palatino Linotype" panose="02040502050505030304" pitchFamily="18" charset="0"/>
-              </a:rPr>
-              <a:t> </a:t>
-            </a:r>
-            <a:r>
-              <a:rPr lang="it-IT" sz="2000" dirty="0" err="1">
-                <a:latin typeface="Palatino Linotype" panose="02040502050505030304" pitchFamily="18" charset="0"/>
-              </a:rPr>
-              <a:t>one</a:t>
-            </a:r>
-            <a:r>
-              <a:rPr lang="it-IT" sz="2000" dirty="0">
-                <a:latin typeface="Palatino Linotype" panose="02040502050505030304" pitchFamily="18" charset="0"/>
-              </a:rPr>
-              <a:t> </a:t>
-            </a:r>
-            <a:r>
-              <a:rPr lang="it-IT" sz="2000" dirty="0" err="1">
-                <a:latin typeface="Palatino Linotype" panose="02040502050505030304" pitchFamily="18" charset="0"/>
-              </a:rPr>
-              <a:t>point</a:t>
-            </a:r>
-            <a:r>
-              <a:rPr lang="it-IT" sz="2000" dirty="0">
-                <a:latin typeface="Palatino Linotype" panose="02040502050505030304" pitchFamily="18" charset="0"/>
-              </a:rPr>
-              <a:t> for the </a:t>
-            </a:r>
-            <a:r>
-              <a:rPr lang="it-IT" sz="2000" dirty="0" err="1">
-                <a:latin typeface="Palatino Linotype" panose="02040502050505030304" pitchFamily="18" charset="0"/>
-              </a:rPr>
-              <a:t>circle</a:t>
-            </a:r>
-            <a:r>
-              <a:rPr lang="it-IT" sz="2000" dirty="0">
-                <a:latin typeface="Palatino Linotype" panose="02040502050505030304" pitchFamily="18" charset="0"/>
-              </a:rPr>
-              <a:t> center and </a:t>
-            </a:r>
-            <a:r>
-              <a:rPr lang="it-IT" sz="2000" dirty="0" err="1">
-                <a:latin typeface="Palatino Linotype" panose="02040502050505030304" pitchFamily="18" charset="0"/>
-              </a:rPr>
-              <a:t>one</a:t>
-            </a:r>
-            <a:r>
-              <a:rPr lang="it-IT" sz="2000" dirty="0">
-                <a:latin typeface="Palatino Linotype" panose="02040502050505030304" pitchFamily="18" charset="0"/>
-              </a:rPr>
-              <a:t> </a:t>
-            </a:r>
-            <a:r>
-              <a:rPr lang="it-IT" sz="2000" dirty="0" err="1">
-                <a:latin typeface="Palatino Linotype" panose="02040502050505030304" pitchFamily="18" charset="0"/>
-              </a:rPr>
-              <a:t>vector</a:t>
-            </a:r>
-            <a:r>
-              <a:rPr lang="it-IT" sz="2000" dirty="0">
-                <a:latin typeface="Palatino Linotype" panose="02040502050505030304" pitchFamily="18" charset="0"/>
-              </a:rPr>
-              <a:t> for the </a:t>
-            </a:r>
-            <a:r>
-              <a:rPr lang="it-IT" sz="2000" dirty="0" err="1">
-                <a:latin typeface="Palatino Linotype" panose="02040502050505030304" pitchFamily="18" charset="0"/>
-              </a:rPr>
-              <a:t>circle</a:t>
-            </a:r>
-            <a:r>
-              <a:rPr lang="it-IT" sz="2000" dirty="0">
-                <a:latin typeface="Palatino Linotype" panose="02040502050505030304" pitchFamily="18" charset="0"/>
-              </a:rPr>
-              <a:t> </a:t>
-            </a:r>
-            <a:r>
-              <a:rPr lang="it-IT" sz="2000" dirty="0" err="1">
-                <a:latin typeface="Palatino Linotype" panose="02040502050505030304" pitchFamily="18" charset="0"/>
-              </a:rPr>
-              <a:t>radius</a:t>
-            </a:r>
-            <a:r>
-              <a:rPr lang="it-IT" sz="2000" dirty="0">
-                <a:latin typeface="Palatino Linotype" panose="02040502050505030304" pitchFamily="18" charset="0"/>
-              </a:rPr>
-              <a:t> in SVG format</a:t>
-            </a:r>
-            <a:endParaRPr lang="en-GB" sz="2000" dirty="0">
-              <a:latin typeface="Palatino Linotype" panose="02040502050505030304" pitchFamily="18" charset="0"/>
-            </a:endParaRPr>
-          </a:p>
-        </p:txBody>
-      </p:sp>
-      <p:sp>
-        <p:nvSpPr>
-          <p:cNvPr id="8" name="Ovale 7"/>
-          <p:cNvSpPr/>
-          <p:nvPr/>
-        </p:nvSpPr>
-        <p:spPr>
-          <a:xfrm>
-            <a:off x="3989763" y="3434307"/>
-            <a:ext cx="1260000" cy="1260000"/>
-          </a:xfrm>
-          <a:prstGeom prst="ellipse">
-            <a:avLst/>
-          </a:prstGeom>
-        </p:spPr>
-        <p:style>
-          <a:lnRef idx="1">
-            <a:schemeClr val="accent4"/>
-          </a:lnRef>
-          <a:fillRef idx="2">
-            <a:schemeClr val="accent4"/>
-          </a:fillRef>
-          <a:effectRef idx="1">
-            <a:schemeClr val="accent4"/>
-          </a:effectRef>
-          <a:fontRef idx="minor">
-            <a:schemeClr val="dk1"/>
-          </a:fontRef>
-        </p:style>
-        <p:txBody>
-          <a:bodyPr rtlCol="0" anchor="ctr"/>
-          <a:lstStyle/>
-          <a:p>
-            <a:pPr algn="ctr"/>
-            <a:endParaRPr lang="en-GB"/>
-          </a:p>
-        </p:txBody>
-      </p:sp>
-      <p:sp>
-        <p:nvSpPr>
-          <p:cNvPr id="9" name="CasellaDiTesto 8"/>
-          <p:cNvSpPr txBox="1"/>
-          <p:nvPr/>
-        </p:nvSpPr>
-        <p:spPr>
-          <a:xfrm>
-            <a:off x="3377684" y="2524154"/>
-            <a:ext cx="2358190" cy="830997"/>
-          </a:xfrm>
-          <a:prstGeom prst="rect">
-            <a:avLst/>
-          </a:prstGeom>
-          <a:noFill/>
-        </p:spPr>
-        <p:txBody>
-          <a:bodyPr wrap="square" rtlCol="0">
-            <a:spAutoFit/>
-          </a:bodyPr>
-          <a:lstStyle/>
-          <a:p>
-            <a:pPr algn="ctr"/>
-            <a:r>
-              <a:rPr lang="it-IT" sz="2400" b="1" dirty="0" err="1">
-                <a:latin typeface="Palatino Linotype" panose="02040502050505030304" pitchFamily="18" charset="0"/>
-              </a:rPr>
-              <a:t>Entity</a:t>
-            </a:r>
-            <a:r>
-              <a:rPr lang="it-IT" sz="2400" dirty="0">
-                <a:latin typeface="Palatino Linotype" panose="02040502050505030304" pitchFamily="18" charset="0"/>
-              </a:rPr>
-              <a:t>: a </a:t>
-            </a:r>
-            <a:r>
-              <a:rPr lang="it-IT" sz="2400" dirty="0" err="1">
-                <a:latin typeface="Palatino Linotype" panose="02040502050505030304" pitchFamily="18" charset="0"/>
-              </a:rPr>
-              <a:t>circle</a:t>
-            </a:r>
-            <a:r>
-              <a:rPr lang="it-IT" sz="2400" dirty="0">
-                <a:latin typeface="Palatino Linotype" panose="02040502050505030304" pitchFamily="18" charset="0"/>
-              </a:rPr>
-              <a:t> </a:t>
-            </a:r>
-            <a:r>
-              <a:rPr lang="it-IT" sz="2400" dirty="0" err="1">
-                <a:latin typeface="Palatino Linotype" panose="02040502050505030304" pitchFamily="18" charset="0"/>
-              </a:rPr>
-              <a:t>realization</a:t>
-            </a:r>
-            <a:endParaRPr lang="en-GB" sz="2400" dirty="0">
-              <a:latin typeface="Palatino Linotype" panose="02040502050505030304" pitchFamily="18" charset="0"/>
-            </a:endParaRPr>
-          </a:p>
-        </p:txBody>
-      </p:sp>
-      <p:sp>
-        <p:nvSpPr>
-          <p:cNvPr id="10" name="Ovale 9"/>
-          <p:cNvSpPr/>
-          <p:nvPr/>
-        </p:nvSpPr>
-        <p:spPr>
-          <a:xfrm>
-            <a:off x="8547038" y="2510291"/>
-            <a:ext cx="1260000" cy="1260000"/>
-          </a:xfrm>
-          <a:prstGeom prst="ellipse">
-            <a:avLst/>
-          </a:prstGeom>
-        </p:spPr>
-        <p:style>
-          <a:lnRef idx="1">
-            <a:schemeClr val="accent4"/>
-          </a:lnRef>
-          <a:fillRef idx="2">
-            <a:schemeClr val="accent4"/>
-          </a:fillRef>
-          <a:effectRef idx="1">
-            <a:schemeClr val="accent4"/>
-          </a:effectRef>
-          <a:fontRef idx="minor">
-            <a:schemeClr val="dk1"/>
-          </a:fontRef>
-        </p:style>
-        <p:txBody>
-          <a:bodyPr rtlCol="0" anchor="ctr"/>
-          <a:lstStyle/>
-          <a:p>
-            <a:pPr algn="ctr"/>
-            <a:endParaRPr lang="en-GB"/>
-          </a:p>
-        </p:txBody>
-      </p:sp>
-      <p:sp>
-        <p:nvSpPr>
-          <p:cNvPr id="11" name="Ovale 10"/>
-          <p:cNvSpPr/>
-          <p:nvPr/>
-        </p:nvSpPr>
-        <p:spPr>
-          <a:xfrm>
-            <a:off x="8504927" y="4979805"/>
-            <a:ext cx="1260000" cy="1260000"/>
-          </a:xfrm>
-          <a:prstGeom prst="ellipse">
-            <a:avLst/>
-          </a:prstGeom>
-        </p:spPr>
-        <p:style>
-          <a:lnRef idx="1">
-            <a:schemeClr val="accent4"/>
-          </a:lnRef>
-          <a:fillRef idx="2">
-            <a:schemeClr val="accent4"/>
-          </a:fillRef>
-          <a:effectRef idx="1">
-            <a:schemeClr val="accent4"/>
-          </a:effectRef>
-          <a:fontRef idx="minor">
-            <a:schemeClr val="dk1"/>
-          </a:fontRef>
-        </p:style>
-        <p:txBody>
-          <a:bodyPr rtlCol="0" anchor="ctr"/>
-          <a:lstStyle/>
-          <a:p>
-            <a:pPr algn="ctr"/>
-            <a:endParaRPr lang="en-GB"/>
-          </a:p>
-        </p:txBody>
-      </p:sp>
-      <p:sp>
-        <p:nvSpPr>
-          <p:cNvPr id="12" name="Ovale 11"/>
-          <p:cNvSpPr/>
-          <p:nvPr/>
-        </p:nvSpPr>
-        <p:spPr>
-          <a:xfrm>
-            <a:off x="9141038" y="3104291"/>
-            <a:ext cx="72000" cy="72000"/>
-          </a:xfrm>
-          <a:prstGeom prst="ellipse">
-            <a:avLst/>
-          </a:prstGeom>
-          <a:solidFill>
-            <a:srgbClr val="C00000"/>
-          </a:solidFill>
-          <a:ln>
-            <a:solidFill>
-              <a:srgbClr val="C00000"/>
-            </a:solidFill>
-          </a:ln>
-        </p:spPr>
-        <p:style>
-          <a:lnRef idx="2">
-            <a:schemeClr val="accent1">
-              <a:shade val="50000"/>
-            </a:schemeClr>
-          </a:lnRef>
-          <a:fillRef idx="1">
-            <a:schemeClr val="accent1"/>
-          </a:fillRef>
-          <a:effectRef idx="0">
-            <a:schemeClr val="accent1"/>
-          </a:effectRef>
-          <a:fontRef idx="minor">
-            <a:schemeClr val="lt1"/>
-          </a:fontRef>
-        </p:style>
-        <p:txBody>
-          <a:bodyPr rtlCol="0" anchor="ctr"/>
-          <a:lstStyle/>
-          <a:p>
-            <a:pPr algn="ctr"/>
-            <a:endParaRPr lang="en-GB"/>
-          </a:p>
-        </p:txBody>
-      </p:sp>
-      <p:cxnSp>
-        <p:nvCxnSpPr>
-          <p:cNvPr id="14" name="Connettore diritto 13"/>
-          <p:cNvCxnSpPr>
-            <a:stCxn id="12" idx="7"/>
-            <a:endCxn id="10" idx="7"/>
-          </p:cNvCxnSpPr>
-          <p:nvPr/>
-        </p:nvCxnSpPr>
-        <p:spPr>
-          <a:xfrm flipV="1">
-            <a:off x="9202494" y="2694814"/>
-            <a:ext cx="420021" cy="420021"/>
-          </a:xfrm>
-          <a:prstGeom prst="line">
-            <a:avLst/>
-          </a:prstGeom>
-          <a:ln w="19050">
-            <a:solidFill>
-              <a:srgbClr val="C00000"/>
-            </a:solidFill>
-            <a:prstDash val="dash"/>
-          </a:ln>
-        </p:spPr>
-        <p:style>
-          <a:lnRef idx="1">
-            <a:schemeClr val="accent1"/>
-          </a:lnRef>
-          <a:fillRef idx="0">
-            <a:schemeClr val="accent1"/>
-          </a:fillRef>
-          <a:effectRef idx="0">
-            <a:schemeClr val="accent1"/>
-          </a:effectRef>
-          <a:fontRef idx="minor">
-            <a:schemeClr val="tx1"/>
-          </a:fontRef>
-        </p:style>
-      </p:cxnSp>
-      <p:sp>
-        <p:nvSpPr>
-          <p:cNvPr id="15" name="Ovale 14"/>
-          <p:cNvSpPr/>
-          <p:nvPr/>
-        </p:nvSpPr>
-        <p:spPr>
-          <a:xfrm>
-            <a:off x="8679827" y="5128637"/>
-            <a:ext cx="72000" cy="72000"/>
-          </a:xfrm>
-          <a:prstGeom prst="ellipse">
-            <a:avLst/>
-          </a:prstGeom>
-          <a:solidFill>
-            <a:srgbClr val="C00000"/>
-          </a:solidFill>
-          <a:ln>
-            <a:solidFill>
-              <a:srgbClr val="C00000"/>
-            </a:solidFill>
-          </a:ln>
-        </p:spPr>
-        <p:style>
-          <a:lnRef idx="2">
-            <a:schemeClr val="accent1">
-              <a:shade val="50000"/>
-            </a:schemeClr>
-          </a:lnRef>
-          <a:fillRef idx="1">
-            <a:schemeClr val="accent1"/>
-          </a:fillRef>
-          <a:effectRef idx="0">
-            <a:schemeClr val="accent1"/>
-          </a:effectRef>
-          <a:fontRef idx="minor">
-            <a:schemeClr val="lt1"/>
-          </a:fontRef>
-        </p:style>
-        <p:txBody>
-          <a:bodyPr rtlCol="0" anchor="ctr"/>
-          <a:lstStyle/>
-          <a:p>
-            <a:pPr algn="ctr"/>
-            <a:endParaRPr lang="en-GB"/>
-          </a:p>
-        </p:txBody>
-      </p:sp>
-      <p:sp>
-        <p:nvSpPr>
-          <p:cNvPr id="16" name="Ovale 15"/>
-          <p:cNvSpPr/>
-          <p:nvPr/>
-        </p:nvSpPr>
-        <p:spPr>
-          <a:xfrm>
-            <a:off x="8848269" y="6149757"/>
-            <a:ext cx="72000" cy="72000"/>
-          </a:xfrm>
-          <a:prstGeom prst="ellipse">
-            <a:avLst/>
-          </a:prstGeom>
-          <a:solidFill>
-            <a:srgbClr val="C00000"/>
-          </a:solidFill>
-          <a:ln>
-            <a:solidFill>
-              <a:srgbClr val="C00000"/>
-            </a:solidFill>
-          </a:ln>
-        </p:spPr>
-        <p:style>
-          <a:lnRef idx="2">
-            <a:schemeClr val="accent1">
-              <a:shade val="50000"/>
-            </a:schemeClr>
-          </a:lnRef>
-          <a:fillRef idx="1">
-            <a:schemeClr val="accent1"/>
-          </a:fillRef>
-          <a:effectRef idx="0">
-            <a:schemeClr val="accent1"/>
-          </a:effectRef>
-          <a:fontRef idx="minor">
-            <a:schemeClr val="lt1"/>
-          </a:fontRef>
-        </p:style>
-        <p:txBody>
-          <a:bodyPr rtlCol="0" anchor="ctr"/>
-          <a:lstStyle/>
-          <a:p>
-            <a:pPr algn="ctr"/>
-            <a:endParaRPr lang="en-GB"/>
-          </a:p>
-        </p:txBody>
-      </p:sp>
-      <p:sp>
-        <p:nvSpPr>
-          <p:cNvPr id="17" name="Ovale 16"/>
-          <p:cNvSpPr/>
-          <p:nvPr/>
-        </p:nvSpPr>
-        <p:spPr>
-          <a:xfrm>
-            <a:off x="9588210" y="5182786"/>
-            <a:ext cx="72000" cy="72000"/>
-          </a:xfrm>
-          <a:prstGeom prst="ellipse">
-            <a:avLst/>
-          </a:prstGeom>
-          <a:solidFill>
-            <a:srgbClr val="C00000"/>
-          </a:solidFill>
-          <a:ln>
-            <a:solidFill>
-              <a:srgbClr val="C00000"/>
-            </a:solidFill>
-          </a:ln>
-        </p:spPr>
-        <p:style>
-          <a:lnRef idx="2">
-            <a:schemeClr val="accent1">
-              <a:shade val="50000"/>
-            </a:schemeClr>
-          </a:lnRef>
-          <a:fillRef idx="1">
-            <a:schemeClr val="accent1"/>
-          </a:fillRef>
-          <a:effectRef idx="0">
-            <a:schemeClr val="accent1"/>
-          </a:effectRef>
-          <a:fontRef idx="minor">
-            <a:schemeClr val="lt1"/>
-          </a:fontRef>
-        </p:style>
-        <p:txBody>
-          <a:bodyPr rtlCol="0" anchor="ctr"/>
-          <a:lstStyle/>
-          <a:p>
-            <a:pPr algn="ctr"/>
-            <a:endParaRPr lang="en-GB"/>
-          </a:p>
-        </p:txBody>
-      </p:sp>
-      <p:sp>
-        <p:nvSpPr>
-          <p:cNvPr id="18" name="CasellaDiTesto 17"/>
-          <p:cNvSpPr txBox="1"/>
-          <p:nvPr/>
-        </p:nvSpPr>
-        <p:spPr>
-          <a:xfrm>
-            <a:off x="6701589" y="4168113"/>
-            <a:ext cx="5017169" cy="707886"/>
-          </a:xfrm>
-          <a:prstGeom prst="rect">
-            <a:avLst/>
-          </a:prstGeom>
-          <a:noFill/>
-        </p:spPr>
-        <p:txBody>
-          <a:bodyPr wrap="square" rtlCol="0">
-            <a:spAutoFit/>
-          </a:bodyPr>
-          <a:lstStyle/>
-          <a:p>
-            <a:pPr algn="ctr"/>
-            <a:r>
-              <a:rPr lang="it-IT" sz="2000" b="1" dirty="0" err="1">
-                <a:latin typeface="Palatino Linotype" panose="02040502050505030304" pitchFamily="18" charset="0"/>
-              </a:rPr>
-              <a:t>Representation</a:t>
-            </a:r>
-            <a:r>
-              <a:rPr lang="it-IT" sz="2000" b="1" dirty="0">
-                <a:latin typeface="Palatino Linotype" panose="02040502050505030304" pitchFamily="18" charset="0"/>
-              </a:rPr>
-              <a:t> 2</a:t>
-            </a:r>
-            <a:r>
-              <a:rPr lang="it-IT" sz="2000" dirty="0">
-                <a:latin typeface="Palatino Linotype" panose="02040502050505030304" pitchFamily="18" charset="0"/>
-              </a:rPr>
-              <a:t>: </a:t>
-            </a:r>
-            <a:r>
-              <a:rPr lang="it-IT" sz="2000" dirty="0" err="1">
-                <a:latin typeface="Palatino Linotype" panose="02040502050505030304" pitchFamily="18" charset="0"/>
-              </a:rPr>
-              <a:t>coordinates</a:t>
-            </a:r>
-            <a:r>
-              <a:rPr lang="it-IT" sz="2000" dirty="0">
-                <a:latin typeface="Palatino Linotype" panose="02040502050505030304" pitchFamily="18" charset="0"/>
-              </a:rPr>
-              <a:t> of </a:t>
-            </a:r>
-            <a:r>
-              <a:rPr lang="it-IT" sz="2000" dirty="0" err="1">
-                <a:latin typeface="Palatino Linotype" panose="02040502050505030304" pitchFamily="18" charset="0"/>
-              </a:rPr>
-              <a:t>three</a:t>
-            </a:r>
-            <a:r>
-              <a:rPr lang="it-IT" sz="2000" dirty="0">
-                <a:latin typeface="Palatino Linotype" panose="02040502050505030304" pitchFamily="18" charset="0"/>
-              </a:rPr>
-              <a:t> </a:t>
-            </a:r>
-            <a:r>
-              <a:rPr lang="it-IT" sz="2000" dirty="0" err="1">
-                <a:latin typeface="Palatino Linotype" panose="02040502050505030304" pitchFamily="18" charset="0"/>
-              </a:rPr>
-              <a:t>points</a:t>
-            </a:r>
-            <a:r>
-              <a:rPr lang="it-IT" sz="2000" dirty="0">
-                <a:latin typeface="Palatino Linotype" panose="02040502050505030304" pitchFamily="18" charset="0"/>
-              </a:rPr>
-              <a:t> of the </a:t>
-            </a:r>
-            <a:r>
-              <a:rPr lang="it-IT" sz="2000" dirty="0" err="1">
-                <a:latin typeface="Palatino Linotype" panose="02040502050505030304" pitchFamily="18" charset="0"/>
-              </a:rPr>
-              <a:t>circumference</a:t>
-            </a:r>
-            <a:r>
-              <a:rPr lang="it-IT" sz="2000" dirty="0">
-                <a:latin typeface="Palatino Linotype" panose="02040502050505030304" pitchFamily="18" charset="0"/>
-              </a:rPr>
-              <a:t> in a </a:t>
-            </a:r>
-            <a:r>
-              <a:rPr lang="it-IT" sz="2000" dirty="0" err="1">
-                <a:latin typeface="Palatino Linotype" panose="02040502050505030304" pitchFamily="18" charset="0"/>
-              </a:rPr>
-              <a:t>csv</a:t>
-            </a:r>
-            <a:r>
-              <a:rPr lang="it-IT" sz="2000" dirty="0">
-                <a:latin typeface="Palatino Linotype" panose="02040502050505030304" pitchFamily="18" charset="0"/>
-              </a:rPr>
-              <a:t> file</a:t>
-            </a:r>
-            <a:endParaRPr lang="en-GB" sz="2000" dirty="0">
-              <a:latin typeface="Palatino Linotype" panose="02040502050505030304" pitchFamily="18" charset="0"/>
-            </a:endParaRPr>
-          </a:p>
-        </p:txBody>
-      </p:sp>
-      <p:cxnSp>
-        <p:nvCxnSpPr>
-          <p:cNvPr id="20" name="Connettore 2 19"/>
-          <p:cNvCxnSpPr/>
-          <p:nvPr/>
-        </p:nvCxnSpPr>
-        <p:spPr>
-          <a:xfrm flipV="1">
-            <a:off x="5648826" y="2316080"/>
-            <a:ext cx="1052763" cy="848227"/>
-          </a:xfrm>
-          <a:prstGeom prst="straightConnector1">
-            <a:avLst/>
-          </a:prstGeom>
-          <a:ln w="57150">
-            <a:solidFill>
-              <a:schemeClr val="tx1"/>
-            </a:solidFill>
-            <a:tailEnd type="triangle"/>
-          </a:ln>
-        </p:spPr>
-        <p:style>
-          <a:lnRef idx="1">
-            <a:schemeClr val="accent1"/>
-          </a:lnRef>
-          <a:fillRef idx="0">
-            <a:schemeClr val="accent1"/>
-          </a:fillRef>
-          <a:effectRef idx="0">
-            <a:schemeClr val="accent1"/>
-          </a:effectRef>
-          <a:fontRef idx="minor">
-            <a:schemeClr val="tx1"/>
-          </a:fontRef>
-        </p:style>
-      </p:cxnSp>
-      <p:cxnSp>
-        <p:nvCxnSpPr>
-          <p:cNvPr id="21" name="Connettore 2 20"/>
-          <p:cNvCxnSpPr/>
-          <p:nvPr/>
-        </p:nvCxnSpPr>
-        <p:spPr>
-          <a:xfrm>
-            <a:off x="5648826" y="4168114"/>
-            <a:ext cx="1221206" cy="353942"/>
-          </a:xfrm>
-          <a:prstGeom prst="straightConnector1">
-            <a:avLst/>
-          </a:prstGeom>
-          <a:ln w="57150">
-            <a:solidFill>
-              <a:schemeClr val="tx1"/>
-            </a:solidFill>
-            <a:tailEnd type="triangle"/>
-          </a:ln>
-        </p:spPr>
-        <p:style>
-          <a:lnRef idx="1">
-            <a:schemeClr val="accent1"/>
-          </a:lnRef>
-          <a:fillRef idx="0">
-            <a:schemeClr val="accent1"/>
-          </a:fillRef>
-          <a:effectRef idx="0">
-            <a:schemeClr val="accent1"/>
-          </a:effectRef>
-          <a:fontRef idx="minor">
-            <a:schemeClr val="tx1"/>
-          </a:fontRef>
-        </p:style>
-      </p:cxnSp>
-      <p:sp>
-        <p:nvSpPr>
-          <p:cNvPr id="3" name="Segnaposto numero diapositiva 2"/>
-          <p:cNvSpPr>
-            <a:spLocks noGrp="1"/>
-          </p:cNvSpPr>
-          <p:nvPr>
-            <p:ph type="sldNum" sz="quarter" idx="12"/>
-          </p:nvPr>
-        </p:nvSpPr>
-        <p:spPr/>
-        <p:txBody>
-          <a:bodyPr/>
-          <a:lstStyle/>
-          <a:p>
-            <a:fld id="{31DE2C5B-556E-47B8-A792-024C2FCA4ACC}" type="slidenum">
-              <a:rPr lang="en-GB" smtClean="0"/>
-              <a:t>21</a:t>
-            </a:fld>
-            <a:endParaRPr lang="en-GB"/>
-          </a:p>
-        </p:txBody>
-      </p:sp>
-    </p:spTree>
-    <p:extLst>
-      <p:ext uri="{BB962C8B-B14F-4D97-AF65-F5344CB8AC3E}">
-        <p14:creationId xmlns:p14="http://schemas.microsoft.com/office/powerpoint/2010/main" val="2761484841"/>
-      </p:ext>
-    </p:extLst>
-  </p:cSld>
-  <p:clrMapOvr>
-    <a:masterClrMapping/>
-  </p:clrMapOvr>
-</p:sld>
-</file>
-
-<file path=ppt/slides/slide22.xml><?xml version="1.0" encoding="utf-8"?>
-<p:sld xmlns:a="http://schemas.openxmlformats.org/drawingml/2006/main" xmlns:r="http://schemas.openxmlformats.org/officeDocument/2006/relationships" xmlns:p="http://schemas.openxmlformats.org/presentationml/2006/main">
-  <p:cSld>
-    <p:spTree>
-      <p:nvGrpSpPr>
-        <p:cNvPr id="1" name=""/>
-        <p:cNvGrpSpPr/>
-        <p:nvPr/>
-      </p:nvGrpSpPr>
-      <p:grpSpPr>
-        <a:xfrm>
-          <a:off x="0" y="0"/>
-          <a:ext cx="0" cy="0"/>
-          <a:chOff x="0" y="0"/>
-          <a:chExt cx="0" cy="0"/>
-        </a:xfrm>
-      </p:grpSpPr>
-      <p:sp>
-        <p:nvSpPr>
-          <p:cNvPr id="2" name="Titolo 1"/>
-          <p:cNvSpPr>
-            <a:spLocks noGrp="1"/>
-          </p:cNvSpPr>
-          <p:nvPr>
-            <p:ph type="title"/>
-          </p:nvPr>
-        </p:nvSpPr>
-        <p:spPr/>
-        <p:txBody>
-          <a:bodyPr/>
-          <a:lstStyle/>
-          <a:p>
-            <a:r>
-              <a:rPr lang="it-IT" dirty="0"/>
-              <a:t>REST self-</a:t>
-            </a:r>
-            <a:r>
-              <a:rPr lang="it-IT" dirty="0" err="1"/>
-              <a:t>descriptive</a:t>
-            </a:r>
-            <a:r>
-              <a:rPr lang="it-IT" dirty="0"/>
-              <a:t> </a:t>
-            </a:r>
-            <a:r>
-              <a:rPr lang="it-IT" dirty="0" err="1"/>
-              <a:t>messages</a:t>
-            </a:r>
-            <a:endParaRPr lang="en-GB" dirty="0"/>
-          </a:p>
-        </p:txBody>
-      </p:sp>
-      <p:sp>
-        <p:nvSpPr>
-          <p:cNvPr id="4" name="Rettangolo 3"/>
-          <p:cNvSpPr/>
-          <p:nvPr/>
-        </p:nvSpPr>
-        <p:spPr>
-          <a:xfrm>
-            <a:off x="473459" y="3308140"/>
-            <a:ext cx="2225842" cy="1287379"/>
-          </a:xfrm>
-          <a:prstGeom prst="rect">
-            <a:avLst/>
-          </a:prstGeom>
-          <a:ln w="38100">
-            <a:solidFill>
-              <a:srgbClr val="00B050"/>
-            </a:solidFill>
-          </a:ln>
-        </p:spPr>
-        <p:style>
-          <a:lnRef idx="2">
-            <a:schemeClr val="accent6"/>
-          </a:lnRef>
-          <a:fillRef idx="1">
-            <a:schemeClr val="lt1"/>
-          </a:fillRef>
-          <a:effectRef idx="0">
-            <a:schemeClr val="accent6"/>
-          </a:effectRef>
-          <a:fontRef idx="minor">
-            <a:schemeClr val="dk1"/>
-          </a:fontRef>
-        </p:style>
-        <p:txBody>
-          <a:bodyPr rtlCol="0" anchor="ctr"/>
-          <a:lstStyle/>
-          <a:p>
-            <a:pPr algn="ctr"/>
-            <a:r>
-              <a:rPr lang="it-IT" sz="2800" dirty="0">
-                <a:latin typeface="Palatino Linotype" panose="02040502050505030304" pitchFamily="18" charset="0"/>
-              </a:rPr>
-              <a:t>Client</a:t>
-            </a:r>
-            <a:endParaRPr lang="en-GB" sz="2800" dirty="0">
-              <a:latin typeface="Palatino Linotype" panose="02040502050505030304" pitchFamily="18" charset="0"/>
-            </a:endParaRPr>
-          </a:p>
-        </p:txBody>
-      </p:sp>
-      <p:sp>
-        <p:nvSpPr>
-          <p:cNvPr id="5" name="Rettangolo 4"/>
-          <p:cNvSpPr/>
-          <p:nvPr/>
-        </p:nvSpPr>
-        <p:spPr>
-          <a:xfrm>
-            <a:off x="9035497" y="2971801"/>
-            <a:ext cx="2225842" cy="2111542"/>
-          </a:xfrm>
-          <a:prstGeom prst="rect">
-            <a:avLst/>
-          </a:prstGeom>
-          <a:ln w="38100">
-            <a:solidFill>
-              <a:srgbClr val="00B050"/>
-            </a:solidFill>
-          </a:ln>
-        </p:spPr>
-        <p:style>
-          <a:lnRef idx="2">
-            <a:schemeClr val="accent6"/>
-          </a:lnRef>
-          <a:fillRef idx="1">
-            <a:schemeClr val="lt1"/>
-          </a:fillRef>
-          <a:effectRef idx="0">
-            <a:schemeClr val="accent6"/>
-          </a:effectRef>
-          <a:fontRef idx="minor">
-            <a:schemeClr val="dk1"/>
-          </a:fontRef>
-        </p:style>
-        <p:txBody>
-          <a:bodyPr rtlCol="0" anchor="t"/>
-          <a:lstStyle/>
-          <a:p>
-            <a:pPr algn="ctr"/>
-            <a:r>
-              <a:rPr lang="it-IT" sz="2400" dirty="0">
-                <a:latin typeface="Palatino Linotype" panose="02040502050505030304" pitchFamily="18" charset="0"/>
-              </a:rPr>
-              <a:t>Server</a:t>
-            </a:r>
-          </a:p>
-        </p:txBody>
-      </p:sp>
-      <p:cxnSp>
-        <p:nvCxnSpPr>
-          <p:cNvPr id="6" name="Connettore 2 5"/>
-          <p:cNvCxnSpPr/>
-          <p:nvPr/>
-        </p:nvCxnSpPr>
-        <p:spPr>
-          <a:xfrm>
-            <a:off x="3441031" y="3595773"/>
-            <a:ext cx="4866774" cy="0"/>
-          </a:xfrm>
-          <a:prstGeom prst="straightConnector1">
-            <a:avLst/>
-          </a:prstGeom>
-          <a:ln w="28575">
-            <a:solidFill>
-              <a:schemeClr val="tx1"/>
-            </a:solidFill>
-            <a:tailEnd type="triangle"/>
-          </a:ln>
-        </p:spPr>
-        <p:style>
-          <a:lnRef idx="1">
-            <a:schemeClr val="accent1"/>
-          </a:lnRef>
-          <a:fillRef idx="0">
-            <a:schemeClr val="accent1"/>
-          </a:fillRef>
-          <a:effectRef idx="0">
-            <a:schemeClr val="accent1"/>
-          </a:effectRef>
-          <a:fontRef idx="minor">
-            <a:schemeClr val="tx1"/>
-          </a:fontRef>
-        </p:style>
-      </p:cxnSp>
-      <p:cxnSp>
-        <p:nvCxnSpPr>
-          <p:cNvPr id="8" name="Connettore 2 7"/>
-          <p:cNvCxnSpPr/>
-          <p:nvPr/>
-        </p:nvCxnSpPr>
-        <p:spPr>
-          <a:xfrm flipH="1">
-            <a:off x="3441031" y="4351945"/>
-            <a:ext cx="4788000" cy="0"/>
-          </a:xfrm>
-          <a:prstGeom prst="straightConnector1">
-            <a:avLst/>
-          </a:prstGeom>
-          <a:ln w="28575">
-            <a:solidFill>
-              <a:schemeClr val="tx1"/>
-            </a:solidFill>
-            <a:tailEnd type="triangle"/>
-          </a:ln>
-        </p:spPr>
-        <p:style>
-          <a:lnRef idx="1">
-            <a:schemeClr val="accent1"/>
-          </a:lnRef>
-          <a:fillRef idx="0">
-            <a:schemeClr val="accent1"/>
-          </a:fillRef>
-          <a:effectRef idx="0">
-            <a:schemeClr val="accent1"/>
-          </a:effectRef>
-          <a:fontRef idx="minor">
-            <a:schemeClr val="tx1"/>
-          </a:fontRef>
-        </p:style>
-      </p:cxnSp>
-      <p:sp>
-        <p:nvSpPr>
-          <p:cNvPr id="9" name="Ovale 8"/>
-          <p:cNvSpPr/>
-          <p:nvPr/>
-        </p:nvSpPr>
-        <p:spPr>
-          <a:xfrm>
-            <a:off x="9539821" y="3588897"/>
-            <a:ext cx="1217194" cy="877348"/>
-          </a:xfrm>
-          <a:prstGeom prst="ellipse">
-            <a:avLst/>
-          </a:prstGeom>
-          <a:solidFill>
-            <a:srgbClr val="00B050"/>
-          </a:solidFill>
-          <a:ln>
-            <a:solidFill>
-              <a:schemeClr val="tx1"/>
-            </a:solidFill>
-          </a:ln>
-        </p:spPr>
-        <p:style>
-          <a:lnRef idx="2">
-            <a:schemeClr val="accent1">
-              <a:shade val="50000"/>
-            </a:schemeClr>
-          </a:lnRef>
-          <a:fillRef idx="1">
-            <a:schemeClr val="accent1"/>
-          </a:fillRef>
-          <a:effectRef idx="0">
-            <a:schemeClr val="accent1"/>
-          </a:effectRef>
-          <a:fontRef idx="minor">
-            <a:schemeClr val="lt1"/>
-          </a:fontRef>
-        </p:style>
-        <p:txBody>
-          <a:bodyPr rtlCol="0" anchor="ctr"/>
-          <a:lstStyle/>
-          <a:p>
-            <a:pPr algn="ctr"/>
-            <a:r>
-              <a:rPr lang="it-IT" dirty="0" err="1">
-                <a:latin typeface="Palatino Linotype" panose="02040502050505030304" pitchFamily="18" charset="0"/>
-              </a:rPr>
-              <a:t>Entity</a:t>
-            </a:r>
-            <a:endParaRPr lang="en-GB" dirty="0">
-              <a:latin typeface="Palatino Linotype" panose="02040502050505030304" pitchFamily="18" charset="0"/>
-            </a:endParaRPr>
-          </a:p>
-          <a:p>
-            <a:pPr algn="ctr"/>
-            <a:endParaRPr lang="it-IT" dirty="0">
-              <a:latin typeface="Palatino Linotype" panose="02040502050505030304" pitchFamily="18" charset="0"/>
-            </a:endParaRPr>
-          </a:p>
-        </p:txBody>
-      </p:sp>
-      <p:sp>
-        <p:nvSpPr>
-          <p:cNvPr id="10" name="Rettangolo 9"/>
-          <p:cNvSpPr/>
-          <p:nvPr/>
-        </p:nvSpPr>
-        <p:spPr>
-          <a:xfrm>
-            <a:off x="8897421" y="3341133"/>
-            <a:ext cx="264695" cy="1330128"/>
-          </a:xfrm>
-          <a:prstGeom prst="rect">
-            <a:avLst/>
-          </a:prstGeom>
-        </p:spPr>
-        <p:style>
-          <a:lnRef idx="2">
-            <a:schemeClr val="dk1">
-              <a:shade val="50000"/>
-            </a:schemeClr>
-          </a:lnRef>
-          <a:fillRef idx="1">
-            <a:schemeClr val="dk1"/>
-          </a:fillRef>
-          <a:effectRef idx="0">
-            <a:schemeClr val="dk1"/>
-          </a:effectRef>
-          <a:fontRef idx="minor">
-            <a:schemeClr val="lt1"/>
-          </a:fontRef>
-        </p:style>
-        <p:txBody>
-          <a:bodyPr rtlCol="0" anchor="ctr"/>
-          <a:lstStyle/>
-          <a:p>
-            <a:pPr algn="ctr"/>
-            <a:endParaRPr lang="en-GB"/>
-          </a:p>
-        </p:txBody>
-      </p:sp>
-      <p:sp>
-        <p:nvSpPr>
-          <p:cNvPr id="11" name="Rettangolo 10"/>
-          <p:cNvSpPr/>
-          <p:nvPr/>
-        </p:nvSpPr>
-        <p:spPr>
-          <a:xfrm>
-            <a:off x="2566953" y="3437433"/>
-            <a:ext cx="264695" cy="986043"/>
-          </a:xfrm>
-          <a:prstGeom prst="rect">
-            <a:avLst/>
-          </a:prstGeom>
-        </p:spPr>
-        <p:style>
-          <a:lnRef idx="2">
-            <a:schemeClr val="dk1">
-              <a:shade val="50000"/>
-            </a:schemeClr>
-          </a:lnRef>
-          <a:fillRef idx="1">
-            <a:schemeClr val="dk1"/>
-          </a:fillRef>
-          <a:effectRef idx="0">
-            <a:schemeClr val="dk1"/>
-          </a:effectRef>
-          <a:fontRef idx="minor">
-            <a:schemeClr val="lt1"/>
-          </a:fontRef>
-        </p:style>
-        <p:txBody>
-          <a:bodyPr rtlCol="0" anchor="ctr"/>
-          <a:lstStyle/>
-          <a:p>
-            <a:pPr algn="ctr"/>
-            <a:endParaRPr lang="en-GB"/>
-          </a:p>
-        </p:txBody>
-      </p:sp>
-      <p:cxnSp>
-        <p:nvCxnSpPr>
-          <p:cNvPr id="12" name="Connettore 2 11"/>
-          <p:cNvCxnSpPr/>
-          <p:nvPr/>
-        </p:nvCxnSpPr>
-        <p:spPr>
-          <a:xfrm>
-            <a:off x="9211391" y="3477127"/>
-            <a:ext cx="475247" cy="186489"/>
-          </a:xfrm>
-          <a:prstGeom prst="straightConnector1">
-            <a:avLst/>
-          </a:prstGeom>
-          <a:ln w="28575">
-            <a:solidFill>
-              <a:schemeClr val="tx1"/>
-            </a:solidFill>
-            <a:prstDash val="sysDash"/>
-            <a:tailEnd type="triangle"/>
-          </a:ln>
-        </p:spPr>
-        <p:style>
-          <a:lnRef idx="1">
-            <a:schemeClr val="accent1"/>
-          </a:lnRef>
-          <a:fillRef idx="0">
-            <a:schemeClr val="accent1"/>
-          </a:fillRef>
-          <a:effectRef idx="0">
-            <a:schemeClr val="accent1"/>
-          </a:effectRef>
-          <a:fontRef idx="minor">
-            <a:schemeClr val="tx1"/>
-          </a:fontRef>
-        </p:style>
-      </p:cxnSp>
-      <p:cxnSp>
-        <p:nvCxnSpPr>
-          <p:cNvPr id="13" name="Connettore 2 12"/>
-          <p:cNvCxnSpPr/>
-          <p:nvPr/>
-        </p:nvCxnSpPr>
-        <p:spPr>
-          <a:xfrm flipH="1">
-            <a:off x="9211391" y="4325353"/>
-            <a:ext cx="423679" cy="232001"/>
-          </a:xfrm>
-          <a:prstGeom prst="straightConnector1">
-            <a:avLst/>
-          </a:prstGeom>
-          <a:ln w="28575">
-            <a:solidFill>
-              <a:schemeClr val="tx1"/>
-            </a:solidFill>
-            <a:prstDash val="sysDash"/>
-            <a:tailEnd type="triangle"/>
-          </a:ln>
-        </p:spPr>
-        <p:style>
-          <a:lnRef idx="1">
-            <a:schemeClr val="accent1"/>
-          </a:lnRef>
-          <a:fillRef idx="0">
-            <a:schemeClr val="accent1"/>
-          </a:fillRef>
-          <a:effectRef idx="0">
-            <a:schemeClr val="accent1"/>
-          </a:effectRef>
-          <a:fontRef idx="minor">
-            <a:schemeClr val="tx1"/>
-          </a:fontRef>
-        </p:style>
-      </p:cxnSp>
-      <p:sp>
-        <p:nvSpPr>
-          <p:cNvPr id="14" name="CasellaDiTesto 13"/>
-          <p:cNvSpPr txBox="1"/>
-          <p:nvPr/>
-        </p:nvSpPr>
-        <p:spPr>
-          <a:xfrm>
-            <a:off x="9531372" y="3975893"/>
-            <a:ext cx="1553076" cy="307777"/>
-          </a:xfrm>
-          <a:prstGeom prst="rect">
-            <a:avLst/>
-          </a:prstGeom>
-          <a:noFill/>
-        </p:spPr>
-        <p:txBody>
-          <a:bodyPr wrap="square" rtlCol="0">
-            <a:spAutoFit/>
-          </a:bodyPr>
-          <a:lstStyle/>
-          <a:p>
-            <a:r>
-              <a:rPr lang="it-IT" sz="1400" dirty="0">
-                <a:solidFill>
-                  <a:schemeClr val="bg1"/>
-                </a:solidFill>
-                <a:latin typeface="Palatino Linotype" panose="02040502050505030304" pitchFamily="18" charset="0"/>
-              </a:rPr>
-              <a:t>(</a:t>
-            </a:r>
-            <a:r>
-              <a:rPr lang="it-IT" sz="1400" dirty="0" err="1">
-                <a:solidFill>
-                  <a:schemeClr val="bg1"/>
-                </a:solidFill>
-                <a:latin typeface="Palatino Linotype" panose="02040502050505030304" pitchFamily="18" charset="0"/>
-              </a:rPr>
-              <a:t>raw</a:t>
-            </a:r>
-            <a:r>
-              <a:rPr lang="it-IT" sz="1400" dirty="0">
-                <a:solidFill>
-                  <a:schemeClr val="bg1"/>
-                </a:solidFill>
-                <a:latin typeface="Palatino Linotype" panose="02040502050505030304" pitchFamily="18" charset="0"/>
-              </a:rPr>
-              <a:t> format)</a:t>
-            </a:r>
-            <a:endParaRPr lang="en-GB" sz="1400" dirty="0">
-              <a:solidFill>
-                <a:schemeClr val="bg1"/>
-              </a:solidFill>
-              <a:latin typeface="Palatino Linotype" panose="02040502050505030304" pitchFamily="18" charset="0"/>
-            </a:endParaRPr>
-          </a:p>
-        </p:txBody>
-      </p:sp>
-      <p:sp>
-        <p:nvSpPr>
-          <p:cNvPr id="17" name="Rettangolo arrotondato 16"/>
-          <p:cNvSpPr/>
-          <p:nvPr/>
-        </p:nvSpPr>
-        <p:spPr>
-          <a:xfrm>
-            <a:off x="3774689" y="4557354"/>
-            <a:ext cx="4138863" cy="2100055"/>
-          </a:xfrm>
-          <a:prstGeom prst="roundRect">
-            <a:avLst/>
-          </a:prstGeom>
-          <a:solidFill>
-            <a:schemeClr val="bg1"/>
-          </a:solidFill>
-          <a:ln w="19050">
-            <a:solidFill>
-              <a:schemeClr val="tx1"/>
-            </a:solidFill>
-          </a:ln>
-        </p:spPr>
-        <p:style>
-          <a:lnRef idx="2">
-            <a:schemeClr val="accent1">
-              <a:shade val="50000"/>
-            </a:schemeClr>
-          </a:lnRef>
-          <a:fillRef idx="1">
-            <a:schemeClr val="accent1"/>
-          </a:fillRef>
-          <a:effectRef idx="0">
-            <a:schemeClr val="accent1"/>
-          </a:effectRef>
-          <a:fontRef idx="minor">
-            <a:schemeClr val="lt1"/>
-          </a:fontRef>
-        </p:style>
-        <p:txBody>
-          <a:bodyPr rtlCol="0" anchor="t"/>
-          <a:lstStyle/>
-          <a:p>
-            <a:pPr algn="ctr"/>
-            <a:r>
-              <a:rPr lang="it-IT" b="1" dirty="0">
-                <a:solidFill>
-                  <a:schemeClr val="tx1"/>
-                </a:solidFill>
-                <a:latin typeface="Palatino Linotype" panose="02040502050505030304" pitchFamily="18" charset="0"/>
-              </a:rPr>
-              <a:t>REST </a:t>
-            </a:r>
-            <a:r>
-              <a:rPr lang="it-IT" b="1" dirty="0" err="1">
-                <a:solidFill>
-                  <a:schemeClr val="tx1"/>
-                </a:solidFill>
-                <a:latin typeface="Palatino Linotype" panose="02040502050505030304" pitchFamily="18" charset="0"/>
-              </a:rPr>
-              <a:t>response</a:t>
-            </a:r>
-            <a:r>
-              <a:rPr lang="it-IT" b="1" dirty="0">
-                <a:solidFill>
-                  <a:schemeClr val="tx1"/>
-                </a:solidFill>
-                <a:latin typeface="Palatino Linotype" panose="02040502050505030304" pitchFamily="18" charset="0"/>
-              </a:rPr>
-              <a:t> </a:t>
-            </a:r>
-            <a:r>
-              <a:rPr lang="it-IT" b="1" dirty="0" err="1">
-                <a:solidFill>
-                  <a:schemeClr val="tx1"/>
-                </a:solidFill>
-                <a:latin typeface="Palatino Linotype" panose="02040502050505030304" pitchFamily="18" charset="0"/>
-              </a:rPr>
-              <a:t>message</a:t>
-            </a:r>
-            <a:endParaRPr lang="en-GB" b="1" dirty="0">
-              <a:solidFill>
-                <a:schemeClr val="tx1"/>
-              </a:solidFill>
-              <a:latin typeface="Palatino Linotype" panose="02040502050505030304" pitchFamily="18" charset="0"/>
-            </a:endParaRPr>
-          </a:p>
-        </p:txBody>
-      </p:sp>
-      <p:sp>
-        <p:nvSpPr>
-          <p:cNvPr id="18" name="Rettangolo arrotondato 17"/>
-          <p:cNvSpPr/>
-          <p:nvPr/>
-        </p:nvSpPr>
-        <p:spPr>
-          <a:xfrm>
-            <a:off x="3949365" y="5691188"/>
-            <a:ext cx="1852863" cy="843206"/>
-          </a:xfrm>
-          <a:prstGeom prst="roundRect">
-            <a:avLst/>
-          </a:prstGeom>
-          <a:solidFill>
-            <a:schemeClr val="accent6">
-              <a:lumMod val="20000"/>
-              <a:lumOff val="80000"/>
-            </a:schemeClr>
-          </a:solidFill>
-        </p:spPr>
-        <p:style>
-          <a:lnRef idx="2">
-            <a:schemeClr val="dk1"/>
-          </a:lnRef>
-          <a:fillRef idx="1">
-            <a:schemeClr val="lt1"/>
-          </a:fillRef>
-          <a:effectRef idx="0">
-            <a:schemeClr val="dk1"/>
-          </a:effectRef>
-          <a:fontRef idx="minor">
-            <a:schemeClr val="dk1"/>
-          </a:fontRef>
-        </p:style>
-        <p:txBody>
-          <a:bodyPr rtlCol="0" anchor="ctr"/>
-          <a:lstStyle/>
-          <a:p>
-            <a:pPr algn="ctr"/>
-            <a:r>
-              <a:rPr lang="it-IT" sz="1600" dirty="0" err="1">
-                <a:latin typeface="Palatino Linotype" panose="02040502050505030304" pitchFamily="18" charset="0"/>
-              </a:rPr>
-              <a:t>Representation</a:t>
-            </a:r>
-            <a:endParaRPr lang="it-IT" sz="1600" dirty="0">
-              <a:latin typeface="Palatino Linotype" panose="02040502050505030304" pitchFamily="18" charset="0"/>
-            </a:endParaRPr>
-          </a:p>
-          <a:p>
-            <a:pPr algn="ctr"/>
-            <a:r>
-              <a:rPr lang="it-IT" sz="1600" dirty="0">
-                <a:latin typeface="Palatino Linotype" panose="02040502050505030304" pitchFamily="18" charset="0"/>
-              </a:rPr>
-              <a:t>(optional)</a:t>
-            </a:r>
-            <a:endParaRPr lang="en-GB" sz="1600" dirty="0">
-              <a:latin typeface="Palatino Linotype" panose="02040502050505030304" pitchFamily="18" charset="0"/>
-            </a:endParaRPr>
-          </a:p>
-        </p:txBody>
-      </p:sp>
-      <p:sp>
-        <p:nvSpPr>
-          <p:cNvPr id="19" name="Rettangolo arrotondato 18"/>
-          <p:cNvSpPr/>
-          <p:nvPr/>
-        </p:nvSpPr>
-        <p:spPr>
-          <a:xfrm>
-            <a:off x="5913521" y="5691187"/>
-            <a:ext cx="1852863" cy="843207"/>
-          </a:xfrm>
-          <a:prstGeom prst="roundRect">
-            <a:avLst/>
-          </a:prstGeom>
-          <a:solidFill>
-            <a:schemeClr val="accent6">
-              <a:lumMod val="20000"/>
-              <a:lumOff val="80000"/>
-            </a:schemeClr>
-          </a:solidFill>
-        </p:spPr>
-        <p:style>
-          <a:lnRef idx="2">
-            <a:schemeClr val="dk1"/>
-          </a:lnRef>
-          <a:fillRef idx="1">
-            <a:schemeClr val="lt1"/>
-          </a:fillRef>
-          <a:effectRef idx="0">
-            <a:schemeClr val="dk1"/>
-          </a:effectRef>
-          <a:fontRef idx="minor">
-            <a:schemeClr val="dk1"/>
-          </a:fontRef>
-        </p:style>
-        <p:txBody>
-          <a:bodyPr rtlCol="0" anchor="ctr"/>
-          <a:lstStyle/>
-          <a:p>
-            <a:pPr algn="ctr"/>
-            <a:r>
-              <a:rPr lang="it-IT" sz="1600" dirty="0">
-                <a:latin typeface="Palatino Linotype" panose="02040502050505030304" pitchFamily="18" charset="0"/>
-              </a:rPr>
-              <a:t>Resource </a:t>
-            </a:r>
-            <a:r>
-              <a:rPr lang="it-IT" sz="1600" dirty="0" err="1">
-                <a:latin typeface="Palatino Linotype" panose="02040502050505030304" pitchFamily="18" charset="0"/>
-              </a:rPr>
-              <a:t>metadata</a:t>
-            </a:r>
-            <a:r>
-              <a:rPr lang="it-IT" sz="1600" dirty="0">
-                <a:latin typeface="Palatino Linotype" panose="02040502050505030304" pitchFamily="18" charset="0"/>
-              </a:rPr>
-              <a:t> (optional)</a:t>
-            </a:r>
-            <a:endParaRPr lang="en-GB" sz="1600" dirty="0">
-              <a:latin typeface="Palatino Linotype" panose="02040502050505030304" pitchFamily="18" charset="0"/>
-            </a:endParaRPr>
-          </a:p>
-        </p:txBody>
-      </p:sp>
-      <p:sp>
-        <p:nvSpPr>
-          <p:cNvPr id="20" name="Rettangolo arrotondato 19"/>
-          <p:cNvSpPr/>
-          <p:nvPr/>
-        </p:nvSpPr>
-        <p:spPr>
-          <a:xfrm>
-            <a:off x="5093366" y="5072180"/>
-            <a:ext cx="1574133" cy="558599"/>
-          </a:xfrm>
-          <a:prstGeom prst="roundRect">
-            <a:avLst/>
-          </a:prstGeom>
-          <a:solidFill>
-            <a:schemeClr val="accent6">
-              <a:lumMod val="20000"/>
-              <a:lumOff val="80000"/>
-            </a:schemeClr>
-          </a:solidFill>
-        </p:spPr>
-        <p:style>
-          <a:lnRef idx="2">
-            <a:schemeClr val="dk1"/>
-          </a:lnRef>
-          <a:fillRef idx="1">
-            <a:schemeClr val="lt1"/>
-          </a:fillRef>
-          <a:effectRef idx="0">
-            <a:schemeClr val="dk1"/>
-          </a:effectRef>
-          <a:fontRef idx="minor">
-            <a:schemeClr val="dk1"/>
-          </a:fontRef>
-        </p:style>
-        <p:txBody>
-          <a:bodyPr rtlCol="0" anchor="ctr"/>
-          <a:lstStyle/>
-          <a:p>
-            <a:pPr algn="ctr"/>
-            <a:r>
-              <a:rPr lang="it-IT" sz="1600" dirty="0">
-                <a:latin typeface="Palatino Linotype" panose="02040502050505030304" pitchFamily="18" charset="0"/>
-              </a:rPr>
-              <a:t>Control data</a:t>
-            </a:r>
-          </a:p>
-          <a:p>
-            <a:pPr algn="ctr"/>
-            <a:r>
-              <a:rPr lang="it-IT" sz="1600" dirty="0">
-                <a:latin typeface="Palatino Linotype" panose="02040502050505030304" pitchFamily="18" charset="0"/>
-              </a:rPr>
-              <a:t>(</a:t>
-            </a:r>
-            <a:r>
-              <a:rPr lang="it-IT" sz="1600" dirty="0" err="1">
-                <a:latin typeface="Palatino Linotype" panose="02040502050505030304" pitchFamily="18" charset="0"/>
-              </a:rPr>
-              <a:t>mandatory</a:t>
-            </a:r>
-            <a:r>
-              <a:rPr lang="it-IT" sz="1600" dirty="0">
-                <a:latin typeface="Palatino Linotype" panose="02040502050505030304" pitchFamily="18" charset="0"/>
-              </a:rPr>
-              <a:t>)</a:t>
-            </a:r>
-            <a:endParaRPr lang="en-GB" sz="1600" dirty="0">
-              <a:latin typeface="Palatino Linotype" panose="02040502050505030304" pitchFamily="18" charset="0"/>
-            </a:endParaRPr>
-          </a:p>
-        </p:txBody>
-      </p:sp>
-      <p:sp>
-        <p:nvSpPr>
-          <p:cNvPr id="21" name="Rettangolo arrotondato 20"/>
-          <p:cNvSpPr/>
-          <p:nvPr/>
-        </p:nvSpPr>
-        <p:spPr>
-          <a:xfrm>
-            <a:off x="3821246" y="1313892"/>
-            <a:ext cx="4138863" cy="2076473"/>
-          </a:xfrm>
-          <a:prstGeom prst="roundRect">
-            <a:avLst/>
-          </a:prstGeom>
-          <a:solidFill>
-            <a:schemeClr val="bg1"/>
-          </a:solidFill>
-          <a:ln w="19050">
-            <a:solidFill>
-              <a:schemeClr val="tx1"/>
-            </a:solidFill>
-          </a:ln>
-        </p:spPr>
-        <p:style>
-          <a:lnRef idx="2">
-            <a:schemeClr val="accent1">
-              <a:shade val="50000"/>
-            </a:schemeClr>
-          </a:lnRef>
-          <a:fillRef idx="1">
-            <a:schemeClr val="accent1"/>
-          </a:fillRef>
-          <a:effectRef idx="0">
-            <a:schemeClr val="accent1"/>
-          </a:effectRef>
-          <a:fontRef idx="minor">
-            <a:schemeClr val="lt1"/>
-          </a:fontRef>
-        </p:style>
-        <p:txBody>
-          <a:bodyPr rtlCol="0" anchor="t"/>
-          <a:lstStyle/>
-          <a:p>
-            <a:pPr algn="ctr"/>
-            <a:r>
-              <a:rPr lang="it-IT" b="1" dirty="0">
-                <a:solidFill>
-                  <a:schemeClr val="tx1"/>
-                </a:solidFill>
-                <a:latin typeface="Palatino Linotype" panose="02040502050505030304" pitchFamily="18" charset="0"/>
-              </a:rPr>
-              <a:t>REST </a:t>
-            </a:r>
-            <a:r>
-              <a:rPr lang="it-IT" b="1" dirty="0" err="1">
-                <a:solidFill>
-                  <a:schemeClr val="tx1"/>
-                </a:solidFill>
-                <a:latin typeface="Palatino Linotype" panose="02040502050505030304" pitchFamily="18" charset="0"/>
-              </a:rPr>
-              <a:t>request</a:t>
-            </a:r>
-            <a:r>
-              <a:rPr lang="it-IT" b="1" dirty="0">
-                <a:solidFill>
-                  <a:schemeClr val="tx1"/>
-                </a:solidFill>
-                <a:latin typeface="Palatino Linotype" panose="02040502050505030304" pitchFamily="18" charset="0"/>
-              </a:rPr>
-              <a:t> </a:t>
-            </a:r>
-            <a:r>
-              <a:rPr lang="it-IT" b="1" dirty="0" err="1">
-                <a:solidFill>
-                  <a:schemeClr val="tx1"/>
-                </a:solidFill>
-                <a:latin typeface="Palatino Linotype" panose="02040502050505030304" pitchFamily="18" charset="0"/>
-              </a:rPr>
-              <a:t>message</a:t>
-            </a:r>
-            <a:endParaRPr lang="en-GB" b="1" dirty="0">
-              <a:solidFill>
-                <a:schemeClr val="tx1"/>
-              </a:solidFill>
-              <a:latin typeface="Palatino Linotype" panose="02040502050505030304" pitchFamily="18" charset="0"/>
-            </a:endParaRPr>
-          </a:p>
-        </p:txBody>
-      </p:sp>
-      <p:sp>
-        <p:nvSpPr>
-          <p:cNvPr id="22" name="Rettangolo arrotondato 21"/>
-          <p:cNvSpPr/>
-          <p:nvPr/>
-        </p:nvSpPr>
-        <p:spPr>
-          <a:xfrm>
-            <a:off x="5029200" y="2720001"/>
-            <a:ext cx="1852863" cy="623972"/>
-          </a:xfrm>
-          <a:prstGeom prst="roundRect">
-            <a:avLst/>
-          </a:prstGeom>
-          <a:solidFill>
-            <a:schemeClr val="accent6">
-              <a:lumMod val="20000"/>
-              <a:lumOff val="80000"/>
-            </a:schemeClr>
-          </a:solidFill>
-        </p:spPr>
-        <p:style>
-          <a:lnRef idx="2">
-            <a:schemeClr val="dk1"/>
-          </a:lnRef>
-          <a:fillRef idx="1">
-            <a:schemeClr val="lt1"/>
-          </a:fillRef>
-          <a:effectRef idx="0">
-            <a:schemeClr val="dk1"/>
-          </a:effectRef>
-          <a:fontRef idx="minor">
-            <a:schemeClr val="dk1"/>
-          </a:fontRef>
-        </p:style>
-        <p:txBody>
-          <a:bodyPr rtlCol="0" anchor="ctr"/>
-          <a:lstStyle/>
-          <a:p>
-            <a:pPr algn="ctr"/>
-            <a:r>
-              <a:rPr lang="it-IT" sz="1600" dirty="0" err="1">
-                <a:latin typeface="Palatino Linotype" panose="02040502050505030304" pitchFamily="18" charset="0"/>
-              </a:rPr>
-              <a:t>Representation</a:t>
-            </a:r>
-            <a:endParaRPr lang="it-IT" sz="1600" dirty="0">
-              <a:latin typeface="Palatino Linotype" panose="02040502050505030304" pitchFamily="18" charset="0"/>
-            </a:endParaRPr>
-          </a:p>
-          <a:p>
-            <a:pPr algn="ctr"/>
-            <a:r>
-              <a:rPr lang="it-IT" sz="1600" dirty="0">
-                <a:latin typeface="Palatino Linotype" panose="02040502050505030304" pitchFamily="18" charset="0"/>
-              </a:rPr>
-              <a:t>(optional)</a:t>
-            </a:r>
-            <a:endParaRPr lang="en-GB" sz="1600" dirty="0">
-              <a:latin typeface="Palatino Linotype" panose="02040502050505030304" pitchFamily="18" charset="0"/>
-            </a:endParaRPr>
-          </a:p>
-        </p:txBody>
-      </p:sp>
-      <p:sp>
-        <p:nvSpPr>
-          <p:cNvPr id="23" name="Rettangolo arrotondato 22"/>
-          <p:cNvSpPr/>
-          <p:nvPr/>
-        </p:nvSpPr>
-        <p:spPr>
-          <a:xfrm>
-            <a:off x="5835031" y="1806657"/>
-            <a:ext cx="2062847" cy="843206"/>
-          </a:xfrm>
-          <a:prstGeom prst="roundRect">
-            <a:avLst/>
-          </a:prstGeom>
-          <a:solidFill>
-            <a:schemeClr val="accent6">
-              <a:lumMod val="20000"/>
-              <a:lumOff val="80000"/>
-            </a:schemeClr>
-          </a:solidFill>
-        </p:spPr>
-        <p:style>
-          <a:lnRef idx="2">
-            <a:schemeClr val="dk1"/>
-          </a:lnRef>
-          <a:fillRef idx="1">
-            <a:schemeClr val="lt1"/>
-          </a:fillRef>
-          <a:effectRef idx="0">
-            <a:schemeClr val="dk1"/>
-          </a:effectRef>
-          <a:fontRef idx="minor">
-            <a:schemeClr val="dk1"/>
-          </a:fontRef>
-        </p:style>
-        <p:txBody>
-          <a:bodyPr rtlCol="0" anchor="ctr"/>
-          <a:lstStyle/>
-          <a:p>
-            <a:pPr algn="ctr"/>
-            <a:r>
-              <a:rPr lang="it-IT" sz="1600" dirty="0">
-                <a:latin typeface="Palatino Linotype" panose="02040502050505030304" pitchFamily="18" charset="0"/>
-              </a:rPr>
-              <a:t>Resource </a:t>
-            </a:r>
-            <a:r>
-              <a:rPr lang="it-IT" sz="1600" dirty="0" err="1">
-                <a:latin typeface="Palatino Linotype" panose="02040502050505030304" pitchFamily="18" charset="0"/>
-              </a:rPr>
-              <a:t>identifier</a:t>
-            </a:r>
-            <a:endParaRPr lang="it-IT" sz="1600" dirty="0">
-              <a:latin typeface="Palatino Linotype" panose="02040502050505030304" pitchFamily="18" charset="0"/>
-            </a:endParaRPr>
-          </a:p>
-          <a:p>
-            <a:pPr algn="ctr"/>
-            <a:r>
-              <a:rPr lang="it-IT" sz="1600" dirty="0">
-                <a:latin typeface="Palatino Linotype" panose="02040502050505030304" pitchFamily="18" charset="0"/>
-              </a:rPr>
-              <a:t>(</a:t>
-            </a:r>
-            <a:r>
-              <a:rPr lang="it-IT" sz="1600" dirty="0" err="1">
-                <a:latin typeface="Palatino Linotype" panose="02040502050505030304" pitchFamily="18" charset="0"/>
-              </a:rPr>
-              <a:t>mandatory</a:t>
-            </a:r>
-            <a:r>
-              <a:rPr lang="it-IT" sz="1600" dirty="0">
-                <a:latin typeface="Palatino Linotype" panose="02040502050505030304" pitchFamily="18" charset="0"/>
-              </a:rPr>
-              <a:t>)</a:t>
-            </a:r>
-            <a:endParaRPr lang="en-GB" sz="1600" dirty="0">
-              <a:latin typeface="Palatino Linotype" panose="02040502050505030304" pitchFamily="18" charset="0"/>
-            </a:endParaRPr>
-          </a:p>
-        </p:txBody>
-      </p:sp>
-      <p:sp>
-        <p:nvSpPr>
-          <p:cNvPr id="24" name="Rettangolo arrotondato 23"/>
-          <p:cNvSpPr/>
-          <p:nvPr/>
-        </p:nvSpPr>
-        <p:spPr>
-          <a:xfrm>
-            <a:off x="3978875" y="1828719"/>
-            <a:ext cx="1574133" cy="821144"/>
-          </a:xfrm>
-          <a:prstGeom prst="roundRect">
-            <a:avLst/>
-          </a:prstGeom>
-          <a:solidFill>
-            <a:schemeClr val="accent6">
-              <a:lumMod val="20000"/>
-              <a:lumOff val="80000"/>
-            </a:schemeClr>
-          </a:solidFill>
-        </p:spPr>
-        <p:style>
-          <a:lnRef idx="2">
-            <a:schemeClr val="dk1"/>
-          </a:lnRef>
-          <a:fillRef idx="1">
-            <a:schemeClr val="lt1"/>
-          </a:fillRef>
-          <a:effectRef idx="0">
-            <a:schemeClr val="dk1"/>
-          </a:effectRef>
-          <a:fontRef idx="minor">
-            <a:schemeClr val="dk1"/>
-          </a:fontRef>
-        </p:style>
-        <p:txBody>
-          <a:bodyPr rtlCol="0" anchor="ctr"/>
-          <a:lstStyle/>
-          <a:p>
-            <a:pPr algn="ctr"/>
-            <a:r>
-              <a:rPr lang="it-IT" sz="1600" dirty="0">
-                <a:latin typeface="Palatino Linotype" panose="02040502050505030304" pitchFamily="18" charset="0"/>
-              </a:rPr>
-              <a:t>Control data</a:t>
-            </a:r>
-          </a:p>
-          <a:p>
-            <a:pPr algn="ctr"/>
-            <a:r>
-              <a:rPr lang="it-IT" sz="1600" dirty="0">
-                <a:latin typeface="Palatino Linotype" panose="02040502050505030304" pitchFamily="18" charset="0"/>
-              </a:rPr>
-              <a:t>(</a:t>
-            </a:r>
-            <a:r>
-              <a:rPr lang="it-IT" sz="1600" dirty="0" err="1">
-                <a:latin typeface="Palatino Linotype" panose="02040502050505030304" pitchFamily="18" charset="0"/>
-              </a:rPr>
-              <a:t>mandatory</a:t>
-            </a:r>
-            <a:r>
-              <a:rPr lang="it-IT" sz="1600" dirty="0">
-                <a:latin typeface="Palatino Linotype" panose="02040502050505030304" pitchFamily="18" charset="0"/>
-              </a:rPr>
-              <a:t>)</a:t>
-            </a:r>
-            <a:endParaRPr lang="en-GB" sz="1600" dirty="0">
-              <a:latin typeface="Palatino Linotype" panose="02040502050505030304" pitchFamily="18" charset="0"/>
-            </a:endParaRPr>
-          </a:p>
-        </p:txBody>
-      </p:sp>
-      <p:sp>
-        <p:nvSpPr>
-          <p:cNvPr id="3" name="Segnaposto numero diapositiva 2"/>
-          <p:cNvSpPr>
-            <a:spLocks noGrp="1"/>
-          </p:cNvSpPr>
-          <p:nvPr>
-            <p:ph type="sldNum" sz="quarter" idx="12"/>
-          </p:nvPr>
-        </p:nvSpPr>
-        <p:spPr/>
-        <p:txBody>
-          <a:bodyPr/>
-          <a:lstStyle/>
-          <a:p>
-            <a:fld id="{31DE2C5B-556E-47B8-A792-024C2FCA4ACC}" type="slidenum">
-              <a:rPr lang="en-GB" smtClean="0"/>
-              <a:t>22</a:t>
-            </a:fld>
-            <a:endParaRPr lang="en-GB"/>
-          </a:p>
-        </p:txBody>
-      </p:sp>
-    </p:spTree>
-    <p:extLst>
-      <p:ext uri="{BB962C8B-B14F-4D97-AF65-F5344CB8AC3E}">
-        <p14:creationId xmlns:p14="http://schemas.microsoft.com/office/powerpoint/2010/main" val="1812340316"/>
-      </p:ext>
-    </p:extLst>
-  </p:cSld>
-  <p:clrMapOvr>
-    <a:masterClrMapping/>
-  </p:clrMapOvr>
-</p:sld>
-</file>
-
-<file path=ppt/slides/slide23.xml><?xml version="1.0" encoding="utf-8"?>
-<p:sld xmlns:a="http://schemas.openxmlformats.org/drawingml/2006/main" xmlns:r="http://schemas.openxmlformats.org/officeDocument/2006/relationships" xmlns:p="http://schemas.openxmlformats.org/presentationml/2006/main">
-  <p:cSld>
-    <p:spTree>
-      <p:nvGrpSpPr>
-        <p:cNvPr id="1" name=""/>
-        <p:cNvGrpSpPr/>
-        <p:nvPr/>
-      </p:nvGrpSpPr>
-      <p:grpSpPr>
-        <a:xfrm>
-          <a:off x="0" y="0"/>
-          <a:ext cx="0" cy="0"/>
-          <a:chOff x="0" y="0"/>
-          <a:chExt cx="0" cy="0"/>
-        </a:xfrm>
-      </p:grpSpPr>
-      <p:sp>
-        <p:nvSpPr>
-          <p:cNvPr id="2" name="Titolo 1"/>
-          <p:cNvSpPr>
-            <a:spLocks noGrp="1"/>
-          </p:cNvSpPr>
-          <p:nvPr>
-            <p:ph type="title"/>
-          </p:nvPr>
-        </p:nvSpPr>
-        <p:spPr/>
-        <p:txBody>
-          <a:bodyPr/>
-          <a:lstStyle/>
-          <a:p>
-            <a:r>
-              <a:rPr lang="it-IT" dirty="0"/>
-              <a:t>Resource </a:t>
-            </a:r>
-            <a:r>
-              <a:rPr lang="it-IT" dirty="0" err="1"/>
-              <a:t>representations</a:t>
-            </a:r>
-            <a:r>
-              <a:rPr lang="it-IT" dirty="0"/>
-              <a:t> and REST </a:t>
-            </a:r>
-            <a:r>
-              <a:rPr lang="it-IT" dirty="0" err="1"/>
-              <a:t>messages</a:t>
-            </a:r>
-            <a:endParaRPr lang="en-GB" dirty="0"/>
-          </a:p>
-        </p:txBody>
-      </p:sp>
-      <p:sp>
-        <p:nvSpPr>
-          <p:cNvPr id="3" name="Segnaposto contenuto 2"/>
-          <p:cNvSpPr>
-            <a:spLocks noGrp="1"/>
-          </p:cNvSpPr>
-          <p:nvPr>
-            <p:ph idx="1"/>
-          </p:nvPr>
-        </p:nvSpPr>
-        <p:spPr>
-          <a:xfrm>
-            <a:off x="428172" y="1361167"/>
-            <a:ext cx="11368314" cy="4564145"/>
-          </a:xfrm>
-        </p:spPr>
-        <p:txBody>
-          <a:bodyPr>
-            <a:normAutofit/>
-          </a:bodyPr>
-          <a:lstStyle/>
-          <a:p>
-            <a:r>
-              <a:rPr lang="en-US" dirty="0"/>
-              <a:t>A resource </a:t>
-            </a:r>
-            <a:r>
-              <a:rPr lang="en-US" b="1" dirty="0"/>
-              <a:t>representation</a:t>
-            </a:r>
-            <a:r>
-              <a:rPr lang="en-US" dirty="0"/>
-              <a:t> includes: </a:t>
-            </a:r>
-          </a:p>
-          <a:p>
-            <a:pPr lvl="1"/>
-            <a:r>
-              <a:rPr lang="en-US" sz="2200" b="1" dirty="0"/>
-              <a:t>Data</a:t>
-            </a:r>
-            <a:r>
-              <a:rPr lang="en-US" sz="2200" dirty="0"/>
-              <a:t> (the actual representation)</a:t>
-            </a:r>
-          </a:p>
-          <a:p>
-            <a:pPr lvl="1"/>
-            <a:r>
-              <a:rPr lang="en-US" sz="2200" b="1" dirty="0"/>
-              <a:t>Metadata</a:t>
-            </a:r>
-            <a:r>
-              <a:rPr lang="en-US" sz="2200" dirty="0"/>
-              <a:t> (description of the representation)</a:t>
-            </a:r>
-            <a:r>
-              <a:rPr lang="en-US" sz="2200" dirty="0">
-                <a:sym typeface="Wingdings" panose="05000000000000000000" pitchFamily="2" charset="2"/>
-              </a:rPr>
-              <a:t>  </a:t>
-            </a:r>
-            <a:r>
-              <a:rPr lang="en-GB" sz="2200" dirty="0"/>
-              <a:t>typically, not displayed to the end user (e.g., data type, creation date, version number, …) </a:t>
-            </a:r>
-          </a:p>
-          <a:p>
-            <a:r>
-              <a:rPr lang="en-US" dirty="0">
-                <a:sym typeface="Wingdings" panose="05000000000000000000" pitchFamily="2" charset="2"/>
-              </a:rPr>
-              <a:t>The resource representation is provided to the client within a </a:t>
-            </a:r>
-            <a:r>
-              <a:rPr lang="en-US" b="1" dirty="0">
-                <a:sym typeface="Wingdings" panose="05000000000000000000" pitchFamily="2" charset="2"/>
-              </a:rPr>
-              <a:t>response message </a:t>
-            </a:r>
-            <a:r>
-              <a:rPr lang="en-US" dirty="0">
-                <a:sym typeface="Wingdings" panose="05000000000000000000" pitchFamily="2" charset="2"/>
-              </a:rPr>
-              <a:t>that contains some additional contents:</a:t>
-            </a:r>
-          </a:p>
-          <a:p>
-            <a:pPr lvl="1"/>
-            <a:r>
-              <a:rPr lang="en-US" sz="2200" b="1" dirty="0">
-                <a:sym typeface="Wingdings" panose="05000000000000000000" pitchFamily="2" charset="2"/>
-              </a:rPr>
-              <a:t>Resource metadata (optional)</a:t>
-            </a:r>
-            <a:r>
-              <a:rPr lang="en-US" sz="2200" dirty="0">
-                <a:sym typeface="Wingdings" panose="05000000000000000000" pitchFamily="2" charset="2"/>
-              </a:rPr>
-              <a:t>: </a:t>
-            </a:r>
-            <a:r>
-              <a:rPr lang="en-GB" sz="2200" dirty="0">
-                <a:sym typeface="Wingdings" panose="05000000000000000000" pitchFamily="2" charset="2"/>
-              </a:rPr>
-              <a:t>additional information about the resource that exists on the server (e.g., alternate text to be displayed in the event an image representation cannot be displayed for some reason). </a:t>
-            </a:r>
-            <a:endParaRPr lang="en-US" sz="2200" dirty="0">
-              <a:sym typeface="Wingdings" panose="05000000000000000000" pitchFamily="2" charset="2"/>
-            </a:endParaRPr>
-          </a:p>
-          <a:p>
-            <a:pPr lvl="1"/>
-            <a:r>
-              <a:rPr lang="en-US" sz="2200" b="1" dirty="0">
-                <a:sym typeface="Wingdings" panose="05000000000000000000" pitchFamily="2" charset="2"/>
-              </a:rPr>
-              <a:t>Control data (mandatory)</a:t>
-            </a:r>
-            <a:r>
-              <a:rPr lang="en-US" sz="2200" dirty="0">
-                <a:sym typeface="Wingdings" panose="05000000000000000000" pitchFamily="2" charset="2"/>
-              </a:rPr>
-              <a:t>: it deals with the v</a:t>
-            </a:r>
-            <a:r>
-              <a:rPr lang="en-GB" sz="2200" dirty="0" err="1"/>
-              <a:t>alidity</a:t>
-            </a:r>
-            <a:r>
-              <a:rPr lang="en-GB" sz="2200" dirty="0"/>
-              <a:t> of the resource and its representation on the client (e.g., if data is cacheable, the expiry time, a checksum for checking integrity, …).</a:t>
-            </a:r>
-          </a:p>
-          <a:p>
-            <a:pPr lvl="1"/>
-            <a:endParaRPr lang="it-IT" dirty="0"/>
-          </a:p>
-          <a:p>
-            <a:pPr lvl="1"/>
-            <a:endParaRPr lang="en-GB" dirty="0"/>
-          </a:p>
-        </p:txBody>
-      </p:sp>
-      <p:sp>
-        <p:nvSpPr>
-          <p:cNvPr id="4" name="Segnaposto numero diapositiva 3"/>
-          <p:cNvSpPr>
-            <a:spLocks noGrp="1"/>
-          </p:cNvSpPr>
-          <p:nvPr>
-            <p:ph type="sldNum" sz="quarter" idx="12"/>
-          </p:nvPr>
-        </p:nvSpPr>
-        <p:spPr/>
-        <p:txBody>
-          <a:bodyPr/>
-          <a:lstStyle/>
-          <a:p>
-            <a:fld id="{31DE2C5B-556E-47B8-A792-024C2FCA4ACC}" type="slidenum">
-              <a:rPr lang="en-GB" smtClean="0"/>
-              <a:t>23</a:t>
-            </a:fld>
-            <a:endParaRPr lang="en-GB"/>
-          </a:p>
-        </p:txBody>
-      </p:sp>
-    </p:spTree>
-    <p:extLst>
-      <p:ext uri="{BB962C8B-B14F-4D97-AF65-F5344CB8AC3E}">
-        <p14:creationId xmlns:p14="http://schemas.microsoft.com/office/powerpoint/2010/main" val="203690566"/>
-      </p:ext>
-    </p:extLst>
-  </p:cSld>
-  <p:clrMapOvr>
-    <a:masterClrMapping/>
-  </p:clrMapOvr>
-</p:sld>
-</file>
-
-<file path=ppt/slides/slide24.xml><?xml version="1.0" encoding="utf-8"?>
-<p:sld xmlns:a="http://schemas.openxmlformats.org/drawingml/2006/main" xmlns:r="http://schemas.openxmlformats.org/officeDocument/2006/relationships" xmlns:p="http://schemas.openxmlformats.org/presentationml/2006/main">
-  <p:cSld>
-    <p:spTree>
-      <p:nvGrpSpPr>
-        <p:cNvPr id="1" name=""/>
-        <p:cNvGrpSpPr/>
-        <p:nvPr/>
-      </p:nvGrpSpPr>
-      <p:grpSpPr>
-        <a:xfrm>
-          <a:off x="0" y="0"/>
-          <a:ext cx="0" cy="0"/>
-          <a:chOff x="0" y="0"/>
-          <a:chExt cx="0" cy="0"/>
-        </a:xfrm>
-      </p:grpSpPr>
-      <p:sp>
-        <p:nvSpPr>
-          <p:cNvPr id="5" name="Rettangolo arrotondato 4"/>
-          <p:cNvSpPr/>
-          <p:nvPr/>
-        </p:nvSpPr>
-        <p:spPr>
-          <a:xfrm>
-            <a:off x="320040" y="1325880"/>
-            <a:ext cx="4419600" cy="3970020"/>
-          </a:xfrm>
-          <a:prstGeom prst="roundRect">
-            <a:avLst>
-              <a:gd name="adj" fmla="val 9733"/>
-            </a:avLst>
-          </a:prstGeom>
-          <a:noFill/>
-          <a:ln>
-            <a:solidFill>
-              <a:srgbClr val="00B050"/>
-            </a:solidFill>
-          </a:ln>
-        </p:spPr>
-        <p:style>
-          <a:lnRef idx="2">
-            <a:schemeClr val="accent1">
-              <a:shade val="50000"/>
-            </a:schemeClr>
-          </a:lnRef>
-          <a:fillRef idx="1">
-            <a:schemeClr val="accent1"/>
-          </a:fillRef>
-          <a:effectRef idx="0">
-            <a:schemeClr val="accent1"/>
-          </a:effectRef>
-          <a:fontRef idx="minor">
-            <a:schemeClr val="lt1"/>
-          </a:fontRef>
-        </p:style>
-        <p:txBody>
-          <a:bodyPr rtlCol="0" anchor="ctr"/>
-          <a:lstStyle/>
-          <a:p>
-            <a:pPr algn="ctr"/>
-            <a:endParaRPr lang="en-GB"/>
           </a:p>
         </p:txBody>
       </p:sp>
@@ -9693,83 +8892,113 @@
           </a:lstStyle>
           <a:p>
             <a:r>
-              <a:rPr lang="en-US" dirty="0"/>
+              <a:rPr lang="en-US" dirty="0">
+                <a:latin typeface="Aptos" panose="020B0004020202020204" pitchFamily="34" charset="0"/>
+              </a:rPr>
               <a:t>An architectural style for </a:t>
             </a:r>
             <a:r>
-              <a:rPr lang="en-US" b="1" dirty="0"/>
+              <a:rPr lang="en-US" b="1" dirty="0">
+                <a:latin typeface="Aptos" panose="020B0004020202020204" pitchFamily="34" charset="0"/>
+              </a:rPr>
               <a:t>distributed hypermedia </a:t>
             </a:r>
             <a:r>
-              <a:rPr lang="en-US" dirty="0"/>
+              <a:rPr lang="en-US" dirty="0">
+                <a:latin typeface="Aptos" panose="020B0004020202020204" pitchFamily="34" charset="0"/>
+              </a:rPr>
               <a:t>systems</a:t>
             </a:r>
           </a:p>
           <a:p>
             <a:r>
-              <a:rPr lang="en-US" dirty="0"/>
+              <a:rPr lang="en-US" dirty="0">
+                <a:latin typeface="Aptos" panose="020B0004020202020204" pitchFamily="34" charset="0"/>
+              </a:rPr>
               <a:t>6 constraints</a:t>
             </a:r>
           </a:p>
           <a:p>
             <a:pPr lvl="1"/>
             <a:r>
-              <a:rPr lang="en-US" b="1" dirty="0"/>
+              <a:rPr lang="en-US" b="1" dirty="0">
+                <a:latin typeface="Aptos" panose="020B0004020202020204" pitchFamily="34" charset="0"/>
+              </a:rPr>
               <a:t>Client-server</a:t>
             </a:r>
             <a:r>
-              <a:rPr lang="en-US" dirty="0"/>
+              <a:rPr lang="en-US" dirty="0">
+                <a:latin typeface="Aptos" panose="020B0004020202020204" pitchFamily="34" charset="0"/>
+              </a:rPr>
               <a:t> architecture</a:t>
             </a:r>
           </a:p>
           <a:p>
             <a:pPr lvl="1"/>
             <a:r>
-              <a:rPr lang="en-US" b="1" dirty="0"/>
+              <a:rPr lang="en-US" b="1" dirty="0">
+                <a:latin typeface="Aptos" panose="020B0004020202020204" pitchFamily="34" charset="0"/>
+              </a:rPr>
               <a:t>Stateless</a:t>
             </a:r>
             <a:r>
-              <a:rPr lang="en-US" dirty="0"/>
+              <a:rPr lang="en-US" dirty="0">
+                <a:latin typeface="Aptos" panose="020B0004020202020204" pitchFamily="34" charset="0"/>
+              </a:rPr>
               <a:t> communication</a:t>
             </a:r>
           </a:p>
           <a:p>
             <a:pPr lvl="1"/>
             <a:r>
-              <a:rPr lang="en-US" b="1" dirty="0"/>
+              <a:rPr lang="en-US" b="1" dirty="0">
+                <a:latin typeface="Aptos" panose="020B0004020202020204" pitchFamily="34" charset="0"/>
+              </a:rPr>
               <a:t>Cache</a:t>
             </a:r>
             <a:r>
-              <a:rPr lang="en-US" dirty="0"/>
+              <a:rPr lang="en-US" dirty="0">
+                <a:latin typeface="Aptos" panose="020B0004020202020204" pitchFamily="34" charset="0"/>
+              </a:rPr>
               <a:t> constraint</a:t>
             </a:r>
           </a:p>
           <a:p>
             <a:pPr lvl="1"/>
             <a:r>
-              <a:rPr lang="en-US" b="1" dirty="0"/>
+              <a:rPr lang="en-US" b="1" dirty="0">
+                <a:latin typeface="Aptos" panose="020B0004020202020204" pitchFamily="34" charset="0"/>
+              </a:rPr>
               <a:t>Uniform interface</a:t>
             </a:r>
           </a:p>
           <a:p>
             <a:pPr lvl="1"/>
             <a:r>
-              <a:rPr lang="en-US" b="1" dirty="0"/>
+              <a:rPr lang="en-US" b="1" dirty="0">
+                <a:latin typeface="Aptos" panose="020B0004020202020204" pitchFamily="34" charset="0"/>
+              </a:rPr>
               <a:t>Layered</a:t>
             </a:r>
             <a:r>
-              <a:rPr lang="en-US" dirty="0"/>
+              <a:rPr lang="en-US" dirty="0">
+                <a:latin typeface="Aptos" panose="020B0004020202020204" pitchFamily="34" charset="0"/>
+              </a:rPr>
               <a:t> system</a:t>
             </a:r>
           </a:p>
           <a:p>
             <a:pPr lvl="1"/>
             <a:r>
-              <a:rPr lang="en-US" b="1" dirty="0"/>
+              <a:rPr lang="en-US" b="1" dirty="0">
+                <a:latin typeface="Aptos" panose="020B0004020202020204" pitchFamily="34" charset="0"/>
+              </a:rPr>
               <a:t>Code-on-demand</a:t>
             </a:r>
             <a:r>
-              <a:rPr lang="en-US" dirty="0"/>
+              <a:rPr lang="en-US" dirty="0">
+                <a:latin typeface="Aptos" panose="020B0004020202020204" pitchFamily="34" charset="0"/>
+              </a:rPr>
               <a:t> (optional)</a:t>
             </a:r>
           </a:p>
@@ -9819,7 +9048,9 @@
           <a:lstStyle/>
           <a:p>
             <a:pPr algn="ctr"/>
-            <a:endParaRPr lang="en-GB"/>
+            <a:endParaRPr lang="en-GB">
+              <a:latin typeface="Aptos" panose="020B0004020202020204" pitchFamily="34" charset="0"/>
+            </a:endParaRPr>
           </a:p>
         </p:txBody>
       </p:sp>
@@ -9872,7 +9103,7 @@
                 <a:solidFill>
                   <a:schemeClr val="tx1"/>
                 </a:solidFill>
-                <a:latin typeface="Palatino Linotype" panose="02040502050505030304" pitchFamily="18" charset="0"/>
+                <a:latin typeface="Aptos" panose="020B0004020202020204" pitchFamily="34" charset="0"/>
               </a:rPr>
               <a:t>The REST </a:t>
             </a:r>
@@ -9881,7 +9112,7 @@
                 <a:solidFill>
                   <a:schemeClr val="tx1"/>
                 </a:solidFill>
-                <a:latin typeface="Palatino Linotype" panose="02040502050505030304" pitchFamily="18" charset="0"/>
+                <a:latin typeface="Aptos" panose="020B0004020202020204" pitchFamily="34" charset="0"/>
               </a:rPr>
               <a:t>paradigm</a:t>
             </a:r>
@@ -9890,7 +9121,7 @@
                 <a:solidFill>
                   <a:schemeClr val="tx1"/>
                 </a:solidFill>
-                <a:latin typeface="Palatino Linotype" panose="02040502050505030304" pitchFamily="18" charset="0"/>
+                <a:latin typeface="Aptos" panose="020B0004020202020204" pitchFamily="34" charset="0"/>
               </a:rPr>
               <a:t> </a:t>
             </a:r>
@@ -9899,7 +9130,7 @@
                 <a:solidFill>
                   <a:schemeClr val="tx1"/>
                 </a:solidFill>
-                <a:latin typeface="Palatino Linotype" panose="02040502050505030304" pitchFamily="18" charset="0"/>
+                <a:latin typeface="Aptos" panose="020B0004020202020204" pitchFamily="34" charset="0"/>
               </a:rPr>
               <a:t>increases performance, scalability, simplicity, modifiability, visibility, portability, and reliability of the system.</a:t>
             </a:r>
@@ -9908,7 +9139,7 @@
                 <a:solidFill>
                   <a:schemeClr val="tx1"/>
                 </a:solidFill>
-                <a:latin typeface="Palatino Linotype" panose="02040502050505030304" pitchFamily="18" charset="0"/>
+                <a:latin typeface="Aptos" panose="020B0004020202020204" pitchFamily="34" charset="0"/>
               </a:rPr>
               <a:t> </a:t>
             </a:r>
@@ -9916,7 +9147,7 @@
               <a:solidFill>
                 <a:schemeClr val="tx1"/>
               </a:solidFill>
-              <a:latin typeface="Palatino Linotype" panose="02040502050505030304" pitchFamily="18" charset="0"/>
+              <a:latin typeface="Aptos" panose="020B0004020202020204" pitchFamily="34" charset="0"/>
             </a:endParaRPr>
           </a:p>
         </p:txBody>
@@ -9938,7 +9169,7 @@
           <a:p>
             <a:fld id="{31DE2C5B-556E-47B8-A792-024C2FCA4ACC}" type="slidenum">
               <a:rPr lang="en-GB" smtClean="0"/>
-              <a:t>24</a:t>
+              <a:t>20</a:t>
             </a:fld>
             <a:endParaRPr lang="en-GB"/>
           </a:p>
@@ -9957,7 +9188,7 @@
 </p:sld>
 </file>
 
-<file path=ppt/slides/slide25.xml><?xml version="1.0" encoding="utf-8"?>
+<file path=ppt/slides/slide21.xml><?xml version="1.0" encoding="utf-8"?>
 <p:sld xmlns:a="http://schemas.openxmlformats.org/drawingml/2006/main" xmlns:r="http://schemas.openxmlformats.org/officeDocument/2006/relationships" xmlns:p="http://schemas.openxmlformats.org/presentationml/2006/main">
   <p:cSld>
     <p:spTree>
@@ -10046,7 +9277,7 @@
           <a:p>
             <a:fld id="{31DE2C5B-556E-47B8-A792-024C2FCA4ACC}" type="slidenum">
               <a:rPr lang="en-GB" smtClean="0"/>
-              <a:t>25</a:t>
+              <a:t>21</a:t>
             </a:fld>
             <a:endParaRPr lang="en-GB"/>
           </a:p>
@@ -11505,12 +10736,12 @@
             <a:pPr algn="ctr"/>
             <a:r>
               <a:rPr lang="it-IT" sz="2000" dirty="0">
-                <a:latin typeface="Palatino Linotype" panose="02040502050505030304" pitchFamily="18" charset="0"/>
+                <a:latin typeface="Aptos" panose="020B0004020202020204" pitchFamily="34" charset="0"/>
               </a:rPr>
               <a:t>Client</a:t>
             </a:r>
             <a:endParaRPr lang="en-GB" sz="2000" dirty="0">
-              <a:latin typeface="Palatino Linotype" panose="02040502050505030304" pitchFamily="18" charset="0"/>
+              <a:latin typeface="Aptos" panose="020B0004020202020204" pitchFamily="34" charset="0"/>
             </a:endParaRPr>
           </a:p>
         </p:txBody>
@@ -11575,12 +10806,12 @@
           <a:p>
             <a:r>
               <a:rPr lang="it-IT" dirty="0" err="1">
-                <a:latin typeface="Palatino Linotype" panose="02040502050505030304" pitchFamily="18" charset="0"/>
+                <a:latin typeface="Aptos" panose="020B0004020202020204" pitchFamily="34" charset="0"/>
               </a:rPr>
               <a:t>Request</a:t>
             </a:r>
             <a:endParaRPr lang="en-GB" dirty="0">
-              <a:latin typeface="Palatino Linotype" panose="02040502050505030304" pitchFamily="18" charset="0"/>
+              <a:latin typeface="Aptos" panose="020B0004020202020204" pitchFamily="34" charset="0"/>
             </a:endParaRPr>
           </a:p>
         </p:txBody>
@@ -11657,7 +10888,9 @@
           <a:lstStyle/>
           <a:p>
             <a:pPr algn="ctr"/>
-            <a:endParaRPr lang="en-GB"/>
+            <a:endParaRPr lang="en-GB">
+              <a:latin typeface="Aptos" panose="020B0004020202020204" pitchFamily="34" charset="0"/>
+            </a:endParaRPr>
           </a:p>
         </p:txBody>
       </p:sp>
@@ -11702,12 +10935,12 @@
             <a:pPr algn="ctr"/>
             <a:r>
               <a:rPr lang="it-IT" sz="2000" dirty="0">
-                <a:latin typeface="Palatino Linotype" panose="02040502050505030304" pitchFamily="18" charset="0"/>
+                <a:latin typeface="Aptos" panose="020B0004020202020204" pitchFamily="34" charset="0"/>
               </a:rPr>
               <a:t>Data server</a:t>
             </a:r>
             <a:endParaRPr lang="en-GB" sz="2000" dirty="0">
-              <a:latin typeface="Palatino Linotype" panose="02040502050505030304" pitchFamily="18" charset="0"/>
+              <a:latin typeface="Aptos" panose="020B0004020202020204" pitchFamily="34" charset="0"/>
             </a:endParaRPr>
           </a:p>
         </p:txBody>
@@ -11753,12 +10986,12 @@
             <a:pPr algn="ctr"/>
             <a:r>
               <a:rPr lang="it-IT" sz="2000" dirty="0">
-                <a:latin typeface="Palatino Linotype" panose="02040502050505030304" pitchFamily="18" charset="0"/>
+                <a:latin typeface="Aptos" panose="020B0004020202020204" pitchFamily="34" charset="0"/>
               </a:rPr>
               <a:t>Intermediate component 1</a:t>
             </a:r>
             <a:endParaRPr lang="en-GB" sz="2000" dirty="0">
-              <a:latin typeface="Palatino Linotype" panose="02040502050505030304" pitchFamily="18" charset="0"/>
+              <a:latin typeface="Aptos" panose="020B0004020202020204" pitchFamily="34" charset="0"/>
             </a:endParaRPr>
           </a:p>
         </p:txBody>
@@ -11804,12 +11037,12 @@
             <a:pPr algn="ctr"/>
             <a:r>
               <a:rPr lang="it-IT" sz="2000" dirty="0">
-                <a:latin typeface="Palatino Linotype" panose="02040502050505030304" pitchFamily="18" charset="0"/>
+                <a:latin typeface="Aptos" panose="020B0004020202020204" pitchFamily="34" charset="0"/>
               </a:rPr>
               <a:t>Intermediate component 2</a:t>
             </a:r>
             <a:endParaRPr lang="en-GB" sz="2000" dirty="0">
-              <a:latin typeface="Palatino Linotype" panose="02040502050505030304" pitchFamily="18" charset="0"/>
+              <a:latin typeface="Aptos" panose="020B0004020202020204" pitchFamily="34" charset="0"/>
             </a:endParaRPr>
           </a:p>
         </p:txBody>
@@ -11850,7 +11083,9 @@
           <a:lstStyle/>
           <a:p>
             <a:pPr algn="ctr"/>
-            <a:endParaRPr lang="en-GB"/>
+            <a:endParaRPr lang="en-GB">
+              <a:latin typeface="Aptos" panose="020B0004020202020204" pitchFamily="34" charset="0"/>
+            </a:endParaRPr>
           </a:p>
         </p:txBody>
       </p:sp>
@@ -11878,12 +11113,12 @@
           <a:p>
             <a:r>
               <a:rPr lang="it-IT" dirty="0" err="1">
-                <a:latin typeface="Palatino Linotype" panose="02040502050505030304" pitchFamily="18" charset="0"/>
+                <a:latin typeface="Aptos" panose="020B0004020202020204" pitchFamily="34" charset="0"/>
               </a:rPr>
               <a:t>Response</a:t>
             </a:r>
             <a:endParaRPr lang="en-GB" dirty="0">
-              <a:latin typeface="Palatino Linotype" panose="02040502050505030304" pitchFamily="18" charset="0"/>
+              <a:latin typeface="Aptos" panose="020B0004020202020204" pitchFamily="34" charset="0"/>
             </a:endParaRPr>
           </a:p>
         </p:txBody>
@@ -11948,12 +11183,12 @@
           <a:p>
             <a:r>
               <a:rPr lang="it-IT" dirty="0" err="1">
-                <a:latin typeface="Palatino Linotype" panose="02040502050505030304" pitchFamily="18" charset="0"/>
+                <a:latin typeface="Aptos" panose="020B0004020202020204" pitchFamily="34" charset="0"/>
               </a:rPr>
               <a:t>Request</a:t>
             </a:r>
             <a:endParaRPr lang="en-GB" dirty="0">
-              <a:latin typeface="Palatino Linotype" panose="02040502050505030304" pitchFamily="18" charset="0"/>
+              <a:latin typeface="Aptos" panose="020B0004020202020204" pitchFamily="34" charset="0"/>
             </a:endParaRPr>
           </a:p>
         </p:txBody>
@@ -12030,7 +11265,9 @@
           <a:lstStyle/>
           <a:p>
             <a:pPr algn="ctr"/>
-            <a:endParaRPr lang="en-GB"/>
+            <a:endParaRPr lang="en-GB">
+              <a:latin typeface="Aptos" panose="020B0004020202020204" pitchFamily="34" charset="0"/>
+            </a:endParaRPr>
           </a:p>
         </p:txBody>
       </p:sp>
@@ -12070,7 +11307,9 @@
           <a:lstStyle/>
           <a:p>
             <a:pPr algn="ctr"/>
-            <a:endParaRPr lang="en-GB"/>
+            <a:endParaRPr lang="en-GB">
+              <a:latin typeface="Aptos" panose="020B0004020202020204" pitchFamily="34" charset="0"/>
+            </a:endParaRPr>
           </a:p>
         </p:txBody>
       </p:sp>
@@ -12098,12 +11337,12 @@
           <a:p>
             <a:r>
               <a:rPr lang="it-IT" dirty="0" err="1">
-                <a:latin typeface="Palatino Linotype" panose="02040502050505030304" pitchFamily="18" charset="0"/>
+                <a:latin typeface="Aptos" panose="020B0004020202020204" pitchFamily="34" charset="0"/>
               </a:rPr>
               <a:t>Response</a:t>
             </a:r>
             <a:endParaRPr lang="en-GB" dirty="0">
-              <a:latin typeface="Palatino Linotype" panose="02040502050505030304" pitchFamily="18" charset="0"/>
+              <a:latin typeface="Aptos" panose="020B0004020202020204" pitchFamily="34" charset="0"/>
             </a:endParaRPr>
           </a:p>
         </p:txBody>
@@ -12168,12 +11407,12 @@
           <a:p>
             <a:r>
               <a:rPr lang="it-IT" dirty="0" err="1">
-                <a:latin typeface="Palatino Linotype" panose="02040502050505030304" pitchFamily="18" charset="0"/>
+                <a:latin typeface="Aptos" panose="020B0004020202020204" pitchFamily="34" charset="0"/>
               </a:rPr>
               <a:t>Request</a:t>
             </a:r>
             <a:endParaRPr lang="en-GB" dirty="0">
-              <a:latin typeface="Palatino Linotype" panose="02040502050505030304" pitchFamily="18" charset="0"/>
+              <a:latin typeface="Aptos" panose="020B0004020202020204" pitchFamily="34" charset="0"/>
             </a:endParaRPr>
           </a:p>
         </p:txBody>
@@ -12250,7 +11489,9 @@
           <a:lstStyle/>
           <a:p>
             <a:pPr algn="ctr"/>
-            <a:endParaRPr lang="en-GB"/>
+            <a:endParaRPr lang="en-GB">
+              <a:latin typeface="Aptos" panose="020B0004020202020204" pitchFamily="34" charset="0"/>
+            </a:endParaRPr>
           </a:p>
         </p:txBody>
       </p:sp>
@@ -12290,7 +11531,9 @@
           <a:lstStyle/>
           <a:p>
             <a:pPr algn="ctr"/>
-            <a:endParaRPr lang="en-GB"/>
+            <a:endParaRPr lang="en-GB">
+              <a:latin typeface="Aptos" panose="020B0004020202020204" pitchFamily="34" charset="0"/>
+            </a:endParaRPr>
           </a:p>
         </p:txBody>
       </p:sp>
@@ -12318,12 +11561,12 @@
           <a:p>
             <a:r>
               <a:rPr lang="it-IT" dirty="0" err="1">
-                <a:latin typeface="Palatino Linotype" panose="02040502050505030304" pitchFamily="18" charset="0"/>
+                <a:latin typeface="Aptos" panose="020B0004020202020204" pitchFamily="34" charset="0"/>
               </a:rPr>
               <a:t>Response</a:t>
             </a:r>
             <a:endParaRPr lang="en-GB" dirty="0">
-              <a:latin typeface="Palatino Linotype" panose="02040502050505030304" pitchFamily="18" charset="0"/>
+              <a:latin typeface="Aptos" panose="020B0004020202020204" pitchFamily="34" charset="0"/>
             </a:endParaRPr>
           </a:p>
         </p:txBody>
@@ -12351,10 +11594,14 @@
           <a:lstStyle/>
           <a:p>
             <a:r>
-              <a:rPr lang="it-IT" sz="2000" dirty="0"/>
+              <a:rPr lang="it-IT" sz="2000" dirty="0">
+                <a:latin typeface="Aptos" panose="020B0004020202020204" pitchFamily="34" charset="0"/>
+              </a:rPr>
               <a:t>…</a:t>
             </a:r>
-            <a:endParaRPr lang="en-GB" dirty="0"/>
+            <a:endParaRPr lang="en-GB" dirty="0">
+              <a:latin typeface="Aptos" panose="020B0004020202020204" pitchFamily="34" charset="0"/>
+            </a:endParaRPr>
           </a:p>
         </p:txBody>
       </p:sp>

--- a/theory_06-representational-state-transfer/theory_06-representational-state-transfer.pptx
+++ b/theory_06-representational-state-transfer/theory_06-representational-state-transfer.pptx
@@ -217,7 +217,7 @@
           <a:p>
             <a:fld id="{251090E0-FB0C-49E9-9864-9F53EABEA96F}" type="datetimeFigureOut">
               <a:rPr lang="en-GB" smtClean="0"/>
-              <a:t>31/03/2025</a:t>
+              <a:t>01/04/2025</a:t>
             </a:fld>
             <a:endParaRPr lang="en-GB"/>
           </a:p>
